--- a/docs/Presentation.pptx
+++ b/docs/Presentation.pptx
@@ -123,19 +123,19 @@
   <p:extLst>
     <p:ext uri="{521415D9-36F7-43E2-AB2F-B90AF26B5E84}">
       <p14:sectionLst xmlns:p14="http://schemas.microsoft.com/office/powerpoint/2010/main">
-        <p14:section name="Opening" id="{10af71b1-205d-994a-b255-3b875e89b0ae}">
+        <p14:section name="Opening" id="{d3bc6984-4939-37fd-01c4-c902926ee664}">
           <p14:sldIdLst>
             <p14:sldId id="256"/>
             <p14:sldId id="257"/>
           </p14:sldIdLst>
         </p14:section>
-        <p14:section name="Problem" id="{18456242-620a-62af-b974-00744fda3f96}">
+        <p14:section name="Problem" id="{a53122ac-50d1-ffa7-c5ff-99ab6b9bf030}">
           <p14:sldIdLst>
             <p14:sldId id="258"/>
             <p14:sldId id="259"/>
           </p14:sldIdLst>
         </p14:section>
-        <p14:section name="The twin" id="{eeb5a3dd-ae35-92f8-6371-c0fd2228fe37}">
+        <p14:section name="The twin" id="{dcd6e644-35de-0fae-ab18-bbaeda20c14e}">
           <p14:sldIdLst>
             <p14:sldId id="260"/>
             <p14:sldId id="261"/>
@@ -143,13 +143,13 @@
             <p14:sldId id="263"/>
           </p14:sldIdLst>
         </p14:section>
-        <p14:section name="In the clinic" id="{b661aa53-6515-d20a-19e0-59d2a60cd26b}">
+        <p14:section name="In the clinic" id="{38ba0201-9879-4bd3-dda6-06ba2a363f0e}">
           <p14:sldIdLst>
             <p14:sldId id="264"/>
             <p14:sldId id="265"/>
           </p14:sldIdLst>
         </p14:section>
-        <p14:section name="Evidence" id="{3b0f456d-714d-06ca-efa5-68d8d93c8ae2}">
+        <p14:section name="Evidence" id="{1ebd5232-a5eb-13bd-5531-25e7f76729b5}">
           <p14:sldIdLst>
             <p14:sldId id="266"/>
             <p14:sldId id="267"/>
@@ -157,17 +157,17 @@
             <p14:sldId id="269"/>
           </p14:sldIdLst>
         </p14:section>
-        <p14:section name="India" id="{e825b4e1-0ce7-5060-c3c2-2def29ef3cfd}">
+        <p14:section name="India" id="{68717554-ced1-0dc0-58ac-976ea56ab5e7}">
           <p14:sldIdLst>
             <p14:sldId id="270"/>
           </p14:sldIdLst>
         </p14:section>
-        <p14:section name="Next" id="{4398d7e6-7458-70f1-8c45-61ccee2f9b47}">
+        <p14:section name="Next" id="{4f2fa862-aee0-76dc-d97f-d41b4627eb1a}">
           <p14:sldIdLst>
             <p14:sldId id="271"/>
           </p14:sldIdLst>
         </p14:section>
-        <p14:section name="Close" id="{79aa1a9b-9f6e-dece-6de1-5387f057bca8}">
+        <p14:section name="Close" id="{50e922b0-190e-2d4d-e604-9e54ab67315e}">
           <p14:sldIdLst>
             <p14:sldId id="272"/>
           </p14:sldIdLst>
@@ -5183,7 +5183,7 @@
                 <a:ea typeface="Segoe UI" pitchFamily="34" charset="-122"/>
                 <a:cs typeface="Segoe UI" pitchFamily="34" charset="-120"/>
               </a:rPr>
-              <a:t>MadhuTwin   ·   Anish Karthik Ayyagari, IIT Kharagpur   ·   Digital Twin Challenge 2026</a:t>
+              <a:t>MadhuTwin   ·   Team BioT   ·   Anish Karthik Ayyagari, IIT Kharagpur   ·   Digital Twin Challenge 2026</a:t>
             </a:r>
             <a:endParaRPr lang="en-US" sz="900" dirty="0"/>
           </a:p>
@@ -5859,31 +5859,70 @@
         </p:nvSpPr>
         <p:spPr>
           <a:xfrm>
-            <a:off x="640080" y="5532120"/>
-            <a:ext cx="6400800" cy="320040"/>
-          </a:xfrm>
-          <a:prstGeom prst="rect">
-            <a:avLst/>
-          </a:prstGeom>
-          <a:noFill/>
-          <a:ln/>
-        </p:spPr>
-        <p:txBody>
-          <a:bodyPr wrap="square" lIns="0" tIns="0" rIns="0" bIns="0" rtlCol="0" anchor="t"/>
-          <a:lstStyle/>
-          <a:p>
-            <a:pPr indent="0" marL="0">
-              <a:buNone/>
-            </a:pPr>
-            <a:r>
-              <a:rPr lang="en-US" sz="1500" dirty="0">
-                <a:solidFill>
-                  <a:srgbClr val="FFFFFF"/>
+            <a:off x="640080" y="5193792"/>
+            <a:ext cx="6400800" cy="256032"/>
+          </a:xfrm>
+          <a:prstGeom prst="rect">
+            <a:avLst/>
+          </a:prstGeom>
+          <a:noFill/>
+          <a:ln/>
+        </p:spPr>
+        <p:txBody>
+          <a:bodyPr wrap="square" lIns="0" tIns="0" rIns="0" bIns="0" rtlCol="0" anchor="t"/>
+          <a:lstStyle/>
+          <a:p>
+            <a:pPr indent="0" marL="0">
+              <a:buNone/>
+            </a:pPr>
+            <a:r>
+              <a:rPr lang="en-US" sz="1050" spc="300" kern="0" dirty="0">
+                <a:solidFill>
+                  <a:srgbClr val="E7B04B"/>
                 </a:solidFill>
                 <a:latin typeface="Segoe UI Semibold" pitchFamily="34" charset="0"/>
                 <a:ea typeface="Segoe UI Semibold" pitchFamily="34" charset="-122"/>
                 <a:cs typeface="Segoe UI Semibold" pitchFamily="34" charset="-120"/>
               </a:rPr>
+              <a:t>TEAM BIOT</a:t>
+            </a:r>
+            <a:endParaRPr lang="en-US" sz="1050" dirty="0"/>
+          </a:p>
+        </p:txBody>
+      </p:sp>
+      <p:sp>
+        <p:nvSpPr>
+          <p:cNvPr id="7" name="Text 4"/>
+          <p:cNvSpPr txBox="1"/>
+          <p:nvPr/>
+        </p:nvSpPr>
+        <p:spPr>
+          <a:xfrm>
+            <a:off x="640080" y="5532120"/>
+            <a:ext cx="6400800" cy="320040"/>
+          </a:xfrm>
+          <a:prstGeom prst="rect">
+            <a:avLst/>
+          </a:prstGeom>
+          <a:noFill/>
+          <a:ln/>
+        </p:spPr>
+        <p:txBody>
+          <a:bodyPr wrap="square" lIns="0" tIns="0" rIns="0" bIns="0" rtlCol="0" anchor="t"/>
+          <a:lstStyle/>
+          <a:p>
+            <a:pPr indent="0" marL="0">
+              <a:buNone/>
+            </a:pPr>
+            <a:r>
+              <a:rPr lang="en-US" sz="1500" dirty="0">
+                <a:solidFill>
+                  <a:srgbClr val="FFFFFF"/>
+                </a:solidFill>
+                <a:latin typeface="Segoe UI Semibold" pitchFamily="34" charset="0"/>
+                <a:ea typeface="Segoe UI Semibold" pitchFamily="34" charset="-122"/>
+                <a:cs typeface="Segoe UI Semibold" pitchFamily="34" charset="-120"/>
+              </a:rPr>
               <a:t>Anish Karthik Ayyagari</a:t>
             </a:r>
             <a:endParaRPr lang="en-US" sz="1500" dirty="0"/>
@@ -5892,7 +5931,7 @@
       </p:sp>
       <p:sp>
         <p:nvSpPr>
-          <p:cNvPr id="7" name="Text 4"/>
+          <p:cNvPr id="8" name="Text 5"/>
           <p:cNvSpPr txBox="1"/>
           <p:nvPr/>
         </p:nvSpPr>
@@ -5931,7 +5970,7 @@
       </p:sp>
       <p:sp>
         <p:nvSpPr>
-          <p:cNvPr id="8" name="Text 5"/>
+          <p:cNvPr id="9" name="Text 6"/>
           <p:cNvSpPr txBox="1"/>
           <p:nvPr/>
         </p:nvSpPr>
@@ -10088,7 +10127,7 @@
                 <a:ea typeface="Segoe UI" pitchFamily="34" charset="-122"/>
                 <a:cs typeface="Segoe UI" pitchFamily="34" charset="-120"/>
               </a:rPr>
-              <a:t>Anish Karthik Ayyagari   ·   Indian Institute of Technology Kharagpur</a:t>
+              <a:t>Team BioT   ·   Anish Karthik Ayyagari   ·   Indian Institute of Technology Kharagpur</a:t>
             </a:r>
             <a:endParaRPr lang="en-US" sz="1500" dirty="0"/>
           </a:p>
@@ -10178,7 +10217,7 @@
                 <a:ea typeface="Segoe UI Semibold" pitchFamily="34" charset="-122"/>
                 <a:cs typeface="Segoe UI Semibold" pitchFamily="34" charset="-120"/>
               </a:rPr>
-              <a:t>THE BUILDER</a:t>
+              <a:t>TEAM BIOT</a:t>
             </a:r>
             <a:endParaRPr lang="en-US" sz="1050" dirty="0"/>
           </a:p>

--- a/docs/Presentation.pptx
+++ b/docs/Presentation.pptx
@@ -123,19 +123,19 @@
   <p:extLst>
     <p:ext uri="{521415D9-36F7-43E2-AB2F-B90AF26B5E84}">
       <p14:sectionLst xmlns:p14="http://schemas.microsoft.com/office/powerpoint/2010/main">
-        <p14:section name="Opening" id="{d3bc6984-4939-37fd-01c4-c902926ee664}">
+        <p14:section name="Opening" id="{8ee3164f-b93b-b7dd-e8dd-4d0d212a5425}">
           <p14:sldIdLst>
             <p14:sldId id="256"/>
             <p14:sldId id="257"/>
           </p14:sldIdLst>
         </p14:section>
-        <p14:section name="Problem" id="{a53122ac-50d1-ffa7-c5ff-99ab6b9bf030}">
+        <p14:section name="Problem" id="{93d529ef-6abd-e69d-629d-9ab4a52e5a36}">
           <p14:sldIdLst>
             <p14:sldId id="258"/>
             <p14:sldId id="259"/>
           </p14:sldIdLst>
         </p14:section>
-        <p14:section name="The twin" id="{dcd6e644-35de-0fae-ab18-bbaeda20c14e}">
+        <p14:section name="The twin" id="{d967e55e-9415-741e-de7f-2eab8a3a21be}">
           <p14:sldIdLst>
             <p14:sldId id="260"/>
             <p14:sldId id="261"/>
@@ -143,13 +143,13 @@
             <p14:sldId id="263"/>
           </p14:sldIdLst>
         </p14:section>
-        <p14:section name="In the clinic" id="{38ba0201-9879-4bd3-dda6-06ba2a363f0e}">
+        <p14:section name="In the clinic" id="{ef0cd982-7178-7c35-77bd-80e5b73e5226}">
           <p14:sldIdLst>
             <p14:sldId id="264"/>
             <p14:sldId id="265"/>
           </p14:sldIdLst>
         </p14:section>
-        <p14:section name="Evidence" id="{1ebd5232-a5eb-13bd-5531-25e7f76729b5}">
+        <p14:section name="Evidence" id="{8ffa6d1d-e6b7-f5df-e5e5-e35cdab771be}">
           <p14:sldIdLst>
             <p14:sldId id="266"/>
             <p14:sldId id="267"/>
@@ -157,17 +157,17 @@
             <p14:sldId id="269"/>
           </p14:sldIdLst>
         </p14:section>
-        <p14:section name="India" id="{68717554-ced1-0dc0-58ac-976ea56ab5e7}">
+        <p14:section name="India" id="{e0743426-52d3-8b3e-7041-1cd19e7fe7e6}">
           <p14:sldIdLst>
             <p14:sldId id="270"/>
           </p14:sldIdLst>
         </p14:section>
-        <p14:section name="Next" id="{4f2fa862-aee0-76dc-d97f-d41b4627eb1a}">
+        <p14:section name="Next" id="{9ec93612-a703-758f-c220-f30b55c8236a}">
           <p14:sldIdLst>
             <p14:sldId id="271"/>
           </p14:sldIdLst>
         </p14:section>
-        <p14:section name="Close" id="{50e922b0-190e-2d4d-e604-9e54ab67315e}">
+        <p14:section name="Close" id="{5bc85a1e-0023-f1c4-348e-ab4ca90fadce}">
           <p14:sldIdLst>
             <p14:sldId id="272"/>
           </p14:sldIdLst>

--- a/docs/Presentation.pptx
+++ b/docs/Presentation.pptx
@@ -22,9 +22,10 @@
     <p:sldId id="270" r:id="rId16"/>
     <p:sldId id="271" r:id="rId17"/>
     <p:sldId id="272" r:id="rId18"/>
+    <p:sldId id="273" r:id="rId19"/>
   </p:sldIdLst>
   <p:notesMasterIdLst>
-    <p:notesMasterId r:id="rId19"/>
+    <p:notesMasterId r:id="rId20"/>
   </p:notesMasterIdLst>
   <p:sldSz cx="12192000" cy="6858000"/>
   <p:notesSz cx="6858000" cy="12192000"/>
@@ -123,19 +124,19 @@
   <p:extLst>
     <p:ext uri="{521415D9-36F7-43E2-AB2F-B90AF26B5E84}">
       <p14:sectionLst xmlns:p14="http://schemas.microsoft.com/office/powerpoint/2010/main">
-        <p14:section name="Opening" id="{8ee3164f-b93b-b7dd-e8dd-4d0d212a5425}">
+        <p14:section name="Opening" id="{39ab578a-5032-c49b-1d99-08bd232643c0}">
           <p14:sldIdLst>
             <p14:sldId id="256"/>
             <p14:sldId id="257"/>
           </p14:sldIdLst>
         </p14:section>
-        <p14:section name="Problem" id="{93d529ef-6abd-e69d-629d-9ab4a52e5a36}">
+        <p14:section name="Problem" id="{4ca43d6e-fcb9-7e38-e44d-e3127700318a}">
           <p14:sldIdLst>
             <p14:sldId id="258"/>
             <p14:sldId id="259"/>
           </p14:sldIdLst>
         </p14:section>
-        <p14:section name="The twin" id="{d967e55e-9415-741e-de7f-2eab8a3a21be}">
+        <p14:section name="The twin" id="{8806a3ea-7a35-6c04-ecf0-666e1a98915f}">
           <p14:sldIdLst>
             <p14:sldId id="260"/>
             <p14:sldId id="261"/>
@@ -143,33 +144,34 @@
             <p14:sldId id="263"/>
           </p14:sldIdLst>
         </p14:section>
-        <p14:section name="In the clinic" id="{ef0cd982-7178-7c35-77bd-80e5b73e5226}">
+        <p14:section name="In the clinic" id="{b02d4384-4a2f-5d9d-a336-106df3f536d5}">
           <p14:sldIdLst>
             <p14:sldId id="264"/>
             <p14:sldId id="265"/>
+            <p14:sldId id="266"/>
           </p14:sldIdLst>
         </p14:section>
-        <p14:section name="Evidence" id="{8ffa6d1d-e6b7-f5df-e5e5-e35cdab771be}">
+        <p14:section name="Evidence" id="{d1770f61-f8ee-0e91-a0b5-992c98123dbf}">
           <p14:sldIdLst>
-            <p14:sldId id="266"/>
             <p14:sldId id="267"/>
             <p14:sldId id="268"/>
             <p14:sldId id="269"/>
-          </p14:sldIdLst>
-        </p14:section>
-        <p14:section name="India" id="{e0743426-52d3-8b3e-7041-1cd19e7fe7e6}">
-          <p14:sldIdLst>
             <p14:sldId id="270"/>
           </p14:sldIdLst>
         </p14:section>
-        <p14:section name="Next" id="{9ec93612-a703-758f-c220-f30b55c8236a}">
+        <p14:section name="India" id="{b757b3ab-23ad-224c-2dde-7edfd31abfd5}">
           <p14:sldIdLst>
             <p14:sldId id="271"/>
           </p14:sldIdLst>
         </p14:section>
-        <p14:section name="Close" id="{5bc85a1e-0023-f1c4-348e-ab4ca90fadce}">
+        <p14:section name="Next" id="{b5da0390-eb60-944e-cde8-c7ab2efe90e7}">
           <p14:sldIdLst>
             <p14:sldId id="272"/>
+          </p14:sldIdLst>
+        </p14:section>
+        <p14:section name="Close" id="{2f7964dd-0095-d1b7-7a07-501c6e84cf6d}">
+          <p14:sldIdLst>
+            <p14:sldId id="273"/>
           </p14:sldIdLst>
         </p14:section>
       </p14:sectionLst>
@@ -3664,7 +3666,7 @@
           <a:p>
             <a:r>
               <a:rPr lang="en-US" dirty="0"/>
-              <a:t/>
+              <a:t>Show New patient live: Load sample patient, Build twin, then Open twin.</a:t>
             </a:r>
             <a:endParaRPr lang="en-US" dirty="0"/>
           </a:p>
@@ -4216,6 +4218,94 @@
             <a:fld id="{F7021451-1387-4CA6-816F-3879F97B5CBC}" type="slidenum">
               <a:rPr lang="en-US"/>
               <a:t>17</a:t>
+            </a:fld>
+            <a:endParaRPr lang="en-US"/>
+          </a:p>
+        </p:txBody>
+      </p:sp>
+    </p:spTree>
+    <p:extLst>
+      <p:ext uri="{BB962C8B-B14F-4D97-AF65-F5344CB8AC3E}">
+        <p14:creationId xmlns:p14="http://schemas.microsoft.com/office/powerpoint/2010/main" val="1024086991"/>
+      </p:ext>
+    </p:extLst>
+  </p:cSld>
+  <p:clrMapOvr>
+    <a:masterClrMapping/>
+  </p:clrMapOvr>
+</p:notes>
+</file>
+
+<file path=ppt/notesSlides/notesSlide18.xml><?xml version="1.0" encoding="utf-8"?>
+<p:notes xmlns:a="http://schemas.openxmlformats.org/drawingml/2006/main" xmlns:r="http://schemas.openxmlformats.org/officeDocument/2006/relationships" xmlns:p="http://schemas.openxmlformats.org/presentationml/2006/main">
+  <p:cSld>
+    <p:spTree>
+      <p:nvGrpSpPr>
+        <p:cNvPr id="1" name=""/>
+        <p:cNvGrpSpPr/>
+        <p:nvPr/>
+      </p:nvGrpSpPr>
+      <p:grpSpPr>
+        <a:xfrm>
+          <a:off x="0" y="0"/>
+          <a:ext cx="0" cy="0"/>
+          <a:chOff x="0" y="0"/>
+          <a:chExt cx="0" cy="0"/>
+        </a:xfrm>
+      </p:grpSpPr>
+      <p:sp>
+        <p:nvSpPr>
+          <p:cNvPr id="2" name="Slide Image Placeholder 1"/>
+          <p:cNvSpPr>
+            <a:spLocks noGrp="1" noRot="1" noChangeAspect="1"/>
+          </p:cNvSpPr>
+          <p:nvPr>
+            <p:ph type="sldImg"/>
+          </p:nvPr>
+        </p:nvSpPr>
+        <p:spPr/>
+      </p:sp>
+      <p:sp>
+        <p:nvSpPr>
+          <p:cNvPr id="3" name="Notes Placeholder 2"/>
+          <p:cNvSpPr>
+            <a:spLocks noGrp="1"/>
+          </p:cNvSpPr>
+          <p:nvPr>
+            <p:ph type="body" idx="1"/>
+          </p:nvPr>
+        </p:nvSpPr>
+        <p:spPr/>
+        <p:txBody>
+          <a:bodyPr/>
+          <a:lstStyle/>
+          <a:p>
+            <a:r>
+              <a:rPr lang="en-US" dirty="0"/>
+              <a:t/>
+            </a:r>
+            <a:endParaRPr lang="en-US" dirty="0"/>
+          </a:p>
+        </p:txBody>
+      </p:sp>
+      <p:sp>
+        <p:nvSpPr>
+          <p:cNvPr id="4" name="Slide Number Placeholder 3"/>
+          <p:cNvSpPr>
+            <a:spLocks noGrp="1"/>
+          </p:cNvSpPr>
+          <p:nvPr>
+            <p:ph type="sldNum" sz="quarter" idx="10"/>
+          </p:nvPr>
+        </p:nvSpPr>
+        <p:spPr/>
+        <p:txBody>
+          <a:bodyPr/>
+          <a:lstStyle/>
+          <a:p>
+            <a:fld id="{F7021451-1387-4CA6-816F-3879F97B5CBC}" type="slidenum">
+              <a:rPr lang="en-US"/>
+              <a:t>18</a:t>
             </a:fld>
             <a:endParaRPr lang="en-US"/>
           </a:p>
@@ -6544,7 +6634,7 @@
                 <a:ea typeface="Segoe UI Semibold" pitchFamily="34" charset="-122"/>
                 <a:cs typeface="Segoe UI Semibold" pitchFamily="34" charset="-120"/>
               </a:rPr>
-              <a:t>04   EVIDENCE</a:t>
+              <a:t>03   IN THE CLINIC</a:t>
             </a:r>
             <a:endParaRPr lang="en-US" sz="1050" dirty="0"/>
           </a:p>
@@ -6585,121 +6675,50 @@
                 <a:ea typeface="Georgia" pitchFamily="34" charset="-122"/>
                 <a:cs typeface="Georgia" pitchFamily="34" charset="-120"/>
               </a:rPr>
-              <a:t>On unseen real patients, two-hour error is 27 % below persistence</a:t>
+              <a:t>Day zero: a new patient's twin, built in seconds</a:t>
             </a:r>
             <a:endParaRPr lang="en-US" sz="2700" dirty="0"/>
           </a:p>
         </p:txBody>
       </p:sp>
-      <p:sp>
-        <p:nvSpPr>
-          <p:cNvPr id="4" name="Text 2"/>
-          <p:cNvSpPr txBox="1"/>
-          <p:nvPr/>
-        </p:nvSpPr>
-        <p:spPr>
-          <a:xfrm>
-            <a:off x="640080" y="1828800"/>
-            <a:ext cx="6766560" cy="274320"/>
-          </a:xfrm>
-          <a:prstGeom prst="rect">
-            <a:avLst/>
-          </a:prstGeom>
-          <a:noFill/>
-          <a:ln/>
-        </p:spPr>
-        <p:txBody>
-          <a:bodyPr wrap="square" lIns="0" tIns="0" rIns="0" bIns="0" rtlCol="0" anchor="t"/>
-          <a:lstStyle/>
-          <a:p>
-            <a:pPr indent="0" marL="0">
-              <a:buNone/>
-            </a:pPr>
-            <a:r>
-              <a:rPr lang="en-US" sz="1200" dirty="0">
-                <a:solidFill>
-                  <a:srgbClr val="14213D"/>
-                </a:solidFill>
-                <a:latin typeface="Segoe UI Semibold" pitchFamily="34" charset="0"/>
-                <a:ea typeface="Segoe UI Semibold" pitchFamily="34" charset="-122"/>
-                <a:cs typeface="Segoe UI Semibold" pitchFamily="34" charset="-120"/>
-              </a:rPr>
-              <a:t>Forecast RMSE on unseen CGMacros patients, mg/dL (lower is better)</a:t>
-            </a:r>
-            <a:endParaRPr lang="en-US" sz="1200" dirty="0"/>
-          </a:p>
-        </p:txBody>
-      </p:sp>
-      <p:graphicFrame>
-        <p:nvGraphicFramePr>
-          <p:cNvPr id="5" name="Chart 0" descr=""/>
-          <p:cNvGraphicFramePr/>
-          <p:nvPr/>
-        </p:nvGraphicFramePr>
-        <p:xfrm>
-          <a:off x="548640" y="2148840"/>
-          <a:ext cx="6949440" cy="3429000"/>
-        </p:xfrm>
-        <a:graphic xmlns:a="http://schemas.openxmlformats.org/drawingml/2006/main">
-          <a:graphicData uri="http://schemas.openxmlformats.org/drawingml/2006/chart">
-            <c:chart xmlns:c="http://schemas.openxmlformats.org/drawingml/2006/chart" r:id="rId1"/>
-          </a:graphicData>
-        </a:graphic>
-      </p:graphicFrame>
-      <p:sp>
-        <p:nvSpPr>
-          <p:cNvPr id="6" name="Text 3"/>
-          <p:cNvSpPr txBox="1"/>
-          <p:nvPr/>
-        </p:nvSpPr>
-        <p:spPr>
-          <a:xfrm>
-            <a:off x="640080" y="5669280"/>
-            <a:ext cx="6766560" cy="457200"/>
-          </a:xfrm>
-          <a:prstGeom prst="rect">
-            <a:avLst/>
-          </a:prstGeom>
-          <a:noFill/>
-          <a:ln/>
-        </p:spPr>
-        <p:txBody>
-          <a:bodyPr wrap="square" lIns="0" tIns="0" rIns="0" bIns="0" rtlCol="0" anchor="t"/>
-          <a:lstStyle/>
-          <a:p>
-            <a:pPr indent="0" marL="0">
-              <a:buNone/>
-            </a:pPr>
-            <a:r>
-              <a:rPr lang="en-US" sz="1000" dirty="0">
-                <a:solidFill>
-                  <a:srgbClr val="9AA3AF"/>
-                </a:solidFill>
-                <a:latin typeface="Segoe UI" pitchFamily="34" charset="0"/>
-                <a:ea typeface="Segoe UI" pitchFamily="34" charset="-122"/>
-                <a:cs typeface="Segoe UI" pitchFamily="34" charset="-120"/>
-              </a:rPr>
-              <a:t>45 adults with CGM, Fitbit, meals and labs · 5-fold leave-patients-out · twins personalised only on each patient's first days · 311 unseen patient-days · native sensor samples only</a:t>
-            </a:r>
-            <a:endParaRPr lang="en-US" sz="1000" dirty="0"/>
-          </a:p>
-        </p:txBody>
-      </p:sp>
-      <p:sp>
-        <p:nvSpPr>
-          <p:cNvPr id="7" name="rule"/>
+      <p:pic>
+        <p:nvPicPr>
+          <p:cNvPr id="4" name="new patient screenshot" descr="C:\Users\Venkatsa0210\Desktop\Coding\Digital Twin Challenge\MadhuTwin\docs\build\crops\onboard_result.png">    </p:cNvPr>
+          <p:cNvPicPr>
+            <a:picLocks noChangeAspect="1"/>
+          </p:cNvPicPr>
+          <p:nvPr/>
+        </p:nvPicPr>
+        <p:blipFill>
+          <a:blip r:embed="rId1"/>
+          <a:stretch>
+            <a:fillRect/>
+          </a:stretch>
+        </p:blipFill>
+        <p:spPr>
+          <a:xfrm>
+            <a:off x="640080" y="1783080"/>
+            <a:ext cx="5760720" cy="4069080"/>
+          </a:xfrm>
+          <a:prstGeom prst="rect">
+            <a:avLst/>
+          </a:prstGeom>
+        </p:spPr>
+      </p:pic>
+      <p:sp>
+        <p:nvSpPr>
+          <p:cNvPr id="5" name="new patient screenshot frame"/>
           <p:cNvSpPr/>
           <p:nvPr/>
         </p:nvSpPr>
         <p:spPr>
           <a:xfrm>
-            <a:off x="7818120" y="1874520"/>
-            <a:ext cx="0" cy="4069080"/>
-          </a:xfrm>
-          <a:prstGeom prst="line">
-            <a:avLst/>
-          </a:prstGeom>
-          <a:noFill/>
+            <a:off x="640080" y="1783080"/>
+            <a:ext cx="5760720" cy="4069080"/>
+          </a:xfrm>
+          <a:prstGeom prst="rect">
+            <a:avLst/>
+          </a:prstGeom>
           <a:ln w="9525">
             <a:solidFill>
               <a:srgbClr val="D9DEE5"/>
@@ -6710,40 +6729,118 @@
       </p:sp>
       <p:sp>
         <p:nvSpPr>
-          <p:cNvPr id="8" name="Text 5"/>
-          <p:cNvSpPr txBox="1"/>
-          <p:nvPr/>
-        </p:nvSpPr>
-        <p:spPr>
-          <a:xfrm>
-            <a:off x="8183880" y="1783080"/>
-            <a:ext cx="3364992" cy="731520"/>
-          </a:xfrm>
-          <a:prstGeom prst="rect">
-            <a:avLst/>
-          </a:prstGeom>
-          <a:noFill/>
-          <a:ln/>
-        </p:spPr>
-        <p:txBody>
-          <a:bodyPr wrap="square" lIns="0" tIns="0" rIns="0" bIns="0" rtlCol="0" anchor="b"/>
-          <a:lstStyle/>
-          <a:p>
-            <a:pPr indent="0" marL="0">
-              <a:buNone/>
-            </a:pPr>
-            <a:r>
-              <a:rPr lang="en-US" sz="3600" dirty="0">
-                <a:solidFill>
-                  <a:srgbClr val="2A78D6"/>
+          <p:cNvPr id="6" name="Text 3"/>
+          <p:cNvSpPr txBox="1"/>
+          <p:nvPr/>
+        </p:nvSpPr>
+        <p:spPr>
+          <a:xfrm>
+            <a:off x="640080" y="5943600"/>
+            <a:ext cx="5760720" cy="274320"/>
+          </a:xfrm>
+          <a:prstGeom prst="rect">
+            <a:avLst/>
+          </a:prstGeom>
+          <a:noFill/>
+          <a:ln/>
+        </p:spPr>
+        <p:txBody>
+          <a:bodyPr wrap="square" lIns="0" tIns="0" rIns="0" bIns="0" rtlCol="0" anchor="t"/>
+          <a:lstStyle/>
+          <a:p>
+            <a:pPr indent="0" marL="0">
+              <a:buNone/>
+            </a:pPr>
+            <a:r>
+              <a:rPr lang="en-US" sz="1000" dirty="0">
+                <a:solidFill>
+                  <a:srgbClr val="9AA3AF"/>
+                </a:solidFill>
+                <a:latin typeface="Segoe UI" pitchFamily="34" charset="0"/>
+                <a:ea typeface="Segoe UI" pitchFamily="34" charset="-122"/>
+                <a:cs typeface="Segoe UI" pitchFamily="34" charset="-120"/>
+              </a:rPr>
+              <a:t>Sunita, 60, Lucknow: a fictional sample upload that no model has seen. Built in about two seconds.</a:t>
+            </a:r>
+            <a:endParaRPr lang="en-US" sz="1000" dirty="0"/>
+          </a:p>
+        </p:txBody>
+      </p:sp>
+      <p:sp>
+        <p:nvSpPr>
+          <p:cNvPr id="7" name="Text 4"/>
+          <p:cNvSpPr txBox="1"/>
+          <p:nvPr/>
+        </p:nvSpPr>
+        <p:spPr>
+          <a:xfrm>
+            <a:off x="6903720" y="1783080"/>
+            <a:ext cx="457200" cy="292608"/>
+          </a:xfrm>
+          <a:prstGeom prst="rect">
+            <a:avLst/>
+          </a:prstGeom>
+          <a:noFill/>
+          <a:ln/>
+        </p:spPr>
+        <p:txBody>
+          <a:bodyPr wrap="square" lIns="0" tIns="0" rIns="0" bIns="0" rtlCol="0" anchor="t"/>
+          <a:lstStyle/>
+          <a:p>
+            <a:pPr indent="0" marL="0">
+              <a:buNone/>
+            </a:pPr>
+            <a:r>
+              <a:rPr lang="en-US" sz="1500" dirty="0">
+                <a:solidFill>
+                  <a:srgbClr val="B97A12"/>
                 </a:solidFill>
                 <a:latin typeface="Georgia" pitchFamily="34" charset="0"/>
                 <a:ea typeface="Georgia" pitchFamily="34" charset="-122"/>
                 <a:cs typeface="Georgia" pitchFamily="34" charset="-120"/>
               </a:rPr>
-              <a:t>28.2 mg/dL</a:t>
-            </a:r>
-            <a:endParaRPr lang="en-US" sz="3600" dirty="0"/>
+              <a:t>1</a:t>
+            </a:r>
+            <a:endParaRPr lang="en-US" sz="1500" dirty="0"/>
+          </a:p>
+        </p:txBody>
+      </p:sp>
+      <p:sp>
+        <p:nvSpPr>
+          <p:cNvPr id="8" name="Text 5"/>
+          <p:cNvSpPr txBox="1"/>
+          <p:nvPr/>
+        </p:nvSpPr>
+        <p:spPr>
+          <a:xfrm>
+            <a:off x="7360920" y="1783080"/>
+            <a:ext cx="4190695" cy="310896"/>
+          </a:xfrm>
+          <a:prstGeom prst="rect">
+            <a:avLst/>
+          </a:prstGeom>
+          <a:noFill/>
+          <a:ln/>
+        </p:spPr>
+        <p:txBody>
+          <a:bodyPr wrap="square" lIns="0" tIns="0" rIns="0" bIns="0" rtlCol="0" anchor="t"/>
+          <a:lstStyle/>
+          <a:p>
+            <a:pPr indent="0" marL="0">
+              <a:buNone/>
+            </a:pPr>
+            <a:r>
+              <a:rPr lang="en-US" sz="1500" dirty="0">
+                <a:solidFill>
+                  <a:srgbClr val="14213D"/>
+                </a:solidFill>
+                <a:latin typeface="Segoe UI Semibold" pitchFamily="34" charset="0"/>
+                <a:ea typeface="Segoe UI Semibold" pitchFamily="34" charset="-122"/>
+                <a:cs typeface="Segoe UI Semibold" pitchFamily="34" charset="-120"/>
+              </a:rPr>
+              <a:t>Upload</a:t>
+            </a:r>
+            <a:endParaRPr lang="en-US" sz="1500" dirty="0"/>
           </a:p>
         </p:txBody>
       </p:sp>
@@ -6755,34 +6852,34 @@
         </p:nvSpPr>
         <p:spPr>
           <a:xfrm>
-            <a:off x="8183880" y="2587752"/>
-            <a:ext cx="3364992" cy="640080"/>
-          </a:xfrm>
-          <a:prstGeom prst="rect">
-            <a:avLst/>
-          </a:prstGeom>
-          <a:noFill/>
-          <a:ln/>
-        </p:spPr>
-        <p:txBody>
-          <a:bodyPr wrap="square" lIns="0" tIns="0" rIns="0" bIns="0" rtlCol="0" anchor="t"/>
-          <a:lstStyle/>
-          <a:p>
-            <a:pPr indent="0" marL="0">
-              <a:buNone/>
-            </a:pPr>
-            <a:r>
-              <a:rPr lang="en-US" sz="1200" dirty="0">
-                <a:solidFill>
-                  <a:srgbClr val="6B7280"/>
+            <a:off x="7360920" y="2130552"/>
+            <a:ext cx="4190695" cy="868680"/>
+          </a:xfrm>
+          <a:prstGeom prst="rect">
+            <a:avLst/>
+          </a:prstGeom>
+          <a:noFill/>
+          <a:ln/>
+        </p:spPr>
+        <p:txBody>
+          <a:bodyPr wrap="square" lIns="0" tIns="0" rIns="0" bIns="0" rtlCol="0" anchor="t"/>
+          <a:lstStyle/>
+          <a:p>
+            <a:pPr indent="0" marL="0">
+              <a:buNone/>
+            </a:pPr>
+            <a:r>
+              <a:rPr lang="en-US" sz="1300" dirty="0">
+                <a:solidFill>
+                  <a:srgbClr val="2A2F36"/>
                 </a:solidFill>
                 <a:latin typeface="Segoe UI" pitchFamily="34" charset="0"/>
                 <a:ea typeface="Segoe UI" pitchFamily="34" charset="-122"/>
                 <a:cs typeface="Segoe UI" pitchFamily="34" charset="-120"/>
               </a:rPr>
-              <a:t>two-hour RMSE, vs 38.5 for persistence</a:t>
-            </a:r>
-            <a:endParaRPr lang="en-US" sz="1200" dirty="0"/>
+              <a:t>A CGM or smartwatch CSV export and a short record. Age, weight and HbA1c are enough to start.</a:t>
+            </a:r>
+            <a:endParaRPr lang="en-US" sz="1300" dirty="0"/>
           </a:p>
         </p:txBody>
       </p:sp>
@@ -6794,8 +6891,8 @@
         </p:nvSpPr>
         <p:spPr>
           <a:xfrm>
-            <a:off x="8183880" y="3291840"/>
-            <a:ext cx="3364992" cy="0"/>
+            <a:off x="7360920" y="2953512"/>
+            <a:ext cx="4190695" cy="0"/>
           </a:xfrm>
           <a:prstGeom prst="line">
             <a:avLst/>
@@ -6817,34 +6914,34 @@
         </p:nvSpPr>
         <p:spPr>
           <a:xfrm>
-            <a:off x="8183880" y="3429000"/>
-            <a:ext cx="3364992" cy="731520"/>
-          </a:xfrm>
-          <a:prstGeom prst="rect">
-            <a:avLst/>
-          </a:prstGeom>
-          <a:noFill/>
-          <a:ln/>
-        </p:spPr>
-        <p:txBody>
-          <a:bodyPr wrap="square" lIns="0" tIns="0" rIns="0" bIns="0" rtlCol="0" anchor="b"/>
-          <a:lstStyle/>
-          <a:p>
-            <a:pPr indent="0" marL="0">
-              <a:buNone/>
-            </a:pPr>
-            <a:r>
-              <a:rPr lang="en-US" sz="3600" dirty="0">
-                <a:solidFill>
-                  <a:srgbClr val="14213D"/>
+            <a:off x="6903720" y="3108960"/>
+            <a:ext cx="457200" cy="292608"/>
+          </a:xfrm>
+          <a:prstGeom prst="rect">
+            <a:avLst/>
+          </a:prstGeom>
+          <a:noFill/>
+          <a:ln/>
+        </p:spPr>
+        <p:txBody>
+          <a:bodyPr wrap="square" lIns="0" tIns="0" rIns="0" bIns="0" rtlCol="0" anchor="t"/>
+          <a:lstStyle/>
+          <a:p>
+            <a:pPr indent="0" marL="0">
+              <a:buNone/>
+            </a:pPr>
+            <a:r>
+              <a:rPr lang="en-US" sz="1500" dirty="0">
+                <a:solidFill>
+                  <a:srgbClr val="B97A12"/>
                 </a:solidFill>
                 <a:latin typeface="Georgia" pitchFamily="34" charset="0"/>
                 <a:ea typeface="Georgia" pitchFamily="34" charset="-122"/>
                 <a:cs typeface="Georgia" pitchFamily="34" charset="-120"/>
               </a:rPr>
-              <a:t>99.0 %</a:t>
-            </a:r>
-            <a:endParaRPr lang="en-US" sz="3600" dirty="0"/>
+              <a:t>2</a:t>
+            </a:r>
+            <a:endParaRPr lang="en-US" sz="1500" dirty="0"/>
           </a:p>
         </p:txBody>
       </p:sp>
@@ -6856,47 +6953,86 @@
         </p:nvSpPr>
         <p:spPr>
           <a:xfrm>
-            <a:off x="8183880" y="4233672"/>
-            <a:ext cx="3364992" cy="640080"/>
-          </a:xfrm>
-          <a:prstGeom prst="rect">
-            <a:avLst/>
-          </a:prstGeom>
-          <a:noFill/>
-          <a:ln/>
-        </p:spPr>
-        <p:txBody>
-          <a:bodyPr wrap="square" lIns="0" tIns="0" rIns="0" bIns="0" rtlCol="0" anchor="t"/>
-          <a:lstStyle/>
-          <a:p>
-            <a:pPr indent="0" marL="0">
-              <a:buNone/>
-            </a:pPr>
-            <a:r>
-              <a:rPr lang="en-US" sz="1200" dirty="0">
-                <a:solidFill>
-                  <a:srgbClr val="6B7280"/>
+            <a:off x="7360920" y="3108960"/>
+            <a:ext cx="4190695" cy="310896"/>
+          </a:xfrm>
+          <a:prstGeom prst="rect">
+            <a:avLst/>
+          </a:prstGeom>
+          <a:noFill/>
+          <a:ln/>
+        </p:spPr>
+        <p:txBody>
+          <a:bodyPr wrap="square" lIns="0" tIns="0" rIns="0" bIns="0" rtlCol="0" anchor="t"/>
+          <a:lstStyle/>
+          <a:p>
+            <a:pPr indent="0" marL="0">
+              <a:buNone/>
+            </a:pPr>
+            <a:r>
+              <a:rPr lang="en-US" sz="1500" dirty="0">
+                <a:solidFill>
+                  <a:srgbClr val="14213D"/>
+                </a:solidFill>
+                <a:latin typeface="Segoe UI Semibold" pitchFamily="34" charset="0"/>
+                <a:ea typeface="Segoe UI Semibold" pitchFamily="34" charset="-122"/>
+                <a:cs typeface="Segoe UI Semibold" pitchFamily="34" charset="-120"/>
+              </a:rPr>
+              <a:t>Personalise</a:t>
+            </a:r>
+            <a:endParaRPr lang="en-US" sz="1500" dirty="0"/>
+          </a:p>
+        </p:txBody>
+      </p:sp>
+      <p:sp>
+        <p:nvSpPr>
+          <p:cNvPr id="13" name="Text 10"/>
+          <p:cNvSpPr txBox="1"/>
+          <p:nvPr/>
+        </p:nvSpPr>
+        <p:spPr>
+          <a:xfrm>
+            <a:off x="7360920" y="3456432"/>
+            <a:ext cx="4190695" cy="868680"/>
+          </a:xfrm>
+          <a:prstGeom prst="rect">
+            <a:avLst/>
+          </a:prstGeom>
+          <a:noFill/>
+          <a:ln/>
+        </p:spPr>
+        <p:txBody>
+          <a:bodyPr wrap="square" lIns="0" tIns="0" rIns="0" bIns="0" rtlCol="0" anchor="t"/>
+          <a:lstStyle/>
+          <a:p>
+            <a:pPr indent="0" marL="0">
+              <a:buNone/>
+            </a:pPr>
+            <a:r>
+              <a:rPr lang="en-US" sz="1300" dirty="0">
+                <a:solidFill>
+                  <a:srgbClr val="2A2F36"/>
                 </a:solidFill>
                 <a:latin typeface="Segoe UI" pitchFamily="34" charset="0"/>
                 <a:ea typeface="Segoe UI" pitchFamily="34" charset="-122"/>
                 <a:cs typeface="Segoe UI" pitchFamily="34" charset="-120"/>
               </a:rPr>
-              <a:t>of two-hour forecasts clinically acceptable (Clarke zones A+B)</a:t>
-            </a:r>
-            <a:endParaRPr lang="en-US" sz="1200" dirty="0"/>
-          </a:p>
-        </p:txBody>
-      </p:sp>
-      <p:sp>
-        <p:nvSpPr>
-          <p:cNvPr id="13" name="rule"/>
+              <a:t>The first part of the recording fits the twin's physiology. On the sample, its two-hour error falls from 74 to 40 mg/dL.</a:t>
+            </a:r>
+            <a:endParaRPr lang="en-US" sz="1300" dirty="0"/>
+          </a:p>
+        </p:txBody>
+      </p:sp>
+      <p:sp>
+        <p:nvSpPr>
+          <p:cNvPr id="14" name="rule"/>
           <p:cNvSpPr/>
           <p:nvPr/>
         </p:nvSpPr>
         <p:spPr>
           <a:xfrm>
-            <a:off x="8183880" y="4937760"/>
-            <a:ext cx="3364992" cy="0"/>
+            <a:off x="7360920" y="4279392"/>
+            <a:ext cx="4190695" cy="0"/>
           </a:xfrm>
           <a:prstGeom prst="line">
             <a:avLst/>
@@ -6912,79 +7048,118 @@
       </p:sp>
       <p:sp>
         <p:nvSpPr>
-          <p:cNvPr id="14" name="Text 11"/>
-          <p:cNvSpPr txBox="1"/>
-          <p:nvPr/>
-        </p:nvSpPr>
-        <p:spPr>
-          <a:xfrm>
-            <a:off x="8183880" y="5029200"/>
-            <a:ext cx="3364992" cy="731520"/>
-          </a:xfrm>
-          <a:prstGeom prst="rect">
-            <a:avLst/>
-          </a:prstGeom>
-          <a:noFill/>
-          <a:ln/>
-        </p:spPr>
-        <p:txBody>
-          <a:bodyPr wrap="square" lIns="0" tIns="0" rIns="0" bIns="0" rtlCol="0" anchor="b"/>
-          <a:lstStyle/>
-          <a:p>
-            <a:pPr indent="0" marL="0">
-              <a:buNone/>
-            </a:pPr>
-            <a:r>
-              <a:rPr lang="en-US" sz="2800" dirty="0">
-                <a:solidFill>
-                  <a:srgbClr val="14213D"/>
+          <p:cNvPr id="15" name="Text 12"/>
+          <p:cNvSpPr txBox="1"/>
+          <p:nvPr/>
+        </p:nvSpPr>
+        <p:spPr>
+          <a:xfrm>
+            <a:off x="6903720" y="4434840"/>
+            <a:ext cx="457200" cy="292608"/>
+          </a:xfrm>
+          <a:prstGeom prst="rect">
+            <a:avLst/>
+          </a:prstGeom>
+          <a:noFill/>
+          <a:ln/>
+        </p:spPr>
+        <p:txBody>
+          <a:bodyPr wrap="square" lIns="0" tIns="0" rIns="0" bIns="0" rtlCol="0" anchor="t"/>
+          <a:lstStyle/>
+          <a:p>
+            <a:pPr indent="0" marL="0">
+              <a:buNone/>
+            </a:pPr>
+            <a:r>
+              <a:rPr lang="en-US" sz="1500" dirty="0">
+                <a:solidFill>
+                  <a:srgbClr val="B97A12"/>
                 </a:solidFill>
                 <a:latin typeface="Georgia" pitchFamily="34" charset="0"/>
                 <a:ea typeface="Georgia" pitchFamily="34" charset="-122"/>
                 <a:cs typeface="Georgia" pitchFamily="34" charset="-120"/>
               </a:rPr>
-              <a:t>91.7 %</a:t>
-            </a:r>
-            <a:endParaRPr lang="en-US" sz="2800" dirty="0"/>
-          </a:p>
-        </p:txBody>
-      </p:sp>
-      <p:sp>
-        <p:nvSpPr>
-          <p:cNvPr id="15" name="Text 12"/>
-          <p:cNvSpPr txBox="1"/>
-          <p:nvPr/>
-        </p:nvSpPr>
-        <p:spPr>
-          <a:xfrm>
-            <a:off x="8183880" y="5833872"/>
-            <a:ext cx="3364992" cy="640080"/>
-          </a:xfrm>
-          <a:prstGeom prst="rect">
-            <a:avLst/>
-          </a:prstGeom>
-          <a:noFill/>
-          <a:ln/>
-        </p:spPr>
-        <p:txBody>
-          <a:bodyPr wrap="square" lIns="0" tIns="0" rIns="0" bIns="0" rtlCol="0" anchor="t"/>
-          <a:lstStyle/>
-          <a:p>
-            <a:pPr indent="0" marL="0">
-              <a:buNone/>
-            </a:pPr>
-            <a:r>
-              <a:rPr lang="en-US" sz="1200" dirty="0">
-                <a:solidFill>
-                  <a:srgbClr val="6B7280"/>
+              <a:t>3</a:t>
+            </a:r>
+            <a:endParaRPr lang="en-US" sz="1500" dirty="0"/>
+          </a:p>
+        </p:txBody>
+      </p:sp>
+      <p:sp>
+        <p:nvSpPr>
+          <p:cNvPr id="16" name="Text 13"/>
+          <p:cNvSpPr txBox="1"/>
+          <p:nvPr/>
+        </p:nvSpPr>
+        <p:spPr>
+          <a:xfrm>
+            <a:off x="7360920" y="4434840"/>
+            <a:ext cx="4190695" cy="310896"/>
+          </a:xfrm>
+          <a:prstGeom prst="rect">
+            <a:avLst/>
+          </a:prstGeom>
+          <a:noFill/>
+          <a:ln/>
+        </p:spPr>
+        <p:txBody>
+          <a:bodyPr wrap="square" lIns="0" tIns="0" rIns="0" bIns="0" rtlCol="0" anchor="t"/>
+          <a:lstStyle/>
+          <a:p>
+            <a:pPr indent="0" marL="0">
+              <a:buNone/>
+            </a:pPr>
+            <a:r>
+              <a:rPr lang="en-US" sz="1500" dirty="0">
+                <a:solidFill>
+                  <a:srgbClr val="14213D"/>
+                </a:solidFill>
+                <a:latin typeface="Segoe UI Semibold" pitchFamily="34" charset="0"/>
+                <a:ea typeface="Segoe UI Semibold" pitchFamily="34" charset="-122"/>
+                <a:cs typeface="Segoe UI Semibold" pitchFamily="34" charset="-120"/>
+              </a:rPr>
+              <a:t>Monitor</a:t>
+            </a:r>
+            <a:endParaRPr lang="en-US" sz="1500" dirty="0"/>
+          </a:p>
+        </p:txBody>
+      </p:sp>
+      <p:sp>
+        <p:nvSpPr>
+          <p:cNvPr id="17" name="Text 14"/>
+          <p:cNvSpPr txBox="1"/>
+          <p:nvPr/>
+        </p:nvSpPr>
+        <p:spPr>
+          <a:xfrm>
+            <a:off x="7360920" y="4782312"/>
+            <a:ext cx="4190695" cy="868680"/>
+          </a:xfrm>
+          <a:prstGeom prst="rect">
+            <a:avLst/>
+          </a:prstGeom>
+          <a:noFill/>
+          <a:ln/>
+        </p:spPr>
+        <p:txBody>
+          <a:bodyPr wrap="square" lIns="0" tIns="0" rIns="0" bIns="0" rtlCol="0" anchor="t"/>
+          <a:lstStyle/>
+          <a:p>
+            <a:pPr indent="0" marL="0">
+              <a:buNone/>
+            </a:pPr>
+            <a:r>
+              <a:rPr lang="en-US" sz="1300" dirty="0">
+                <a:solidFill>
+                  <a:srgbClr val="2A2F36"/>
                 </a:solidFill>
                 <a:latin typeface="Segoe UI" pitchFamily="34" charset="0"/>
                 <a:ea typeface="Segoe UI" pitchFamily="34" charset="-122"/>
                 <a:cs typeface="Segoe UI" pitchFamily="34" charset="-120"/>
               </a:rPr>
-              <a:t>observed coverage of the 90 % interval</a:t>
-            </a:r>
-            <a:endParaRPr lang="en-US" sz="1200" dirty="0"/>
+              <a:t>Everything after that is forecast and scored by models that never saw the patient; the replay opens at the first alert.</a:t>
+            </a:r>
+            <a:endParaRPr lang="en-US" sz="1300" dirty="0"/>
           </a:p>
         </p:txBody>
       </p:sp>
@@ -7135,7 +7310,7 @@
                 <a:ea typeface="Georgia" pitchFamily="34" charset="-122"/>
                 <a:cs typeface="Georgia" pitchFamily="34" charset="-120"/>
               </a:rPr>
-              <a:t>The record tells you who is at risk; the live streams tell you when</a:t>
+              <a:t>On unseen real patients, two-hour error is 27 % below persistence</a:t>
             </a:r>
             <a:endParaRPr lang="en-US" sz="2700" dirty="0"/>
           </a:p>
@@ -7174,7 +7349,7 @@
                 <a:ea typeface="Segoe UI Semibold" pitchFamily="34" charset="-122"/>
                 <a:cs typeface="Segoe UI Semibold" pitchFamily="34" charset="-120"/>
               </a:rPr>
-              <a:t>Predicting hyperglycaemia onset within two hours: AUROC by inputs</a:t>
+              <a:t>Forecast RMSE on unseen CGMacros patients, mg/dL (lower is better)</a:t>
             </a:r>
             <a:endParaRPr lang="en-US" sz="1200" dirty="0"/>
           </a:p>
@@ -7188,7 +7363,7 @@
         </p:nvGraphicFramePr>
         <p:xfrm>
           <a:off x="548640" y="2148840"/>
-          <a:ext cx="6949440" cy="3657600"/>
+          <a:ext cx="6949440" cy="3429000"/>
         </p:xfrm>
         <a:graphic xmlns:a="http://schemas.openxmlformats.org/drawingml/2006/main">
           <a:graphicData uri="http://schemas.openxmlformats.org/drawingml/2006/chart">
@@ -7198,7 +7373,46 @@
       </p:graphicFrame>
       <p:sp>
         <p:nvSpPr>
-          <p:cNvPr id="6" name="rule"/>
+          <p:cNvPr id="6" name="Text 3"/>
+          <p:cNvSpPr txBox="1"/>
+          <p:nvPr/>
+        </p:nvSpPr>
+        <p:spPr>
+          <a:xfrm>
+            <a:off x="640080" y="5669280"/>
+            <a:ext cx="6766560" cy="457200"/>
+          </a:xfrm>
+          <a:prstGeom prst="rect">
+            <a:avLst/>
+          </a:prstGeom>
+          <a:noFill/>
+          <a:ln/>
+        </p:spPr>
+        <p:txBody>
+          <a:bodyPr wrap="square" lIns="0" tIns="0" rIns="0" bIns="0" rtlCol="0" anchor="t"/>
+          <a:lstStyle/>
+          <a:p>
+            <a:pPr indent="0" marL="0">
+              <a:buNone/>
+            </a:pPr>
+            <a:r>
+              <a:rPr lang="en-US" sz="1000" dirty="0">
+                <a:solidFill>
+                  <a:srgbClr val="9AA3AF"/>
+                </a:solidFill>
+                <a:latin typeface="Segoe UI" pitchFamily="34" charset="0"/>
+                <a:ea typeface="Segoe UI" pitchFamily="34" charset="-122"/>
+                <a:cs typeface="Segoe UI" pitchFamily="34" charset="-120"/>
+              </a:rPr>
+              <a:t>45 adults with CGM, Fitbit, meals and labs · 5-fold leave-patients-out · twins personalised only on each patient's first days · 311 unseen patient-days · native sensor samples only</a:t>
+            </a:r>
+            <a:endParaRPr lang="en-US" sz="1000" dirty="0"/>
+          </a:p>
+        </p:txBody>
+      </p:sp>
+      <p:sp>
+        <p:nvSpPr>
+          <p:cNvPr id="7" name="rule"/>
           <p:cNvSpPr/>
           <p:nvPr/>
         </p:nvSpPr>
@@ -7221,7 +7435,7 @@
       </p:sp>
       <p:sp>
         <p:nvSpPr>
-          <p:cNvPr id="7" name="Text 4"/>
+          <p:cNvPr id="8" name="Text 5"/>
           <p:cNvSpPr txBox="1"/>
           <p:nvPr/>
         </p:nvSpPr>
@@ -7252,7 +7466,7 @@
                 <a:ea typeface="Georgia" pitchFamily="34" charset="-122"/>
                 <a:cs typeface="Georgia" pitchFamily="34" charset="-120"/>
               </a:rPr>
-              <a:t>75 min</a:t>
+              <a:t>28.2 mg/dL</a:t>
             </a:r>
             <a:endParaRPr lang="en-US" sz="3600" dirty="0"/>
           </a:p>
@@ -7260,7 +7474,7 @@
       </p:sp>
       <p:sp>
         <p:nvSpPr>
-          <p:cNvPr id="8" name="Text 5"/>
+          <p:cNvPr id="9" name="Text 6"/>
           <p:cNvSpPr txBox="1"/>
           <p:nvPr/>
         </p:nvSpPr>
@@ -7291,7 +7505,7 @@
                 <a:ea typeface="Segoe UI" pitchFamily="34" charset="-122"/>
                 <a:cs typeface="Segoe UI" pitchFamily="34" charset="-120"/>
               </a:rPr>
-              <a:t>median warning before glucose crosses 180 mg/dL</a:t>
+              <a:t>two-hour RMSE, vs 38.5 for persistence</a:t>
             </a:r>
             <a:endParaRPr lang="en-US" sz="1200" dirty="0"/>
           </a:p>
@@ -7299,7 +7513,7 @@
       </p:sp>
       <p:sp>
         <p:nvSpPr>
-          <p:cNvPr id="9" name="rule"/>
+          <p:cNvPr id="10" name="rule"/>
           <p:cNvSpPr/>
           <p:nvPr/>
         </p:nvSpPr>
@@ -7322,7 +7536,7 @@
       </p:sp>
       <p:sp>
         <p:nvSpPr>
-          <p:cNvPr id="10" name="Text 7"/>
+          <p:cNvPr id="11" name="Text 8"/>
           <p:cNvSpPr txBox="1"/>
           <p:nvPr/>
         </p:nvSpPr>
@@ -7353,7 +7567,7 @@
                 <a:ea typeface="Georgia" pitchFamily="34" charset="-122"/>
                 <a:cs typeface="Georgia" pitchFamily="34" charset="-120"/>
               </a:rPr>
-              <a:t>61 %</a:t>
+              <a:t>99.0 %</a:t>
             </a:r>
             <a:endParaRPr lang="en-US" sz="3600" dirty="0"/>
           </a:p>
@@ -7361,7 +7575,7 @@
       </p:sp>
       <p:sp>
         <p:nvSpPr>
-          <p:cNvPr id="11" name="Text 8"/>
+          <p:cNvPr id="12" name="Text 9"/>
           <p:cNvSpPr txBox="1"/>
           <p:nvPr/>
         </p:nvSpPr>
@@ -7392,7 +7606,7 @@
                 <a:ea typeface="Segoe UI" pitchFamily="34" charset="-122"/>
                 <a:cs typeface="Segoe UI" pitchFamily="34" charset="-120"/>
               </a:rPr>
-              <a:t>of hyperglycaemic episodes flagged at least 15 minutes ahead</a:t>
+              <a:t>of two-hour forecasts clinically acceptable (Clarke zones A+B)</a:t>
             </a:r>
             <a:endParaRPr lang="en-US" sz="1200" dirty="0"/>
           </a:p>
@@ -7400,7 +7614,7 @@
       </p:sp>
       <p:sp>
         <p:nvSpPr>
-          <p:cNvPr id="12" name="rule"/>
+          <p:cNvPr id="13" name="rule"/>
           <p:cNvSpPr/>
           <p:nvPr/>
         </p:nvSpPr>
@@ -7423,30 +7637,69 @@
       </p:sp>
       <p:sp>
         <p:nvSpPr>
-          <p:cNvPr id="13" name="Text 10"/>
-          <p:cNvSpPr txBox="1"/>
-          <p:nvPr/>
-        </p:nvSpPr>
-        <p:spPr>
-          <a:xfrm>
-            <a:off x="8183880" y="5074920"/>
-            <a:ext cx="3364992" cy="914400"/>
-          </a:xfrm>
-          <a:prstGeom prst="rect">
-            <a:avLst/>
-          </a:prstGeom>
-          <a:noFill/>
-          <a:ln/>
-        </p:spPr>
-        <p:txBody>
-          <a:bodyPr wrap="square" lIns="0" tIns="0" rIns="0" bIns="0" rtlCol="0" anchor="t"/>
-          <a:lstStyle/>
-          <a:p>
-            <a:pPr indent="0" marL="0">
-              <a:buNone/>
-            </a:pPr>
-            <a:r>
-              <a:rPr lang="en-US" sz="1150" dirty="0">
+          <p:cNvPr id="14" name="Text 11"/>
+          <p:cNvSpPr txBox="1"/>
+          <p:nvPr/>
+        </p:nvSpPr>
+        <p:spPr>
+          <a:xfrm>
+            <a:off x="8183880" y="5029200"/>
+            <a:ext cx="3364992" cy="731520"/>
+          </a:xfrm>
+          <a:prstGeom prst="rect">
+            <a:avLst/>
+          </a:prstGeom>
+          <a:noFill/>
+          <a:ln/>
+        </p:spPr>
+        <p:txBody>
+          <a:bodyPr wrap="square" lIns="0" tIns="0" rIns="0" bIns="0" rtlCol="0" anchor="b"/>
+          <a:lstStyle/>
+          <a:p>
+            <a:pPr indent="0" marL="0">
+              <a:buNone/>
+            </a:pPr>
+            <a:r>
+              <a:rPr lang="en-US" sz="2800" dirty="0">
+                <a:solidFill>
+                  <a:srgbClr val="14213D"/>
+                </a:solidFill>
+                <a:latin typeface="Georgia" pitchFamily="34" charset="0"/>
+                <a:ea typeface="Georgia" pitchFamily="34" charset="-122"/>
+                <a:cs typeface="Georgia" pitchFamily="34" charset="-120"/>
+              </a:rPr>
+              <a:t>91.7 %</a:t>
+            </a:r>
+            <a:endParaRPr lang="en-US" sz="2800" dirty="0"/>
+          </a:p>
+        </p:txBody>
+      </p:sp>
+      <p:sp>
+        <p:nvSpPr>
+          <p:cNvPr id="15" name="Text 12"/>
+          <p:cNvSpPr txBox="1"/>
+          <p:nvPr/>
+        </p:nvSpPr>
+        <p:spPr>
+          <a:xfrm>
+            <a:off x="8183880" y="5833872"/>
+            <a:ext cx="3364992" cy="640080"/>
+          </a:xfrm>
+          <a:prstGeom prst="rect">
+            <a:avLst/>
+          </a:prstGeom>
+          <a:noFill/>
+          <a:ln/>
+        </p:spPr>
+        <p:txBody>
+          <a:bodyPr wrap="square" lIns="0" tIns="0" rIns="0" bIns="0" rtlCol="0" anchor="t"/>
+          <a:lstStyle/>
+          <a:p>
+            <a:pPr indent="0" marL="0">
+              <a:buNone/>
+            </a:pPr>
+            <a:r>
+              <a:rPr lang="en-US" sz="1200" dirty="0">
                 <a:solidFill>
                   <a:srgbClr val="6B7280"/>
                 </a:solidFill>
@@ -7454,9 +7707,9 @@
                 <a:ea typeface="Segoe UI" pitchFamily="34" charset="-122"/>
                 <a:cs typeface="Segoe UI" pitchFamily="34" charset="-120"/>
               </a:rPr>
-              <a:t>Record alone: AUROC 0.68 (who is at risk). With live streams: 0.83 (when). Spike AUROC 0.82; 1.4 false alerts per patient-day.</a:t>
-            </a:r>
-            <a:endParaRPr lang="en-US" sz="1150" dirty="0"/>
+              <a:t>observed coverage of the 90 % interval</a:t>
+            </a:r>
+            <a:endParaRPr lang="en-US" sz="1200" dirty="0"/>
           </a:p>
         </p:txBody>
       </p:sp>
@@ -7607,7 +7860,7 @@
                 <a:ea typeface="Georgia" pitchFamily="34" charset="-122"/>
                 <a:cs typeface="Georgia" pitchFamily="34" charset="-120"/>
               </a:rPr>
-              <a:t>Where the physiological twin earns its place</a:t>
+              <a:t>The record tells you who is at risk; the live streams tell you when</a:t>
             </a:r>
             <a:endParaRPr lang="en-US" sz="2700" dirty="0"/>
           </a:p>
@@ -7621,8 +7874,8 @@
         </p:nvSpPr>
         <p:spPr>
           <a:xfrm>
-            <a:off x="640080" y="1691640"/>
-            <a:ext cx="5303520" cy="274320"/>
+            <a:off x="640080" y="1828800"/>
+            <a:ext cx="6766560" cy="274320"/>
           </a:xfrm>
           <a:prstGeom prst="rect">
             <a:avLst/>
@@ -7646,7 +7899,7 @@
                 <a:ea typeface="Segoe UI Semibold" pitchFamily="34" charset="-122"/>
                 <a:cs typeface="Segoe UI Semibold" pitchFamily="34" charset="-120"/>
               </a:rPr>
-              <a:t>Day-zero personalisation: twin two-hour RMSE vs days of onboarding data</a:t>
+              <a:t>Predicting hyperglycaemia onset within two hours: AUROC by inputs</a:t>
             </a:r>
             <a:endParaRPr lang="en-US" sz="1200" dirty="0"/>
           </a:p>
@@ -7659,8 +7912,8 @@
           <p:nvPr/>
         </p:nvGraphicFramePr>
         <p:xfrm>
-          <a:off x="548640" y="2011680"/>
-          <a:ext cx="5486400" cy="3063240"/>
+          <a:off x="548640" y="2148840"/>
+          <a:ext cx="6949440" cy="3657600"/>
         </p:xfrm>
         <a:graphic xmlns:a="http://schemas.openxmlformats.org/drawingml/2006/main">
           <a:graphicData uri="http://schemas.openxmlformats.org/drawingml/2006/chart">
@@ -7676,8 +7929,8 @@
         </p:nvSpPr>
         <p:spPr>
           <a:xfrm>
-            <a:off x="6172200" y="1783080"/>
-            <a:ext cx="0" cy="4206240"/>
+            <a:off x="7818120" y="1874520"/>
+            <a:ext cx="0" cy="4069080"/>
           </a:xfrm>
           <a:prstGeom prst="line">
             <a:avLst/>
@@ -7699,8 +7952,47 @@
         </p:nvSpPr>
         <p:spPr>
           <a:xfrm>
-            <a:off x="6492240" y="1691640"/>
-            <a:ext cx="5120640" cy="274320"/>
+            <a:off x="8183880" y="1783080"/>
+            <a:ext cx="3364992" cy="731520"/>
+          </a:xfrm>
+          <a:prstGeom prst="rect">
+            <a:avLst/>
+          </a:prstGeom>
+          <a:noFill/>
+          <a:ln/>
+        </p:spPr>
+        <p:txBody>
+          <a:bodyPr wrap="square" lIns="0" tIns="0" rIns="0" bIns="0" rtlCol="0" anchor="b"/>
+          <a:lstStyle/>
+          <a:p>
+            <a:pPr indent="0" marL="0">
+              <a:buNone/>
+            </a:pPr>
+            <a:r>
+              <a:rPr lang="en-US" sz="3600" dirty="0">
+                <a:solidFill>
+                  <a:srgbClr val="2A78D6"/>
+                </a:solidFill>
+                <a:latin typeface="Georgia" pitchFamily="34" charset="0"/>
+                <a:ea typeface="Georgia" pitchFamily="34" charset="-122"/>
+                <a:cs typeface="Georgia" pitchFamily="34" charset="-120"/>
+              </a:rPr>
+              <a:t>75 min</a:t>
+            </a:r>
+            <a:endParaRPr lang="en-US" sz="3600" dirty="0"/>
+          </a:p>
+        </p:txBody>
+      </p:sp>
+      <p:sp>
+        <p:nvSpPr>
+          <p:cNvPr id="8" name="Text 5"/>
+          <p:cNvSpPr txBox="1"/>
+          <p:nvPr/>
+        </p:nvSpPr>
+        <p:spPr>
+          <a:xfrm>
+            <a:off x="8183880" y="2587752"/>
+            <a:ext cx="3364992" cy="640080"/>
           </a:xfrm>
           <a:prstGeom prst="rect">
             <a:avLst/>
@@ -7718,137 +8010,178 @@
             <a:r>
               <a:rPr lang="en-US" sz="1200" dirty="0">
                 <a:solidFill>
-                  <a:srgbClr val="14213D"/>
-                </a:solidFill>
-                <a:latin typeface="Segoe UI Semibold" pitchFamily="34" charset="0"/>
-                <a:ea typeface="Segoe UI Semibold" pitchFamily="34" charset="-122"/>
-                <a:cs typeface="Segoe UI Semibold" pitchFamily="34" charset="-120"/>
-              </a:rPr>
-              <a:t>Meal response: predicted vs actual peak, Pearson r (664 meals)</a:t>
-            </a:r>
-            <a:endParaRPr lang="en-US" sz="1200" dirty="0"/>
-          </a:p>
-        </p:txBody>
-      </p:sp>
-      <p:graphicFrame>
-        <p:nvGraphicFramePr>
-          <p:cNvPr id="8" name="Chart 1" descr=""/>
-          <p:cNvGraphicFramePr/>
-          <p:nvPr/>
-        </p:nvGraphicFramePr>
-        <p:xfrm>
-          <a:off x="6400800" y="2011680"/>
-          <a:ext cx="5212080" cy="3063240"/>
-        </p:xfrm>
-        <a:graphic xmlns:a="http://schemas.openxmlformats.org/drawingml/2006/main">
-          <a:graphicData uri="http://schemas.openxmlformats.org/drawingml/2006/chart">
-            <c:chart xmlns:c="http://schemas.openxmlformats.org/drawingml/2006/chart" r:id="rId2"/>
-          </a:graphicData>
-        </a:graphic>
-      </p:graphicFrame>
-      <p:sp>
-        <p:nvSpPr>
-          <p:cNvPr id="9" name="Text 5"/>
-          <p:cNvSpPr txBox="1"/>
-          <p:nvPr/>
-        </p:nvSpPr>
-        <p:spPr>
-          <a:xfrm>
-            <a:off x="640080" y="5257800"/>
-            <a:ext cx="5212080" cy="822960"/>
-          </a:xfrm>
-          <a:prstGeom prst="rect">
-            <a:avLst/>
-          </a:prstGeom>
-          <a:noFill/>
-          <a:ln/>
-        </p:spPr>
-        <p:txBody>
-          <a:bodyPr wrap="square" lIns="0" tIns="0" rIns="0" bIns="0" rtlCol="0" anchor="t"/>
-          <a:lstStyle/>
-          <a:p>
-            <a:pPr indent="0" marL="0">
-              <a:buNone/>
-            </a:pPr>
-            <a:r>
-              <a:rPr lang="en-US" sz="1250" dirty="0">
-                <a:solidFill>
-                  <a:srgbClr val="14213D"/>
-                </a:solidFill>
-                <a:latin typeface="Segoe UI Semibold" pitchFamily="34" charset="0"/>
-                <a:ea typeface="Segoe UI Semibold" pitchFamily="34" charset="-122"/>
-                <a:cs typeface="Segoe UI Semibold" pitchFamily="34" charset="-120"/>
-              </a:rPr>
-              <a:t>21 % lower error on day zero.  </a:t>
-            </a:r>
-            <a:pPr indent="0" marL="0">
-              <a:buNone/>
-            </a:pPr>
-            <a:r>
-              <a:rPr lang="en-US" sz="1250" dirty="0">
-                <a:solidFill>
-                  <a:srgbClr val="2A2F36"/>
+                  <a:srgbClr val="6B7280"/>
                 </a:solidFill>
                 <a:latin typeface="Segoe UI" pitchFamily="34" charset="0"/>
                 <a:ea typeface="Segoe UI" pitchFamily="34" charset="-122"/>
                 <a:cs typeface="Segoe UI" pitchFamily="34" charset="-120"/>
               </a:rPr>
-              <a:t>The record makes the twin usable before any sensor data; after about a day the streams dominate.</a:t>
-            </a:r>
-            <a:endParaRPr lang="en-US" sz="1250" dirty="0"/>
-          </a:p>
-        </p:txBody>
-      </p:sp>
-      <p:sp>
-        <p:nvSpPr>
-          <p:cNvPr id="10" name="Text 6"/>
-          <p:cNvSpPr txBox="1"/>
-          <p:nvPr/>
-        </p:nvSpPr>
-        <p:spPr>
-          <a:xfrm>
-            <a:off x="6492240" y="5257800"/>
-            <a:ext cx="5056632" cy="822960"/>
-          </a:xfrm>
-          <a:prstGeom prst="rect">
-            <a:avLst/>
-          </a:prstGeom>
-          <a:noFill/>
-          <a:ln/>
-        </p:spPr>
-        <p:txBody>
-          <a:bodyPr wrap="square" lIns="0" tIns="0" rIns="0" bIns="0" rtlCol="0" anchor="t"/>
-          <a:lstStyle/>
-          <a:p>
-            <a:pPr indent="0" marL="0">
-              <a:buNone/>
-            </a:pPr>
-            <a:r>
-              <a:rPr lang="en-US" sz="1250" dirty="0">
+              <a:t>median warning before glucose crosses 180 mg/dL</a:t>
+            </a:r>
+            <a:endParaRPr lang="en-US" sz="1200" dirty="0"/>
+          </a:p>
+        </p:txBody>
+      </p:sp>
+      <p:sp>
+        <p:nvSpPr>
+          <p:cNvPr id="9" name="rule"/>
+          <p:cNvSpPr/>
+          <p:nvPr/>
+        </p:nvSpPr>
+        <p:spPr>
+          <a:xfrm>
+            <a:off x="8183880" y="3291840"/>
+            <a:ext cx="3364992" cy="0"/>
+          </a:xfrm>
+          <a:prstGeom prst="line">
+            <a:avLst/>
+          </a:prstGeom>
+          <a:noFill/>
+          <a:ln w="9525">
+            <a:solidFill>
+              <a:srgbClr val="D9DEE5"/>
+            </a:solidFill>
+            <a:prstDash val="solid"/>
+          </a:ln>
+        </p:spPr>
+      </p:sp>
+      <p:sp>
+        <p:nvSpPr>
+          <p:cNvPr id="10" name="Text 7"/>
+          <p:cNvSpPr txBox="1"/>
+          <p:nvPr/>
+        </p:nvSpPr>
+        <p:spPr>
+          <a:xfrm>
+            <a:off x="8183880" y="3429000"/>
+            <a:ext cx="3364992" cy="731520"/>
+          </a:xfrm>
+          <a:prstGeom prst="rect">
+            <a:avLst/>
+          </a:prstGeom>
+          <a:noFill/>
+          <a:ln/>
+        </p:spPr>
+        <p:txBody>
+          <a:bodyPr wrap="square" lIns="0" tIns="0" rIns="0" bIns="0" rtlCol="0" anchor="b"/>
+          <a:lstStyle/>
+          <a:p>
+            <a:pPr indent="0" marL="0">
+              <a:buNone/>
+            </a:pPr>
+            <a:r>
+              <a:rPr lang="en-US" sz="3600" dirty="0">
                 <a:solidFill>
                   <a:srgbClr val="14213D"/>
                 </a:solidFill>
-                <a:latin typeface="Segoe UI Semibold" pitchFamily="34" charset="0"/>
-                <a:ea typeface="Segoe UI Semibold" pitchFamily="34" charset="-122"/>
-                <a:cs typeface="Segoe UI Semibold" pitchFamily="34" charset="-120"/>
-              </a:rPr>
-              <a:t>Physiology beats carbohydrate counting.  </a:t>
-            </a:r>
-            <a:pPr indent="0" marL="0">
-              <a:buNone/>
-            </a:pPr>
-            <a:r>
-              <a:rPr lang="en-US" sz="1250" dirty="0">
-                <a:solidFill>
-                  <a:srgbClr val="2A2F36"/>
+                <a:latin typeface="Georgia" pitchFamily="34" charset="0"/>
+                <a:ea typeface="Georgia" pitchFamily="34" charset="-122"/>
+                <a:cs typeface="Georgia" pitchFamily="34" charset="-120"/>
+              </a:rPr>
+              <a:t>61 %</a:t>
+            </a:r>
+            <a:endParaRPr lang="en-US" sz="3600" dirty="0"/>
+          </a:p>
+        </p:txBody>
+      </p:sp>
+      <p:sp>
+        <p:nvSpPr>
+          <p:cNvPr id="11" name="Text 8"/>
+          <p:cNvSpPr txBox="1"/>
+          <p:nvPr/>
+        </p:nvSpPr>
+        <p:spPr>
+          <a:xfrm>
+            <a:off x="8183880" y="4233672"/>
+            <a:ext cx="3364992" cy="640080"/>
+          </a:xfrm>
+          <a:prstGeom prst="rect">
+            <a:avLst/>
+          </a:prstGeom>
+          <a:noFill/>
+          <a:ln/>
+        </p:spPr>
+        <p:txBody>
+          <a:bodyPr wrap="square" lIns="0" tIns="0" rIns="0" bIns="0" rtlCol="0" anchor="t"/>
+          <a:lstStyle/>
+          <a:p>
+            <a:pPr indent="0" marL="0">
+              <a:buNone/>
+            </a:pPr>
+            <a:r>
+              <a:rPr lang="en-US" sz="1200" dirty="0">
+                <a:solidFill>
+                  <a:srgbClr val="6B7280"/>
                 </a:solidFill>
                 <a:latin typeface="Segoe UI" pitchFamily="34" charset="0"/>
                 <a:ea typeface="Segoe UI" pitchFamily="34" charset="-122"/>
                 <a:cs typeface="Segoe UI" pitchFamily="34" charset="-120"/>
               </a:rPr>
-              <a:t>Carbs alone do not predict a person's response; the twin does. On the synthetic Indian cohort, 57 % of lows are flagged at least 10 minutes ahead.</a:t>
-            </a:r>
-            <a:endParaRPr lang="en-US" sz="1250" dirty="0"/>
+              <a:t>of hyperglycaemic episodes flagged at least 15 minutes ahead</a:t>
+            </a:r>
+            <a:endParaRPr lang="en-US" sz="1200" dirty="0"/>
+          </a:p>
+        </p:txBody>
+      </p:sp>
+      <p:sp>
+        <p:nvSpPr>
+          <p:cNvPr id="12" name="rule"/>
+          <p:cNvSpPr/>
+          <p:nvPr/>
+        </p:nvSpPr>
+        <p:spPr>
+          <a:xfrm>
+            <a:off x="8183880" y="4937760"/>
+            <a:ext cx="3364992" cy="0"/>
+          </a:xfrm>
+          <a:prstGeom prst="line">
+            <a:avLst/>
+          </a:prstGeom>
+          <a:noFill/>
+          <a:ln w="9525">
+            <a:solidFill>
+              <a:srgbClr val="D9DEE5"/>
+            </a:solidFill>
+            <a:prstDash val="solid"/>
+          </a:ln>
+        </p:spPr>
+      </p:sp>
+      <p:sp>
+        <p:nvSpPr>
+          <p:cNvPr id="13" name="Text 10"/>
+          <p:cNvSpPr txBox="1"/>
+          <p:nvPr/>
+        </p:nvSpPr>
+        <p:spPr>
+          <a:xfrm>
+            <a:off x="8183880" y="5074920"/>
+            <a:ext cx="3364992" cy="914400"/>
+          </a:xfrm>
+          <a:prstGeom prst="rect">
+            <a:avLst/>
+          </a:prstGeom>
+          <a:noFill/>
+          <a:ln/>
+        </p:spPr>
+        <p:txBody>
+          <a:bodyPr wrap="square" lIns="0" tIns="0" rIns="0" bIns="0" rtlCol="0" anchor="t"/>
+          <a:lstStyle/>
+          <a:p>
+            <a:pPr indent="0" marL="0">
+              <a:buNone/>
+            </a:pPr>
+            <a:r>
+              <a:rPr lang="en-US" sz="1150" dirty="0">
+                <a:solidFill>
+                  <a:srgbClr val="6B7280"/>
+                </a:solidFill>
+                <a:latin typeface="Segoe UI" pitchFamily="34" charset="0"/>
+                <a:ea typeface="Segoe UI" pitchFamily="34" charset="-122"/>
+                <a:cs typeface="Segoe UI" pitchFamily="34" charset="-120"/>
+              </a:rPr>
+              <a:t>Record alone: AUROC 0.68 (who is at risk). With live streams: 0.83 (when). Spike AUROC 0.82; 1.4 false alerts per patient-day.</a:t>
+            </a:r>
+            <a:endParaRPr lang="en-US" sz="1150" dirty="0"/>
           </a:p>
         </p:txBody>
       </p:sp>
@@ -7999,7 +8332,7 @@
                 <a:ea typeface="Georgia" pitchFamily="34" charset="-122"/>
                 <a:cs typeface="Georgia" pitchFamily="34" charset="-120"/>
               </a:rPr>
-              <a:t>What did not work, and what we did about it</a:t>
+              <a:t>Where the physiological twin earns its place</a:t>
             </a:r>
             <a:endParaRPr lang="en-US" sz="2700" dirty="0"/>
           </a:p>
@@ -8013,24 +8346,24 @@
         </p:nvSpPr>
         <p:spPr>
           <a:xfrm>
-            <a:off x="640080" y="1874520"/>
-            <a:ext cx="5120640" cy="365760"/>
-          </a:xfrm>
-          <a:prstGeom prst="rect">
-            <a:avLst/>
-          </a:prstGeom>
-          <a:noFill/>
-          <a:ln/>
-        </p:spPr>
-        <p:txBody>
-          <a:bodyPr wrap="square" lIns="0" tIns="0" rIns="0" bIns="0" rtlCol="0" anchor="t"/>
-          <a:lstStyle/>
-          <a:p>
-            <a:pPr indent="0" marL="0">
-              <a:buNone/>
-            </a:pPr>
-            <a:r>
-              <a:rPr lang="en-US" sz="1600" dirty="0">
+            <a:off x="640080" y="1691640"/>
+            <a:ext cx="5303520" cy="274320"/>
+          </a:xfrm>
+          <a:prstGeom prst="rect">
+            <a:avLst/>
+          </a:prstGeom>
+          <a:noFill/>
+          <a:ln/>
+        </p:spPr>
+        <p:txBody>
+          <a:bodyPr wrap="square" lIns="0" tIns="0" rIns="0" bIns="0" rtlCol="0" anchor="t"/>
+          <a:lstStyle/>
+          <a:p>
+            <a:pPr indent="0" marL="0">
+              <a:buNone/>
+            </a:pPr>
+            <a:r>
+              <a:rPr lang="en-US" sz="1200" dirty="0">
                 <a:solidFill>
                   <a:srgbClr val="14213D"/>
                 </a:solidFill>
@@ -8038,295 +8371,38 @@
                 <a:ea typeface="Segoe UI Semibold" pitchFamily="34" charset="-122"/>
                 <a:cs typeface="Segoe UI Semibold" pitchFamily="34" charset="-120"/>
               </a:rPr>
-              <a:t>Twin features vs the best fusion model</a:t>
-            </a:r>
-            <a:endParaRPr lang="en-US" sz="1600" dirty="0"/>
-          </a:p>
-        </p:txBody>
-      </p:sp>
-      <p:sp>
-        <p:nvSpPr>
-          <p:cNvPr id="5" name="Text 3"/>
-          <p:cNvSpPr txBox="1"/>
-          <p:nvPr/>
-        </p:nvSpPr>
-        <p:spPr>
-          <a:xfrm>
-            <a:off x="640080" y="2313432"/>
-            <a:ext cx="5120640" cy="1371600"/>
-          </a:xfrm>
-          <a:prstGeom prst="rect">
-            <a:avLst/>
-          </a:prstGeom>
-          <a:noFill/>
-          <a:ln/>
-        </p:spPr>
-        <p:txBody>
-          <a:bodyPr wrap="square" lIns="0" tIns="0" rIns="0" bIns="0" rtlCol="0" anchor="t"/>
-          <a:lstStyle/>
-          <a:p>
-            <a:pPr indent="0" marL="0">
-              <a:buNone/>
-            </a:pPr>
-            <a:r>
-              <a:rPr lang="en-US" sz="1350" dirty="0">
-                <a:solidFill>
-                  <a:srgbClr val="2A2F36"/>
-                </a:solidFill>
-                <a:latin typeface="Segoe UI" pitchFamily="34" charset="0"/>
-                <a:ea typeface="Segoe UI" pitchFamily="34" charset="-122"/>
-                <a:cs typeface="Segoe UI" pitchFamily="34" charset="-120"/>
-              </a:rPr>
-              <a:t>On rolling real-data forecasts, adding twin features to the ML layer did not beat the best fusion model. The twin's measured value is simulation, day-zero personalisation and meal-response prediction.</a:t>
-            </a:r>
-            <a:endParaRPr lang="en-US" sz="1350" dirty="0"/>
-          </a:p>
-        </p:txBody>
-      </p:sp>
-      <p:sp>
-        <p:nvSpPr>
-          <p:cNvPr id="6" name="Text 4"/>
-          <p:cNvSpPr txBox="1"/>
-          <p:nvPr/>
-        </p:nvSpPr>
-        <p:spPr>
-          <a:xfrm>
-            <a:off x="6309360" y="1874520"/>
-            <a:ext cx="5120640" cy="365760"/>
-          </a:xfrm>
-          <a:prstGeom prst="rect">
-            <a:avLst/>
-          </a:prstGeom>
-          <a:noFill/>
-          <a:ln/>
-        </p:spPr>
-        <p:txBody>
-          <a:bodyPr wrap="square" lIns="0" tIns="0" rIns="0" bIns="0" rtlCol="0" anchor="t"/>
-          <a:lstStyle/>
-          <a:p>
-            <a:pPr indent="0" marL="0">
-              <a:buNone/>
-            </a:pPr>
-            <a:r>
-              <a:rPr lang="en-US" sz="1600" dirty="0">
-                <a:solidFill>
-                  <a:srgbClr val="14213D"/>
-                </a:solidFill>
-                <a:latin typeface="Segoe UI Semibold" pitchFamily="34" charset="0"/>
-                <a:ea typeface="Segoe UI Semibold" pitchFamily="34" charset="-122"/>
-                <a:cs typeface="Segoe UI Semibold" pitchFamily="34" charset="-120"/>
-              </a:rPr>
-              <a:t>Three ideas rejected after validation</a:t>
-            </a:r>
-            <a:endParaRPr lang="en-US" sz="1600" dirty="0"/>
-          </a:p>
-        </p:txBody>
-      </p:sp>
-      <p:sp>
-        <p:nvSpPr>
-          <p:cNvPr id="7" name="Text 5"/>
-          <p:cNvSpPr txBox="1"/>
-          <p:nvPr/>
-        </p:nvSpPr>
-        <p:spPr>
-          <a:xfrm>
-            <a:off x="6309360" y="2313432"/>
-            <a:ext cx="5120640" cy="1371600"/>
-          </a:xfrm>
-          <a:prstGeom prst="rect">
-            <a:avLst/>
-          </a:prstGeom>
-          <a:noFill/>
-          <a:ln/>
-        </p:spPr>
-        <p:txBody>
-          <a:bodyPr wrap="square" lIns="0" tIns="0" rIns="0" bIns="0" rtlCol="0" anchor="t"/>
-          <a:lstStyle/>
-          <a:p>
-            <a:pPr indent="0" marL="0">
-              <a:buNone/>
-            </a:pPr>
-            <a:r>
-              <a:rPr lang="en-US" sz="1350" dirty="0">
-                <a:solidFill>
-                  <a:srgbClr val="2A2F36"/>
-                </a:solidFill>
-                <a:latin typeface="Segoe UI" pitchFamily="34" charset="0"/>
-                <a:ea typeface="Segoe UI" pitchFamily="34" charset="-122"/>
-                <a:cs typeface="Segoe UI" pitchFamily="34" charset="-120"/>
-              </a:rPr>
-              <a:t>A disturbance observer, an activity-persistence prior and a fasting steady-state constraint were tested on held-out data and switched off: none improved accuracy.</a:t>
-            </a:r>
-            <a:endParaRPr lang="en-US" sz="1350" dirty="0"/>
-          </a:p>
-        </p:txBody>
-      </p:sp>
-      <p:sp>
-        <p:nvSpPr>
-          <p:cNvPr id="8" name="Text 6"/>
-          <p:cNvSpPr txBox="1"/>
-          <p:nvPr/>
-        </p:nvSpPr>
-        <p:spPr>
-          <a:xfrm>
-            <a:off x="640080" y="3977640"/>
-            <a:ext cx="5120640" cy="365760"/>
-          </a:xfrm>
-          <a:prstGeom prst="rect">
-            <a:avLst/>
-          </a:prstGeom>
-          <a:noFill/>
-          <a:ln/>
-        </p:spPr>
-        <p:txBody>
-          <a:bodyPr wrap="square" lIns="0" tIns="0" rIns="0" bIns="0" rtlCol="0" anchor="t"/>
-          <a:lstStyle/>
-          <a:p>
-            <a:pPr indent="0" marL="0">
-              <a:buNone/>
-            </a:pPr>
-            <a:r>
-              <a:rPr lang="en-US" sz="1600" dirty="0">
-                <a:solidFill>
-                  <a:srgbClr val="14213D"/>
-                </a:solidFill>
-                <a:latin typeface="Segoe UI Semibold" pitchFamily="34" charset="0"/>
-                <a:ea typeface="Segoe UI Semibold" pitchFamily="34" charset="-122"/>
-                <a:cs typeface="Segoe UI Semibold" pitchFamily="34" charset="-120"/>
-              </a:rPr>
-              <a:t>A small, non-Indian real cohort</a:t>
-            </a:r>
-            <a:endParaRPr lang="en-US" sz="1600" dirty="0"/>
-          </a:p>
-        </p:txBody>
-      </p:sp>
-      <p:sp>
-        <p:nvSpPr>
-          <p:cNvPr id="9" name="Text 7"/>
-          <p:cNvSpPr txBox="1"/>
-          <p:nvPr/>
-        </p:nvSpPr>
-        <p:spPr>
-          <a:xfrm>
-            <a:off x="640080" y="4416552"/>
-            <a:ext cx="5120640" cy="1371600"/>
-          </a:xfrm>
-          <a:prstGeom prst="rect">
-            <a:avLst/>
-          </a:prstGeom>
-          <a:noFill/>
-          <a:ln/>
-        </p:spPr>
-        <p:txBody>
-          <a:bodyPr wrap="square" lIns="0" tIns="0" rIns="0" bIns="0" rtlCol="0" anchor="t"/>
-          <a:lstStyle/>
-          <a:p>
-            <a:pPr indent="0" marL="0">
-              <a:buNone/>
-            </a:pPr>
-            <a:r>
-              <a:rPr lang="en-US" sz="1350" dirty="0">
-                <a:solidFill>
-                  <a:srgbClr val="2A2F36"/>
-                </a:solidFill>
-                <a:latin typeface="Segoe UI" pitchFamily="34" charset="0"/>
-                <a:ea typeface="Segoe UI" pitchFamily="34" charset="-122"/>
-                <a:cs typeface="Segoe UI" pitchFamily="34" charset="-120"/>
-              </a:rPr>
-              <a:t>45 US adults, about ten days each. Indian diets, drugs and demographics are tested on a synthetic cohort that is always labelled and never mixed with real evidence.</a:t>
-            </a:r>
-            <a:endParaRPr lang="en-US" sz="1350" dirty="0"/>
-          </a:p>
-        </p:txBody>
-      </p:sp>
-      <p:sp>
-        <p:nvSpPr>
-          <p:cNvPr id="10" name="Text 8"/>
-          <p:cNvSpPr txBox="1"/>
-          <p:nvPr/>
-        </p:nvSpPr>
-        <p:spPr>
-          <a:xfrm>
-            <a:off x="6309360" y="3977640"/>
-            <a:ext cx="5120640" cy="365760"/>
-          </a:xfrm>
-          <a:prstGeom prst="rect">
-            <a:avLst/>
-          </a:prstGeom>
-          <a:noFill/>
-          <a:ln/>
-        </p:spPr>
-        <p:txBody>
-          <a:bodyPr wrap="square" lIns="0" tIns="0" rIns="0" bIns="0" rtlCol="0" anchor="t"/>
-          <a:lstStyle/>
-          <a:p>
-            <a:pPr indent="0" marL="0">
-              <a:buNone/>
-            </a:pPr>
-            <a:r>
-              <a:rPr lang="en-US" sz="1600" dirty="0">
-                <a:solidFill>
-                  <a:srgbClr val="14213D"/>
-                </a:solidFill>
-                <a:latin typeface="Segoe UI Semibold" pitchFamily="34" charset="0"/>
-                <a:ea typeface="Segoe UI Semibold" pitchFamily="34" charset="-122"/>
-                <a:cs typeface="Segoe UI Semibold" pitchFamily="34" charset="-120"/>
-              </a:rPr>
-              <a:t>Lows: trust the risk, not the line</a:t>
-            </a:r>
-            <a:endParaRPr lang="en-US" sz="1600" dirty="0"/>
-          </a:p>
-        </p:txBody>
-      </p:sp>
-      <p:sp>
-        <p:nvSpPr>
-          <p:cNvPr id="11" name="Text 9"/>
-          <p:cNvSpPr txBox="1"/>
-          <p:nvPr/>
-        </p:nvSpPr>
-        <p:spPr>
-          <a:xfrm>
-            <a:off x="6309360" y="4416552"/>
-            <a:ext cx="5120640" cy="1371600"/>
-          </a:xfrm>
-          <a:prstGeom prst="rect">
-            <a:avLst/>
-          </a:prstGeom>
-          <a:noFill/>
-          <a:ln/>
-        </p:spPr>
-        <p:txBody>
-          <a:bodyPr wrap="square" lIns="0" tIns="0" rIns="0" bIns="0" rtlCol="0" anchor="t"/>
-          <a:lstStyle/>
-          <a:p>
-            <a:pPr indent="0" marL="0">
-              <a:buNone/>
-            </a:pPr>
-            <a:r>
-              <a:rPr lang="en-US" sz="1350" dirty="0">
-                <a:solidFill>
-                  <a:srgbClr val="2A2F36"/>
-                </a:solidFill>
-                <a:latin typeface="Segoe UI" pitchFamily="34" charset="0"/>
-                <a:ea typeface="Segoe UI" pitchFamily="34" charset="-122"/>
-                <a:cs typeface="Segoe UI" pitchFamily="34" charset="-120"/>
-              </a:rPr>
-              <a:t>Lows are rare in real data and point forecasts regress towards typical levels before them. The calibrated hypoglycaemia classifier (AUROC 0.85 real, 0.99 synthetic) is the primary signal.</a:t>
-            </a:r>
-            <a:endParaRPr lang="en-US" sz="1350" dirty="0"/>
-          </a:p>
-        </p:txBody>
-      </p:sp>
-      <p:sp>
-        <p:nvSpPr>
-          <p:cNvPr id="12" name="rule"/>
+              <a:t>Day-zero personalisation: twin two-hour RMSE vs days of onboarding data</a:t>
+            </a:r>
+            <a:endParaRPr lang="en-US" sz="1200" dirty="0"/>
+          </a:p>
+        </p:txBody>
+      </p:sp>
+      <p:graphicFrame>
+        <p:nvGraphicFramePr>
+          <p:cNvPr id="5" name="Chart 0" descr=""/>
+          <p:cNvGraphicFramePr/>
+          <p:nvPr/>
+        </p:nvGraphicFramePr>
+        <p:xfrm>
+          <a:off x="548640" y="2011680"/>
+          <a:ext cx="5486400" cy="3063240"/>
+        </p:xfrm>
+        <a:graphic xmlns:a="http://schemas.openxmlformats.org/drawingml/2006/main">
+          <a:graphicData uri="http://schemas.openxmlformats.org/drawingml/2006/chart">
+            <c:chart xmlns:c="http://schemas.openxmlformats.org/drawingml/2006/chart" r:id="rId1"/>
+          </a:graphicData>
+        </a:graphic>
+      </p:graphicFrame>
+      <p:sp>
+        <p:nvSpPr>
+          <p:cNvPr id="6" name="rule"/>
           <p:cNvSpPr/>
           <p:nvPr/>
         </p:nvSpPr>
         <p:spPr>
           <a:xfrm>
-            <a:off x="6099048" y="1874520"/>
-            <a:ext cx="0" cy="3931920"/>
+            <a:off x="6172200" y="1783080"/>
+            <a:ext cx="0" cy="4206240"/>
           </a:xfrm>
           <a:prstGeom prst="line">
             <a:avLst/>
@@ -8342,26 +8418,164 @@
       </p:sp>
       <p:sp>
         <p:nvSpPr>
-          <p:cNvPr id="13" name="rule"/>
-          <p:cNvSpPr/>
-          <p:nvPr/>
-        </p:nvSpPr>
-        <p:spPr>
-          <a:xfrm>
-            <a:off x="640080" y="3794760"/>
-            <a:ext cx="10911535" cy="0"/>
-          </a:xfrm>
-          <a:prstGeom prst="line">
-            <a:avLst/>
-          </a:prstGeom>
-          <a:noFill/>
-          <a:ln w="9525">
-            <a:solidFill>
-              <a:srgbClr val="D9DEE5"/>
-            </a:solidFill>
-            <a:prstDash val="solid"/>
-          </a:ln>
-        </p:spPr>
+          <p:cNvPr id="7" name="Text 4"/>
+          <p:cNvSpPr txBox="1"/>
+          <p:nvPr/>
+        </p:nvSpPr>
+        <p:spPr>
+          <a:xfrm>
+            <a:off x="6492240" y="1691640"/>
+            <a:ext cx="5120640" cy="274320"/>
+          </a:xfrm>
+          <a:prstGeom prst="rect">
+            <a:avLst/>
+          </a:prstGeom>
+          <a:noFill/>
+          <a:ln/>
+        </p:spPr>
+        <p:txBody>
+          <a:bodyPr wrap="square" lIns="0" tIns="0" rIns="0" bIns="0" rtlCol="0" anchor="t"/>
+          <a:lstStyle/>
+          <a:p>
+            <a:pPr indent="0" marL="0">
+              <a:buNone/>
+            </a:pPr>
+            <a:r>
+              <a:rPr lang="en-US" sz="1200" dirty="0">
+                <a:solidFill>
+                  <a:srgbClr val="14213D"/>
+                </a:solidFill>
+                <a:latin typeface="Segoe UI Semibold" pitchFamily="34" charset="0"/>
+                <a:ea typeface="Segoe UI Semibold" pitchFamily="34" charset="-122"/>
+                <a:cs typeface="Segoe UI Semibold" pitchFamily="34" charset="-120"/>
+              </a:rPr>
+              <a:t>Meal response: predicted vs actual peak, Pearson r (664 meals)</a:t>
+            </a:r>
+            <a:endParaRPr lang="en-US" sz="1200" dirty="0"/>
+          </a:p>
+        </p:txBody>
+      </p:sp>
+      <p:graphicFrame>
+        <p:nvGraphicFramePr>
+          <p:cNvPr id="8" name="Chart 1" descr=""/>
+          <p:cNvGraphicFramePr/>
+          <p:nvPr/>
+        </p:nvGraphicFramePr>
+        <p:xfrm>
+          <a:off x="6400800" y="2011680"/>
+          <a:ext cx="5212080" cy="3063240"/>
+        </p:xfrm>
+        <a:graphic xmlns:a="http://schemas.openxmlformats.org/drawingml/2006/main">
+          <a:graphicData uri="http://schemas.openxmlformats.org/drawingml/2006/chart">
+            <c:chart xmlns:c="http://schemas.openxmlformats.org/drawingml/2006/chart" r:id="rId2"/>
+          </a:graphicData>
+        </a:graphic>
+      </p:graphicFrame>
+      <p:sp>
+        <p:nvSpPr>
+          <p:cNvPr id="9" name="Text 5"/>
+          <p:cNvSpPr txBox="1"/>
+          <p:nvPr/>
+        </p:nvSpPr>
+        <p:spPr>
+          <a:xfrm>
+            <a:off x="640080" y="5257800"/>
+            <a:ext cx="5212080" cy="822960"/>
+          </a:xfrm>
+          <a:prstGeom prst="rect">
+            <a:avLst/>
+          </a:prstGeom>
+          <a:noFill/>
+          <a:ln/>
+        </p:spPr>
+        <p:txBody>
+          <a:bodyPr wrap="square" lIns="0" tIns="0" rIns="0" bIns="0" rtlCol="0" anchor="t"/>
+          <a:lstStyle/>
+          <a:p>
+            <a:pPr indent="0" marL="0">
+              <a:buNone/>
+            </a:pPr>
+            <a:r>
+              <a:rPr lang="en-US" sz="1250" dirty="0">
+                <a:solidFill>
+                  <a:srgbClr val="14213D"/>
+                </a:solidFill>
+                <a:latin typeface="Segoe UI Semibold" pitchFamily="34" charset="0"/>
+                <a:ea typeface="Segoe UI Semibold" pitchFamily="34" charset="-122"/>
+                <a:cs typeface="Segoe UI Semibold" pitchFamily="34" charset="-120"/>
+              </a:rPr>
+              <a:t>21 % lower error on day zero.  </a:t>
+            </a:r>
+            <a:pPr indent="0" marL="0">
+              <a:buNone/>
+            </a:pPr>
+            <a:r>
+              <a:rPr lang="en-US" sz="1250" dirty="0">
+                <a:solidFill>
+                  <a:srgbClr val="2A2F36"/>
+                </a:solidFill>
+                <a:latin typeface="Segoe UI" pitchFamily="34" charset="0"/>
+                <a:ea typeface="Segoe UI" pitchFamily="34" charset="-122"/>
+                <a:cs typeface="Segoe UI" pitchFamily="34" charset="-120"/>
+              </a:rPr>
+              <a:t>The record makes the twin usable before any sensor data; after about a day the streams dominate.</a:t>
+            </a:r>
+            <a:endParaRPr lang="en-US" sz="1250" dirty="0"/>
+          </a:p>
+        </p:txBody>
+      </p:sp>
+      <p:sp>
+        <p:nvSpPr>
+          <p:cNvPr id="10" name="Text 6"/>
+          <p:cNvSpPr txBox="1"/>
+          <p:nvPr/>
+        </p:nvSpPr>
+        <p:spPr>
+          <a:xfrm>
+            <a:off x="6492240" y="5257800"/>
+            <a:ext cx="5056632" cy="822960"/>
+          </a:xfrm>
+          <a:prstGeom prst="rect">
+            <a:avLst/>
+          </a:prstGeom>
+          <a:noFill/>
+          <a:ln/>
+        </p:spPr>
+        <p:txBody>
+          <a:bodyPr wrap="square" lIns="0" tIns="0" rIns="0" bIns="0" rtlCol="0" anchor="t"/>
+          <a:lstStyle/>
+          <a:p>
+            <a:pPr indent="0" marL="0">
+              <a:buNone/>
+            </a:pPr>
+            <a:r>
+              <a:rPr lang="en-US" sz="1250" dirty="0">
+                <a:solidFill>
+                  <a:srgbClr val="14213D"/>
+                </a:solidFill>
+                <a:latin typeface="Segoe UI Semibold" pitchFamily="34" charset="0"/>
+                <a:ea typeface="Segoe UI Semibold" pitchFamily="34" charset="-122"/>
+                <a:cs typeface="Segoe UI Semibold" pitchFamily="34" charset="-120"/>
+              </a:rPr>
+              <a:t>Physiology beats carbohydrate counting.  </a:t>
+            </a:r>
+            <a:pPr indent="0" marL="0">
+              <a:buNone/>
+            </a:pPr>
+            <a:r>
+              <a:rPr lang="en-US" sz="1250" dirty="0">
+                <a:solidFill>
+                  <a:srgbClr val="2A2F36"/>
+                </a:solidFill>
+                <a:latin typeface="Segoe UI" pitchFamily="34" charset="0"/>
+                <a:ea typeface="Segoe UI" pitchFamily="34" charset="-122"/>
+                <a:cs typeface="Segoe UI" pitchFamily="34" charset="-120"/>
+              </a:rPr>
+              <a:t>Carbs alone do not predict a person's response; the twin does. On the synthetic Indian cohort, 57 % of lows are flagged at least 10 minutes ahead.</a:t>
+            </a:r>
+            <a:endParaRPr lang="en-US" sz="1250" dirty="0"/>
+          </a:p>
+        </p:txBody>
       </p:sp>
       <p:sp>
         <p:nvSpPr>
@@ -8469,7 +8683,7 @@
                 <a:ea typeface="Segoe UI Semibold" pitchFamily="34" charset="-122"/>
                 <a:cs typeface="Segoe UI Semibold" pitchFamily="34" charset="-120"/>
               </a:rPr>
-              <a:t>05   BUILT FOR INDIA</a:t>
+              <a:t>04   EVIDENCE</a:t>
             </a:r>
             <a:endParaRPr lang="en-US" sz="1050" dirty="0"/>
           </a:p>
@@ -8510,7 +8724,7 @@
                 <a:ea typeface="Georgia" pitchFamily="34" charset="-122"/>
                 <a:cs typeface="Georgia" pitchFamily="34" charset="-120"/>
               </a:rPr>
-              <a:t>Built for Indian clinics: diets, drugs, data law and standards</a:t>
+              <a:t>What did not work, and what we did about it</a:t>
             </a:r>
             <a:endParaRPr lang="en-US" sz="2700" dirty="0"/>
           </a:p>
@@ -8524,34 +8738,34 @@
         </p:nvSpPr>
         <p:spPr>
           <a:xfrm>
-            <a:off x="640080" y="1828800"/>
-            <a:ext cx="3383280" cy="256032"/>
-          </a:xfrm>
-          <a:prstGeom prst="rect">
-            <a:avLst/>
-          </a:prstGeom>
-          <a:noFill/>
-          <a:ln/>
-        </p:spPr>
-        <p:txBody>
-          <a:bodyPr wrap="square" lIns="0" tIns="0" rIns="0" bIns="0" rtlCol="0" anchor="t"/>
-          <a:lstStyle/>
-          <a:p>
-            <a:pPr indent="0" marL="0">
-              <a:buNone/>
-            </a:pPr>
-            <a:r>
-              <a:rPr lang="en-US" sz="1050" spc="250" kern="0" dirty="0">
-                <a:solidFill>
-                  <a:srgbClr val="B97A12"/>
+            <a:off x="640080" y="1874520"/>
+            <a:ext cx="5120640" cy="365760"/>
+          </a:xfrm>
+          <a:prstGeom prst="rect">
+            <a:avLst/>
+          </a:prstGeom>
+          <a:noFill/>
+          <a:ln/>
+        </p:spPr>
+        <p:txBody>
+          <a:bodyPr wrap="square" lIns="0" tIns="0" rIns="0" bIns="0" rtlCol="0" anchor="t"/>
+          <a:lstStyle/>
+          <a:p>
+            <a:pPr indent="0" marL="0">
+              <a:buNone/>
+            </a:pPr>
+            <a:r>
+              <a:rPr lang="en-US" sz="1600" dirty="0">
+                <a:solidFill>
+                  <a:srgbClr val="14213D"/>
                 </a:solidFill>
                 <a:latin typeface="Segoe UI Semibold" pitchFamily="34" charset="0"/>
                 <a:ea typeface="Segoe UI Semibold" pitchFamily="34" charset="-122"/>
                 <a:cs typeface="Segoe UI Semibold" pitchFamily="34" charset="-120"/>
               </a:rPr>
-              <a:t>CLINICAL AND CULTURAL CONTEXT</a:t>
-            </a:r>
-            <a:endParaRPr lang="en-US" sz="1050" dirty="0"/>
+              <a:t>Twin features vs the best fusion model</a:t>
+            </a:r>
+            <a:endParaRPr lang="en-US" sz="1600" dirty="0"/>
           </a:p>
         </p:txBody>
       </p:sp>
@@ -8563,62 +8777,20 @@
         </p:nvSpPr>
         <p:spPr>
           <a:xfrm>
-            <a:off x="640080" y="2176272"/>
-            <a:ext cx="3383280" cy="777240"/>
-          </a:xfrm>
-          <a:prstGeom prst="rect">
-            <a:avLst/>
-          </a:prstGeom>
-          <a:noFill/>
-          <a:ln/>
-        </p:spPr>
-        <p:txBody>
-          <a:bodyPr wrap="square" lIns="0" tIns="0" rIns="0" bIns="0" rtlCol="0" anchor="t"/>
-          <a:lstStyle/>
-          <a:p>
-            <a:pPr indent="0" marL="0">
-              <a:buNone/>
-            </a:pPr>
-            <a:r>
-              <a:rPr lang="en-US" sz="1900" dirty="0">
-                <a:solidFill>
-                  <a:srgbClr val="14213D"/>
-                </a:solidFill>
-                <a:latin typeface="Georgia" pitchFamily="34" charset="0"/>
-                <a:ea typeface="Georgia" pitchFamily="34" charset="-122"/>
-                <a:cs typeface="Georgia" pitchFamily="34" charset="-120"/>
-              </a:rPr>
-              <a:t>Indian food, Indian prescriptions</a:t>
-            </a:r>
-            <a:endParaRPr lang="en-US" sz="1900" dirty="0"/>
-          </a:p>
-        </p:txBody>
-      </p:sp>
-      <p:sp>
-        <p:nvSpPr>
-          <p:cNvPr id="6" name="Text 4"/>
-          <p:cNvSpPr txBox="1"/>
-          <p:nvPr/>
-        </p:nvSpPr>
-        <p:spPr>
-          <a:xfrm>
-            <a:off x="640080" y="3108960"/>
-            <a:ext cx="3337560" cy="2651760"/>
-          </a:xfrm>
-          <a:prstGeom prst="rect">
-            <a:avLst/>
-          </a:prstGeom>
-          <a:noFill/>
-          <a:ln/>
-        </p:spPr>
-        <p:txBody>
-          <a:bodyPr wrap="square" lIns="0" tIns="0" rIns="0" bIns="0" rtlCol="0" anchor="t"/>
-          <a:lstStyle/>
-          <a:p>
-            <a:pPr indent="0" marL="0">
-              <a:spcAft>
-                <a:spcPts val="1200"/>
-              </a:spcAft>
+            <a:off x="640080" y="2313432"/>
+            <a:ext cx="5120640" cy="1371600"/>
+          </a:xfrm>
+          <a:prstGeom prst="rect">
+            <a:avLst/>
+          </a:prstGeom>
+          <a:noFill/>
+          <a:ln/>
+        </p:spPr>
+        <p:txBody>
+          <a:bodyPr wrap="square" lIns="0" tIns="0" rIns="0" bIns="0" rtlCol="0" anchor="t"/>
+          <a:lstStyle/>
+          <a:p>
+            <a:pPr indent="0" marL="0">
               <a:buNone/>
             </a:pPr>
             <a:r>
@@ -8630,15 +8802,73 @@
                 <a:ea typeface="Segoe UI" pitchFamily="34" charset="-122"/>
                 <a:cs typeface="Segoe UI" pitchFamily="34" charset="-120"/>
               </a:rPr>
-              <a:t>54 Indian dishes with glycaemic index (IFCT 2017)</a:t>
+              <a:t>On rolling real-data forecasts, adding twin features to the ML layer did not beat the best fusion model. The twin's measured value is simulation, day-zero personalisation and meal-response prediction.</a:t>
             </a:r>
             <a:endParaRPr lang="en-US" sz="1350" dirty="0"/>
           </a:p>
-          <a:p>
-            <a:pPr indent="0" marL="0">
-              <a:spcAft>
-                <a:spcPts val="1200"/>
-              </a:spcAft>
+        </p:txBody>
+      </p:sp>
+      <p:sp>
+        <p:nvSpPr>
+          <p:cNvPr id="6" name="Text 4"/>
+          <p:cNvSpPr txBox="1"/>
+          <p:nvPr/>
+        </p:nvSpPr>
+        <p:spPr>
+          <a:xfrm>
+            <a:off x="6309360" y="1874520"/>
+            <a:ext cx="5120640" cy="365760"/>
+          </a:xfrm>
+          <a:prstGeom prst="rect">
+            <a:avLst/>
+          </a:prstGeom>
+          <a:noFill/>
+          <a:ln/>
+        </p:spPr>
+        <p:txBody>
+          <a:bodyPr wrap="square" lIns="0" tIns="0" rIns="0" bIns="0" rtlCol="0" anchor="t"/>
+          <a:lstStyle/>
+          <a:p>
+            <a:pPr indent="0" marL="0">
+              <a:buNone/>
+            </a:pPr>
+            <a:r>
+              <a:rPr lang="en-US" sz="1600" dirty="0">
+                <a:solidFill>
+                  <a:srgbClr val="14213D"/>
+                </a:solidFill>
+                <a:latin typeface="Segoe UI Semibold" pitchFamily="34" charset="0"/>
+                <a:ea typeface="Segoe UI Semibold" pitchFamily="34" charset="-122"/>
+                <a:cs typeface="Segoe UI Semibold" pitchFamily="34" charset="-120"/>
+              </a:rPr>
+              <a:t>Three ideas rejected after validation</a:t>
+            </a:r>
+            <a:endParaRPr lang="en-US" sz="1600" dirty="0"/>
+          </a:p>
+        </p:txBody>
+      </p:sp>
+      <p:sp>
+        <p:nvSpPr>
+          <p:cNvPr id="7" name="Text 5"/>
+          <p:cNvSpPr txBox="1"/>
+          <p:nvPr/>
+        </p:nvSpPr>
+        <p:spPr>
+          <a:xfrm>
+            <a:off x="6309360" y="2313432"/>
+            <a:ext cx="5120640" cy="1371600"/>
+          </a:xfrm>
+          <a:prstGeom prst="rect">
+            <a:avLst/>
+          </a:prstGeom>
+          <a:noFill/>
+          <a:ln/>
+        </p:spPr>
+        <p:txBody>
+          <a:bodyPr wrap="square" lIns="0" tIns="0" rIns="0" bIns="0" rtlCol="0" anchor="t"/>
+          <a:lstStyle/>
+          <a:p>
+            <a:pPr indent="0" marL="0">
               <a:buNone/>
             </a:pPr>
             <a:r>
@@ -8650,15 +8880,73 @@
                 <a:ea typeface="Segoe UI" pitchFamily="34" charset="-122"/>
                 <a:cs typeface="Segoe UI" pitchFamily="34" charset="-120"/>
               </a:rPr>
-              <a:t>Teneligliptin, voglibose, glimepiride, gliclazide</a:t>
+              <a:t>A disturbance observer, an activity-persistence prior and a fasting steady-state constraint were tested on held-out data and switched off: none improved accuracy.</a:t>
             </a:r>
             <a:endParaRPr lang="en-US" sz="1350" dirty="0"/>
           </a:p>
-          <a:p>
-            <a:pPr indent="0" marL="0">
-              <a:spcAft>
-                <a:spcPts val="1200"/>
-              </a:spcAft>
+        </p:txBody>
+      </p:sp>
+      <p:sp>
+        <p:nvSpPr>
+          <p:cNvPr id="8" name="Text 6"/>
+          <p:cNvSpPr txBox="1"/>
+          <p:nvPr/>
+        </p:nvSpPr>
+        <p:spPr>
+          <a:xfrm>
+            <a:off x="640080" y="3977640"/>
+            <a:ext cx="5120640" cy="365760"/>
+          </a:xfrm>
+          <a:prstGeom prst="rect">
+            <a:avLst/>
+          </a:prstGeom>
+          <a:noFill/>
+          <a:ln/>
+        </p:spPr>
+        <p:txBody>
+          <a:bodyPr wrap="square" lIns="0" tIns="0" rIns="0" bIns="0" rtlCol="0" anchor="t"/>
+          <a:lstStyle/>
+          <a:p>
+            <a:pPr indent="0" marL="0">
+              <a:buNone/>
+            </a:pPr>
+            <a:r>
+              <a:rPr lang="en-US" sz="1600" dirty="0">
+                <a:solidFill>
+                  <a:srgbClr val="14213D"/>
+                </a:solidFill>
+                <a:latin typeface="Segoe UI Semibold" pitchFamily="34" charset="0"/>
+                <a:ea typeface="Segoe UI Semibold" pitchFamily="34" charset="-122"/>
+                <a:cs typeface="Segoe UI Semibold" pitchFamily="34" charset="-120"/>
+              </a:rPr>
+              <a:t>A small, non-Indian real cohort</a:t>
+            </a:r>
+            <a:endParaRPr lang="en-US" sz="1600" dirty="0"/>
+          </a:p>
+        </p:txBody>
+      </p:sp>
+      <p:sp>
+        <p:nvSpPr>
+          <p:cNvPr id="9" name="Text 7"/>
+          <p:cNvSpPr txBox="1"/>
+          <p:nvPr/>
+        </p:nvSpPr>
+        <p:spPr>
+          <a:xfrm>
+            <a:off x="640080" y="4416552"/>
+            <a:ext cx="5120640" cy="1371600"/>
+          </a:xfrm>
+          <a:prstGeom prst="rect">
+            <a:avLst/>
+          </a:prstGeom>
+          <a:noFill/>
+          <a:ln/>
+        </p:spPr>
+        <p:txBody>
+          <a:bodyPr wrap="square" lIns="0" tIns="0" rIns="0" bIns="0" rtlCol="0" anchor="t"/>
+          <a:lstStyle/>
+          <a:p>
+            <a:pPr indent="0" marL="0">
               <a:buNone/>
             </a:pPr>
             <a:r>
@@ -8670,15 +8958,73 @@
                 <a:ea typeface="Segoe UI" pitchFamily="34" charset="-122"/>
                 <a:cs typeface="Segoe UI" pitchFamily="34" charset="-120"/>
               </a:rPr>
-              <a:t>Asian-Indian BMI and waist cut-offs; IDRS</a:t>
+              <a:t>45 US adults, about ten days each. Indian diets, drugs and demographics are tested on a synthetic cohort that is always labelled and never mixed with real evidence.</a:t>
             </a:r>
             <a:endParaRPr lang="en-US" sz="1350" dirty="0"/>
           </a:p>
-          <a:p>
-            <a:pPr indent="0" marL="0">
-              <a:spcAft>
-                <a:spcPts val="1200"/>
-              </a:spcAft>
+        </p:txBody>
+      </p:sp>
+      <p:sp>
+        <p:nvSpPr>
+          <p:cNvPr id="10" name="Text 8"/>
+          <p:cNvSpPr txBox="1"/>
+          <p:nvPr/>
+        </p:nvSpPr>
+        <p:spPr>
+          <a:xfrm>
+            <a:off x="6309360" y="3977640"/>
+            <a:ext cx="5120640" cy="365760"/>
+          </a:xfrm>
+          <a:prstGeom prst="rect">
+            <a:avLst/>
+          </a:prstGeom>
+          <a:noFill/>
+          <a:ln/>
+        </p:spPr>
+        <p:txBody>
+          <a:bodyPr wrap="square" lIns="0" tIns="0" rIns="0" bIns="0" rtlCol="0" anchor="t"/>
+          <a:lstStyle/>
+          <a:p>
+            <a:pPr indent="0" marL="0">
+              <a:buNone/>
+            </a:pPr>
+            <a:r>
+              <a:rPr lang="en-US" sz="1600" dirty="0">
+                <a:solidFill>
+                  <a:srgbClr val="14213D"/>
+                </a:solidFill>
+                <a:latin typeface="Segoe UI Semibold" pitchFamily="34" charset="0"/>
+                <a:ea typeface="Segoe UI Semibold" pitchFamily="34" charset="-122"/>
+                <a:cs typeface="Segoe UI Semibold" pitchFamily="34" charset="-120"/>
+              </a:rPr>
+              <a:t>Lows: trust the risk, not the line</a:t>
+            </a:r>
+            <a:endParaRPr lang="en-US" sz="1600" dirty="0"/>
+          </a:p>
+        </p:txBody>
+      </p:sp>
+      <p:sp>
+        <p:nvSpPr>
+          <p:cNvPr id="11" name="Text 9"/>
+          <p:cNvSpPr txBox="1"/>
+          <p:nvPr/>
+        </p:nvSpPr>
+        <p:spPr>
+          <a:xfrm>
+            <a:off x="6309360" y="4416552"/>
+            <a:ext cx="5120640" cy="1371600"/>
+          </a:xfrm>
+          <a:prstGeom prst="rect">
+            <a:avLst/>
+          </a:prstGeom>
+          <a:noFill/>
+          <a:ln/>
+        </p:spPr>
+        <p:txBody>
+          <a:bodyPr wrap="square" lIns="0" tIns="0" rIns="0" bIns="0" rtlCol="0" anchor="t"/>
+          <a:lstStyle/>
+          <a:p>
+            <a:pPr indent="0" marL="0">
               <a:buNone/>
             </a:pPr>
             <a:r>
@@ -8690,7 +9036,7 @@
                 <a:ea typeface="Segoe UI" pitchFamily="34" charset="-122"/>
                 <a:cs typeface="Segoe UI" pitchFamily="34" charset="-120"/>
               </a:rPr>
-              <a:t>Patient language recorded for notices and nudges</a:t>
+              <a:t>Lows are rare in real data and point forecasts regress towards typical levels before them. The calibrated hypoglycaemia classifier (AUROC 0.85 real, 0.99 synthetic) is the primary signal.</a:t>
             </a:r>
             <a:endParaRPr lang="en-US" sz="1350" dirty="0"/>
           </a:p>
@@ -8698,193 +9044,13 @@
       </p:sp>
       <p:sp>
         <p:nvSpPr>
-          <p:cNvPr id="7" name="Text 5"/>
-          <p:cNvSpPr txBox="1"/>
-          <p:nvPr/>
-        </p:nvSpPr>
-        <p:spPr>
-          <a:xfrm>
-            <a:off x="4343400" y="1828800"/>
-            <a:ext cx="3383280" cy="256032"/>
-          </a:xfrm>
-          <a:prstGeom prst="rect">
-            <a:avLst/>
-          </a:prstGeom>
-          <a:noFill/>
-          <a:ln/>
-        </p:spPr>
-        <p:txBody>
-          <a:bodyPr wrap="square" lIns="0" tIns="0" rIns="0" bIns="0" rtlCol="0" anchor="t"/>
-          <a:lstStyle/>
-          <a:p>
-            <a:pPr indent="0" marL="0">
-              <a:buNone/>
-            </a:pPr>
-            <a:r>
-              <a:rPr lang="en-US" sz="1050" spc="250" kern="0" dirty="0">
-                <a:solidFill>
-                  <a:srgbClr val="B97A12"/>
-                </a:solidFill>
-                <a:latin typeface="Segoe UI Semibold" pitchFamily="34" charset="0"/>
-                <a:ea typeface="Segoe UI Semibold" pitchFamily="34" charset="-122"/>
-                <a:cs typeface="Segoe UI Semibold" pitchFamily="34" charset="-120"/>
-              </a:rPr>
-              <a:t>PRIVACY BY DESIGN</a:t>
-            </a:r>
-            <a:endParaRPr lang="en-US" sz="1050" dirty="0"/>
-          </a:p>
-        </p:txBody>
-      </p:sp>
-      <p:sp>
-        <p:nvSpPr>
-          <p:cNvPr id="8" name="Text 6"/>
-          <p:cNvSpPr txBox="1"/>
-          <p:nvPr/>
-        </p:nvSpPr>
-        <p:spPr>
-          <a:xfrm>
-            <a:off x="4343400" y="2176272"/>
-            <a:ext cx="3383280" cy="777240"/>
-          </a:xfrm>
-          <a:prstGeom prst="rect">
-            <a:avLst/>
-          </a:prstGeom>
-          <a:noFill/>
-          <a:ln/>
-        </p:spPr>
-        <p:txBody>
-          <a:bodyPr wrap="square" lIns="0" tIns="0" rIns="0" bIns="0" rtlCol="0" anchor="t"/>
-          <a:lstStyle/>
-          <a:p>
-            <a:pPr indent="0" marL="0">
-              <a:buNone/>
-            </a:pPr>
-            <a:r>
-              <a:rPr lang="en-US" sz="1900" dirty="0">
-                <a:solidFill>
-                  <a:srgbClr val="14213D"/>
-                </a:solidFill>
-                <a:latin typeface="Georgia" pitchFamily="34" charset="0"/>
-                <a:ea typeface="Georgia" pitchFamily="34" charset="-122"/>
-                <a:cs typeface="Georgia" pitchFamily="34" charset="-120"/>
-              </a:rPr>
-              <a:t>Aligned with the DPDP Act 2023</a:t>
-            </a:r>
-            <a:endParaRPr lang="en-US" sz="1900" dirty="0"/>
-          </a:p>
-        </p:txBody>
-      </p:sp>
-      <p:sp>
-        <p:nvSpPr>
-          <p:cNvPr id="9" name="Text 7"/>
-          <p:cNvSpPr txBox="1"/>
-          <p:nvPr/>
-        </p:nvSpPr>
-        <p:spPr>
-          <a:xfrm>
-            <a:off x="4343400" y="3108960"/>
-            <a:ext cx="3337560" cy="2651760"/>
-          </a:xfrm>
-          <a:prstGeom prst="rect">
-            <a:avLst/>
-          </a:prstGeom>
-          <a:noFill/>
-          <a:ln/>
-        </p:spPr>
-        <p:txBody>
-          <a:bodyPr wrap="square" lIns="0" tIns="0" rIns="0" bIns="0" rtlCol="0" anchor="t"/>
-          <a:lstStyle/>
-          <a:p>
-            <a:pPr indent="0" marL="0">
-              <a:spcAft>
-                <a:spcPts val="1200"/>
-              </a:spcAft>
-              <a:buNone/>
-            </a:pPr>
-            <a:r>
-              <a:rPr lang="en-US" sz="1350" dirty="0">
-                <a:solidFill>
-                  <a:srgbClr val="2A2F36"/>
-                </a:solidFill>
-                <a:latin typeface="Segoe UI" pitchFamily="34" charset="0"/>
-                <a:ea typeface="Segoe UI" pitchFamily="34" charset="-122"/>
-                <a:cs typeface="Segoe UI" pitchFamily="34" charset="-120"/>
-              </a:rPr>
-              <a:t>Purpose-bound consent per patient</a:t>
-            </a:r>
-            <a:endParaRPr lang="en-US" sz="1350" dirty="0"/>
-          </a:p>
-          <a:p>
-            <a:pPr indent="0" marL="0">
-              <a:spcAft>
-                <a:spcPts val="1200"/>
-              </a:spcAft>
-              <a:buNone/>
-            </a:pPr>
-            <a:r>
-              <a:rPr lang="en-US" sz="1350" dirty="0">
-                <a:solidFill>
-                  <a:srgbClr val="2A2F36"/>
-                </a:solidFill>
-                <a:latin typeface="Segoe UI" pitchFamily="34" charset="0"/>
-                <a:ea typeface="Segoe UI" pitchFamily="34" charset="-122"/>
-                <a:cs typeface="Segoe UI" pitchFamily="34" charset="-120"/>
-              </a:rPr>
-              <a:t>Data minimisation and retention limits</a:t>
-            </a:r>
-            <a:endParaRPr lang="en-US" sz="1350" dirty="0"/>
-          </a:p>
-          <a:p>
-            <a:pPr indent="0" marL="0">
-              <a:spcAft>
-                <a:spcPts val="1200"/>
-              </a:spcAft>
-              <a:buNone/>
-            </a:pPr>
-            <a:r>
-              <a:rPr lang="en-US" sz="1350" dirty="0">
-                <a:solidFill>
-                  <a:srgbClr val="2A2F36"/>
-                </a:solidFill>
-                <a:latin typeface="Segoe UI" pitchFamily="34" charset="0"/>
-                <a:ea typeface="Segoe UI" pitchFamily="34" charset="-122"/>
-                <a:cs typeface="Segoe UI" pitchFamily="34" charset="-120"/>
-              </a:rPr>
-              <a:t>Only open de-identified or fictional data</a:t>
-            </a:r>
-            <a:endParaRPr lang="en-US" sz="1350" dirty="0"/>
-          </a:p>
-          <a:p>
-            <a:pPr indent="0" marL="0">
-              <a:spcAft>
-                <a:spcPts val="1200"/>
-              </a:spcAft>
-              <a:buNone/>
-            </a:pPr>
-            <a:r>
-              <a:rPr lang="en-US" sz="1350" dirty="0">
-                <a:solidFill>
-                  <a:srgbClr val="2A2F36"/>
-                </a:solidFill>
-                <a:latin typeface="Segoe UI" pitchFamily="34" charset="0"/>
-                <a:ea typeface="Segoe UI" pitchFamily="34" charset="-122"/>
-                <a:cs typeface="Segoe UI" pitchFamily="34" charset="-120"/>
-              </a:rPr>
-              <a:t>Decision support: no dosing instructions</a:t>
-            </a:r>
-            <a:endParaRPr lang="en-US" sz="1350" dirty="0"/>
-          </a:p>
-        </p:txBody>
-      </p:sp>
-      <p:sp>
-        <p:nvSpPr>
-          <p:cNvPr id="10" name="rule"/>
+          <p:cNvPr id="12" name="rule"/>
           <p:cNvSpPr/>
           <p:nvPr/>
         </p:nvSpPr>
         <p:spPr>
           <a:xfrm>
-            <a:off x="4142232" y="1874520"/>
+            <a:off x="6099048" y="1874520"/>
             <a:ext cx="0" cy="3931920"/>
           </a:xfrm>
           <a:prstGeom prst="line">
@@ -8901,194 +9067,14 @@
       </p:sp>
       <p:sp>
         <p:nvSpPr>
-          <p:cNvPr id="11" name="Text 9"/>
-          <p:cNvSpPr txBox="1"/>
-          <p:nvPr/>
-        </p:nvSpPr>
-        <p:spPr>
-          <a:xfrm>
-            <a:off x="8046720" y="1828800"/>
-            <a:ext cx="3383280" cy="256032"/>
-          </a:xfrm>
-          <a:prstGeom prst="rect">
-            <a:avLst/>
-          </a:prstGeom>
-          <a:noFill/>
-          <a:ln/>
-        </p:spPr>
-        <p:txBody>
-          <a:bodyPr wrap="square" lIns="0" tIns="0" rIns="0" bIns="0" rtlCol="0" anchor="t"/>
-          <a:lstStyle/>
-          <a:p>
-            <a:pPr indent="0" marL="0">
-              <a:buNone/>
-            </a:pPr>
-            <a:r>
-              <a:rPr lang="en-US" sz="1050" spc="250" kern="0" dirty="0">
-                <a:solidFill>
-                  <a:srgbClr val="B97A12"/>
-                </a:solidFill>
-                <a:latin typeface="Segoe UI Semibold" pitchFamily="34" charset="0"/>
-                <a:ea typeface="Segoe UI Semibold" pitchFamily="34" charset="-122"/>
-                <a:cs typeface="Segoe UI Semibold" pitchFamily="34" charset="-120"/>
-              </a:rPr>
-              <a:t>INTEROPERABLE AND OPEN</a:t>
-            </a:r>
-            <a:endParaRPr lang="en-US" sz="1050" dirty="0"/>
-          </a:p>
-        </p:txBody>
-      </p:sp>
-      <p:sp>
-        <p:nvSpPr>
-          <p:cNvPr id="12" name="Text 10"/>
-          <p:cNvSpPr txBox="1"/>
-          <p:nvPr/>
-        </p:nvSpPr>
-        <p:spPr>
-          <a:xfrm>
-            <a:off x="8046720" y="2176272"/>
-            <a:ext cx="3383280" cy="777240"/>
-          </a:xfrm>
-          <a:prstGeom prst="rect">
-            <a:avLst/>
-          </a:prstGeom>
-          <a:noFill/>
-          <a:ln/>
-        </p:spPr>
-        <p:txBody>
-          <a:bodyPr wrap="square" lIns="0" tIns="0" rIns="0" bIns="0" rtlCol="0" anchor="t"/>
-          <a:lstStyle/>
-          <a:p>
-            <a:pPr indent="0" marL="0">
-              <a:buNone/>
-            </a:pPr>
-            <a:r>
-              <a:rPr lang="en-US" sz="1900" dirty="0">
-                <a:solidFill>
-                  <a:srgbClr val="14213D"/>
-                </a:solidFill>
-                <a:latin typeface="Georgia" pitchFamily="34" charset="0"/>
-                <a:ea typeface="Georgia" pitchFamily="34" charset="-122"/>
-                <a:cs typeface="Georgia" pitchFamily="34" charset="-120"/>
-              </a:rPr>
-              <a:t>Ready for ABDM-style exchange</a:t>
-            </a:r>
-            <a:endParaRPr lang="en-US" sz="1900" dirty="0"/>
-          </a:p>
-        </p:txBody>
-      </p:sp>
-      <p:sp>
-        <p:nvSpPr>
-          <p:cNvPr id="13" name="Text 11"/>
-          <p:cNvSpPr txBox="1"/>
-          <p:nvPr/>
-        </p:nvSpPr>
-        <p:spPr>
-          <a:xfrm>
-            <a:off x="8046720" y="3108960"/>
-            <a:ext cx="3337560" cy="2651760"/>
-          </a:xfrm>
-          <a:prstGeom prst="rect">
-            <a:avLst/>
-          </a:prstGeom>
-          <a:noFill/>
-          <a:ln/>
-        </p:spPr>
-        <p:txBody>
-          <a:bodyPr wrap="square" lIns="0" tIns="0" rIns="0" bIns="0" rtlCol="0" anchor="t"/>
-          <a:lstStyle/>
-          <a:p>
-            <a:pPr indent="0" marL="0">
-              <a:spcAft>
-                <a:spcPts val="1200"/>
-              </a:spcAft>
-              <a:buNone/>
-            </a:pPr>
-            <a:r>
-              <a:rPr lang="en-US" sz="1350" dirty="0">
-                <a:solidFill>
-                  <a:srgbClr val="2A2F36"/>
-                </a:solidFill>
-                <a:latin typeface="Segoe UI" pitchFamily="34" charset="0"/>
-                <a:ea typeface="Segoe UI" pitchFamily="34" charset="-122"/>
-                <a:cs typeface="Segoe UI" pitchFamily="34" charset="-120"/>
-              </a:rPr>
-              <a:t>HL7 FHIR R4 bundles</a:t>
-            </a:r>
-            <a:endParaRPr lang="en-US" sz="1350" dirty="0"/>
-          </a:p>
-          <a:p>
-            <a:pPr indent="0" marL="0">
-              <a:spcAft>
-                <a:spcPts val="1200"/>
-              </a:spcAft>
-              <a:buNone/>
-            </a:pPr>
-            <a:r>
-              <a:rPr lang="en-US" sz="1350" dirty="0">
-                <a:solidFill>
-                  <a:srgbClr val="2A2F36"/>
-                </a:solidFill>
-                <a:latin typeface="Segoe UI" pitchFamily="34" charset="0"/>
-                <a:ea typeface="Segoe UI" pitchFamily="34" charset="-122"/>
-                <a:cs typeface="Segoe UI" pitchFamily="34" charset="-120"/>
-              </a:rPr>
-              <a:t>LOINC, SNOMED CT, ICD-10, WHO ATC</a:t>
-            </a:r>
-            <a:endParaRPr lang="en-US" sz="1350" dirty="0"/>
-          </a:p>
-          <a:p>
-            <a:pPr indent="0" marL="0">
-              <a:spcAft>
-                <a:spcPts val="1200"/>
-              </a:spcAft>
-              <a:buNone/>
-            </a:pPr>
-            <a:r>
-              <a:rPr lang="en-US" sz="1350" dirty="0">
-                <a:solidFill>
-                  <a:srgbClr val="2A2F36"/>
-                </a:solidFill>
-                <a:latin typeface="Segoe UI" pitchFamily="34" charset="0"/>
-                <a:ea typeface="Segoe UI" pitchFamily="34" charset="-122"/>
-                <a:cs typeface="Segoe UI" pitchFamily="34" charset="-120"/>
-              </a:rPr>
-              <a:t>HL7 CGM summary codes; AGP report</a:t>
-            </a:r>
-            <a:endParaRPr lang="en-US" sz="1350" dirty="0"/>
-          </a:p>
-          <a:p>
-            <a:pPr indent="0" marL="0">
-              <a:spcAft>
-                <a:spcPts val="1200"/>
-              </a:spcAft>
-              <a:buNone/>
-            </a:pPr>
-            <a:r>
-              <a:rPr lang="en-US" sz="1350" dirty="0">
-                <a:solidFill>
-                  <a:srgbClr val="2A2F36"/>
-                </a:solidFill>
-                <a:latin typeface="Segoe UI" pitchFamily="34" charset="0"/>
-                <a:ea typeface="Segoe UI" pitchFamily="34" charset="-122"/>
-                <a:cs typeface="Segoe UI" pitchFamily="34" charset="-120"/>
-              </a:rPr>
-              <a:t>Open source: Python, FastAPI, React</a:t>
-            </a:r>
-            <a:endParaRPr lang="en-US" sz="1350" dirty="0"/>
-          </a:p>
-        </p:txBody>
-      </p:sp>
-      <p:sp>
-        <p:nvSpPr>
-          <p:cNvPr id="14" name="rule"/>
+          <p:cNvPr id="13" name="rule"/>
           <p:cNvSpPr/>
           <p:nvPr/>
         </p:nvSpPr>
         <p:spPr>
           <a:xfrm>
-            <a:off x="7845552" y="1874520"/>
-            <a:ext cx="0" cy="3931920"/>
+            <a:off x="640080" y="3794760"/>
+            <a:ext cx="10911535" cy="0"/>
           </a:xfrm>
           <a:prstGeom prst="line">
             <a:avLst/>
@@ -9208,7 +9194,7 @@
                 <a:ea typeface="Segoe UI Semibold" pitchFamily="34" charset="-122"/>
                 <a:cs typeface="Segoe UI Semibold" pitchFamily="34" charset="-120"/>
               </a:rPr>
-              <a:t>06   WHAT COMES NEXT</a:t>
+              <a:t>05   BUILT FOR INDIA</a:t>
             </a:r>
             <a:endParaRPr lang="en-US" sz="1050" dirty="0"/>
           </a:p>
@@ -9249,7 +9235,7 @@
                 <a:ea typeface="Georgia" pitchFamily="34" charset="-122"/>
                 <a:cs typeface="Georgia" pitchFamily="34" charset="-120"/>
               </a:rPr>
-              <a:t>From prototype to clinic</a:t>
+              <a:t>Built for Indian clinics: diets, drugs, data law and standards</a:t>
             </a:r>
             <a:endParaRPr lang="en-US" sz="2700" dirty="0"/>
           </a:p>
@@ -9257,78 +9243,30 @@
       </p:sp>
       <p:sp>
         <p:nvSpPr>
-          <p:cNvPr id="4" name="rule"/>
-          <p:cNvSpPr/>
-          <p:nvPr/>
-        </p:nvSpPr>
-        <p:spPr>
-          <a:xfrm>
-            <a:off x="749808" y="2121408"/>
-            <a:ext cx="10362895" cy="0"/>
-          </a:xfrm>
-          <a:prstGeom prst="line">
-            <a:avLst/>
-          </a:prstGeom>
-          <a:noFill/>
-          <a:ln w="15875">
-            <a:solidFill>
-              <a:srgbClr val="D9DEE5"/>
-            </a:solidFill>
-            <a:prstDash val="solid"/>
-          </a:ln>
-        </p:spPr>
-      </p:sp>
-      <p:sp>
-        <p:nvSpPr>
-          <p:cNvPr id="5" name="milestone 1"/>
-          <p:cNvSpPr/>
-          <p:nvPr/>
-        </p:nvSpPr>
-        <p:spPr>
-          <a:xfrm>
-            <a:off x="658368" y="2011680"/>
-            <a:ext cx="219456" cy="219456"/>
-          </a:xfrm>
-          <a:prstGeom prst="ellipse">
-            <a:avLst/>
-          </a:prstGeom>
-          <a:solidFill>
-            <a:srgbClr val="B97A12"/>
-          </a:solidFill>
-          <a:ln w="25400">
-            <a:solidFill>
-              <a:srgbClr val="FFFFFF"/>
-            </a:solidFill>
-            <a:prstDash val="solid"/>
-          </a:ln>
-        </p:spPr>
-      </p:sp>
-      <p:sp>
-        <p:nvSpPr>
-          <p:cNvPr id="6" name="Text 4"/>
-          <p:cNvSpPr txBox="1"/>
-          <p:nvPr/>
-        </p:nvSpPr>
-        <p:spPr>
-          <a:xfrm>
-            <a:off x="640080" y="2468880"/>
-            <a:ext cx="2560320" cy="256032"/>
-          </a:xfrm>
-          <a:prstGeom prst="rect">
-            <a:avLst/>
-          </a:prstGeom>
-          <a:noFill/>
-          <a:ln/>
-        </p:spPr>
-        <p:txBody>
-          <a:bodyPr wrap="square" lIns="0" tIns="0" rIns="0" bIns="0" rtlCol="0" anchor="t"/>
-          <a:lstStyle/>
-          <a:p>
-            <a:pPr indent="0" marL="0">
-              <a:buNone/>
-            </a:pPr>
-            <a:r>
-              <a:rPr lang="en-US" sz="1000" spc="200" kern="0" dirty="0">
+          <p:cNvPr id="4" name="Text 2"/>
+          <p:cNvSpPr txBox="1"/>
+          <p:nvPr/>
+        </p:nvSpPr>
+        <p:spPr>
+          <a:xfrm>
+            <a:off x="640080" y="1828800"/>
+            <a:ext cx="3383280" cy="256032"/>
+          </a:xfrm>
+          <a:prstGeom prst="rect">
+            <a:avLst/>
+          </a:prstGeom>
+          <a:noFill/>
+          <a:ln/>
+        </p:spPr>
+        <p:txBody>
+          <a:bodyPr wrap="square" lIns="0" tIns="0" rIns="0" bIns="0" rtlCol="0" anchor="t"/>
+          <a:lstStyle/>
+          <a:p>
+            <a:pPr indent="0" marL="0">
+              <a:buNone/>
+            </a:pPr>
+            <a:r>
+              <a:rPr lang="en-US" sz="1050" spc="250" kern="0" dirty="0">
                 <a:solidFill>
                   <a:srgbClr val="B97A12"/>
                 </a:solidFill>
@@ -9336,22 +9274,22 @@
                 <a:ea typeface="Segoe UI Semibold" pitchFamily="34" charset="-122"/>
                 <a:cs typeface="Segoe UI Semibold" pitchFamily="34" charset="-120"/>
               </a:rPr>
-              <a:t>NOW</a:t>
-            </a:r>
-            <a:endParaRPr lang="en-US" sz="1000" dirty="0"/>
-          </a:p>
-        </p:txBody>
-      </p:sp>
-      <p:sp>
-        <p:nvSpPr>
-          <p:cNvPr id="7" name="Text 5"/>
-          <p:cNvSpPr txBox="1"/>
-          <p:nvPr/>
-        </p:nvSpPr>
-        <p:spPr>
-          <a:xfrm>
-            <a:off x="640080" y="2788920"/>
-            <a:ext cx="2560320" cy="411480"/>
+              <a:t>CLINICAL AND CULTURAL CONTEXT</a:t>
+            </a:r>
+            <a:endParaRPr lang="en-US" sz="1050" dirty="0"/>
+          </a:p>
+        </p:txBody>
+      </p:sp>
+      <p:sp>
+        <p:nvSpPr>
+          <p:cNvPr id="5" name="Text 3"/>
+          <p:cNvSpPr txBox="1"/>
+          <p:nvPr/>
+        </p:nvSpPr>
+        <p:spPr>
+          <a:xfrm>
+            <a:off x="640080" y="2176272"/>
+            <a:ext cx="3383280" cy="777240"/>
           </a:xfrm>
           <a:prstGeom prst="rect">
             <a:avLst/>
@@ -9375,7 +9313,7 @@
                 <a:ea typeface="Georgia" pitchFamily="34" charset="-122"/>
                 <a:cs typeface="Georgia" pitchFamily="34" charset="-120"/>
               </a:rPr>
-              <a:t>Validated prototype</a:t>
+              <a:t>Indian food, Indian prescriptions</a:t>
             </a:r>
             <a:endParaRPr lang="en-US" sz="1900" dirty="0"/>
           </a:p>
@@ -9383,30 +9321,33 @@
       </p:sp>
       <p:sp>
         <p:nvSpPr>
-          <p:cNvPr id="8" name="Text 6"/>
-          <p:cNvSpPr txBox="1"/>
-          <p:nvPr/>
-        </p:nvSpPr>
-        <p:spPr>
-          <a:xfrm>
-            <a:off x="640080" y="3291840"/>
-            <a:ext cx="2514600" cy="1371600"/>
-          </a:xfrm>
-          <a:prstGeom prst="rect">
-            <a:avLst/>
-          </a:prstGeom>
-          <a:noFill/>
-          <a:ln/>
-        </p:spPr>
-        <p:txBody>
-          <a:bodyPr wrap="square" lIns="0" tIns="0" rIns="0" bIns="0" rtlCol="0" anchor="t"/>
-          <a:lstStyle/>
-          <a:p>
-            <a:pPr indent="0" marL="0">
-              <a:buNone/>
-            </a:pPr>
-            <a:r>
-              <a:rPr lang="en-US" sz="1300" dirty="0">
+          <p:cNvPr id="6" name="Text 4"/>
+          <p:cNvSpPr txBox="1"/>
+          <p:nvPr/>
+        </p:nvSpPr>
+        <p:spPr>
+          <a:xfrm>
+            <a:off x="640080" y="3108960"/>
+            <a:ext cx="3337560" cy="2651760"/>
+          </a:xfrm>
+          <a:prstGeom prst="rect">
+            <a:avLst/>
+          </a:prstGeom>
+          <a:noFill/>
+          <a:ln/>
+        </p:spPr>
+        <p:txBody>
+          <a:bodyPr wrap="square" lIns="0" tIns="0" rIns="0" bIns="0" rtlCol="0" anchor="t"/>
+          <a:lstStyle/>
+          <a:p>
+            <a:pPr indent="0" marL="0">
+              <a:spcAft>
+                <a:spcPts val="1200"/>
+              </a:spcAft>
+              <a:buNone/>
+            </a:pPr>
+            <a:r>
+              <a:rPr lang="en-US" sz="1350" dirty="0">
                 <a:solidFill>
                   <a:srgbClr val="2A2F36"/>
                 </a:solidFill>
@@ -9414,86 +9355,121 @@
                 <a:ea typeface="Segoe UI" pitchFamily="34" charset="-122"/>
                 <a:cs typeface="Segoe UI" pitchFamily="34" charset="-120"/>
               </a:rPr>
-              <a:t>Real-data evidence, Indian synthetic cohort, clinician dashboard, FHIR export</a:t>
-            </a:r>
-            <a:endParaRPr lang="en-US" sz="1300" dirty="0"/>
-          </a:p>
-        </p:txBody>
-      </p:sp>
-      <p:sp>
-        <p:nvSpPr>
-          <p:cNvPr id="9" name="milestone 2"/>
-          <p:cNvSpPr/>
-          <p:nvPr/>
-        </p:nvSpPr>
-        <p:spPr>
-          <a:xfrm>
-            <a:off x="3447288" y="2011680"/>
-            <a:ext cx="219456" cy="219456"/>
-          </a:xfrm>
-          <a:prstGeom prst="ellipse">
-            <a:avLst/>
-          </a:prstGeom>
-          <a:solidFill>
-            <a:srgbClr val="0F1B2D"/>
-          </a:solidFill>
-          <a:ln w="25400">
-            <a:solidFill>
-              <a:srgbClr val="FFFFFF"/>
-            </a:solidFill>
-            <a:prstDash val="solid"/>
-          </a:ln>
-        </p:spPr>
-      </p:sp>
-      <p:sp>
-        <p:nvSpPr>
-          <p:cNvPr id="10" name="Text 8"/>
-          <p:cNvSpPr txBox="1"/>
-          <p:nvPr/>
-        </p:nvSpPr>
-        <p:spPr>
-          <a:xfrm>
-            <a:off x="3429000" y="2468880"/>
-            <a:ext cx="2560320" cy="256032"/>
-          </a:xfrm>
-          <a:prstGeom prst="rect">
-            <a:avLst/>
-          </a:prstGeom>
-          <a:noFill/>
-          <a:ln/>
-        </p:spPr>
-        <p:txBody>
-          <a:bodyPr wrap="square" lIns="0" tIns="0" rIns="0" bIns="0" rtlCol="0" anchor="t"/>
-          <a:lstStyle/>
-          <a:p>
-            <a:pPr indent="0" marL="0">
-              <a:buNone/>
-            </a:pPr>
-            <a:r>
-              <a:rPr lang="en-US" sz="1000" spc="200" kern="0" dirty="0">
-                <a:solidFill>
-                  <a:srgbClr val="6B7280"/>
+              <a:t>54 Indian dishes with glycaemic index (IFCT 2017)</a:t>
+            </a:r>
+            <a:endParaRPr lang="en-US" sz="1350" dirty="0"/>
+          </a:p>
+          <a:p>
+            <a:pPr indent="0" marL="0">
+              <a:spcAft>
+                <a:spcPts val="1200"/>
+              </a:spcAft>
+              <a:buNone/>
+            </a:pPr>
+            <a:r>
+              <a:rPr lang="en-US" sz="1350" dirty="0">
+                <a:solidFill>
+                  <a:srgbClr val="2A2F36"/>
+                </a:solidFill>
+                <a:latin typeface="Segoe UI" pitchFamily="34" charset="0"/>
+                <a:ea typeface="Segoe UI" pitchFamily="34" charset="-122"/>
+                <a:cs typeface="Segoe UI" pitchFamily="34" charset="-120"/>
+              </a:rPr>
+              <a:t>Teneligliptin, voglibose, glimepiride, gliclazide</a:t>
+            </a:r>
+            <a:endParaRPr lang="en-US" sz="1350" dirty="0"/>
+          </a:p>
+          <a:p>
+            <a:pPr indent="0" marL="0">
+              <a:spcAft>
+                <a:spcPts val="1200"/>
+              </a:spcAft>
+              <a:buNone/>
+            </a:pPr>
+            <a:r>
+              <a:rPr lang="en-US" sz="1350" dirty="0">
+                <a:solidFill>
+                  <a:srgbClr val="2A2F36"/>
+                </a:solidFill>
+                <a:latin typeface="Segoe UI" pitchFamily="34" charset="0"/>
+                <a:ea typeface="Segoe UI" pitchFamily="34" charset="-122"/>
+                <a:cs typeface="Segoe UI" pitchFamily="34" charset="-120"/>
+              </a:rPr>
+              <a:t>Asian-Indian BMI and waist cut-offs; IDRS</a:t>
+            </a:r>
+            <a:endParaRPr lang="en-US" sz="1350" dirty="0"/>
+          </a:p>
+          <a:p>
+            <a:pPr indent="0" marL="0">
+              <a:spcAft>
+                <a:spcPts val="1200"/>
+              </a:spcAft>
+              <a:buNone/>
+            </a:pPr>
+            <a:r>
+              <a:rPr lang="en-US" sz="1350" dirty="0">
+                <a:solidFill>
+                  <a:srgbClr val="2A2F36"/>
+                </a:solidFill>
+                <a:latin typeface="Segoe UI" pitchFamily="34" charset="0"/>
+                <a:ea typeface="Segoe UI" pitchFamily="34" charset="-122"/>
+                <a:cs typeface="Segoe UI" pitchFamily="34" charset="-120"/>
+              </a:rPr>
+              <a:t>Patient language recorded for notices and nudges</a:t>
+            </a:r>
+            <a:endParaRPr lang="en-US" sz="1350" dirty="0"/>
+          </a:p>
+        </p:txBody>
+      </p:sp>
+      <p:sp>
+        <p:nvSpPr>
+          <p:cNvPr id="7" name="Text 5"/>
+          <p:cNvSpPr txBox="1"/>
+          <p:nvPr/>
+        </p:nvSpPr>
+        <p:spPr>
+          <a:xfrm>
+            <a:off x="4343400" y="1828800"/>
+            <a:ext cx="3383280" cy="256032"/>
+          </a:xfrm>
+          <a:prstGeom prst="rect">
+            <a:avLst/>
+          </a:prstGeom>
+          <a:noFill/>
+          <a:ln/>
+        </p:spPr>
+        <p:txBody>
+          <a:bodyPr wrap="square" lIns="0" tIns="0" rIns="0" bIns="0" rtlCol="0" anchor="t"/>
+          <a:lstStyle/>
+          <a:p>
+            <a:pPr indent="0" marL="0">
+              <a:buNone/>
+            </a:pPr>
+            <a:r>
+              <a:rPr lang="en-US" sz="1050" spc="250" kern="0" dirty="0">
+                <a:solidFill>
+                  <a:srgbClr val="B97A12"/>
                 </a:solidFill>
                 <a:latin typeface="Segoe UI Semibold" pitchFamily="34" charset="0"/>
                 <a:ea typeface="Segoe UI Semibold" pitchFamily="34" charset="-122"/>
                 <a:cs typeface="Segoe UI Semibold" pitchFamily="34" charset="-120"/>
               </a:rPr>
-              <a:t>NEXT SIX MONTHS</a:t>
-            </a:r>
-            <a:endParaRPr lang="en-US" sz="1000" dirty="0"/>
-          </a:p>
-        </p:txBody>
-      </p:sp>
-      <p:sp>
-        <p:nvSpPr>
-          <p:cNvPr id="11" name="Text 9"/>
-          <p:cNvSpPr txBox="1"/>
-          <p:nvPr/>
-        </p:nvSpPr>
-        <p:spPr>
-          <a:xfrm>
-            <a:off x="3429000" y="2788920"/>
-            <a:ext cx="2560320" cy="411480"/>
+              <a:t>PRIVACY BY DESIGN</a:t>
+            </a:r>
+            <a:endParaRPr lang="en-US" sz="1050" dirty="0"/>
+          </a:p>
+        </p:txBody>
+      </p:sp>
+      <p:sp>
+        <p:nvSpPr>
+          <p:cNvPr id="8" name="Text 6"/>
+          <p:cNvSpPr txBox="1"/>
+          <p:nvPr/>
+        </p:nvSpPr>
+        <p:spPr>
+          <a:xfrm>
+            <a:off x="4343400" y="2176272"/>
+            <a:ext cx="3383280" cy="777240"/>
           </a:xfrm>
           <a:prstGeom prst="rect">
             <a:avLst/>
@@ -9517,7 +9493,7 @@
                 <a:ea typeface="Georgia" pitchFamily="34" charset="-122"/>
                 <a:cs typeface="Georgia" pitchFamily="34" charset="-120"/>
               </a:rPr>
-              <a:t>Clinical pilot</a:t>
+              <a:t>Aligned with the DPDP Act 2023</a:t>
             </a:r>
             <a:endParaRPr lang="en-US" sz="1900" dirty="0"/>
           </a:p>
@@ -9525,30 +9501,33 @@
       </p:sp>
       <p:sp>
         <p:nvSpPr>
-          <p:cNvPr id="12" name="Text 10"/>
-          <p:cNvSpPr txBox="1"/>
-          <p:nvPr/>
-        </p:nvSpPr>
-        <p:spPr>
-          <a:xfrm>
-            <a:off x="3429000" y="3291840"/>
-            <a:ext cx="2514600" cy="1371600"/>
-          </a:xfrm>
-          <a:prstGeom prst="rect">
-            <a:avLst/>
-          </a:prstGeom>
-          <a:noFill/>
-          <a:ln/>
-        </p:spPr>
-        <p:txBody>
-          <a:bodyPr wrap="square" lIns="0" tIns="0" rIns="0" bIns="0" rtlCol="0" anchor="t"/>
-          <a:lstStyle/>
-          <a:p>
-            <a:pPr indent="0" marL="0">
-              <a:buNone/>
-            </a:pPr>
-            <a:r>
-              <a:rPr lang="en-US" sz="1300" dirty="0">
+          <p:cNvPr id="9" name="Text 7"/>
+          <p:cNvSpPr txBox="1"/>
+          <p:nvPr/>
+        </p:nvSpPr>
+        <p:spPr>
+          <a:xfrm>
+            <a:off x="4343400" y="3108960"/>
+            <a:ext cx="3337560" cy="2651760"/>
+          </a:xfrm>
+          <a:prstGeom prst="rect">
+            <a:avLst/>
+          </a:prstGeom>
+          <a:noFill/>
+          <a:ln/>
+        </p:spPr>
+        <p:txBody>
+          <a:bodyPr wrap="square" lIns="0" tIns="0" rIns="0" bIns="0" rtlCol="0" anchor="t"/>
+          <a:lstStyle/>
+          <a:p>
+            <a:pPr indent="0" marL="0">
+              <a:spcAft>
+                <a:spcPts val="1200"/>
+              </a:spcAft>
+              <a:buNone/>
+            </a:pPr>
+            <a:r>
+              <a:rPr lang="en-US" sz="1350" dirty="0">
                 <a:solidFill>
                   <a:srgbClr val="2A2F36"/>
                 </a:solidFill>
@@ -9556,141 +9535,19 @@
                 <a:ea typeface="Segoe UI" pitchFamily="34" charset="-122"/>
                 <a:cs typeface="Segoe UI" pitchFamily="34" charset="-120"/>
               </a:rPr>
-              <a:t>A remote-monitoring clinic in Bengaluru: alert-guided vs usual care on time in range and lows</a:t>
-            </a:r>
-            <a:endParaRPr lang="en-US" sz="1300" dirty="0"/>
-          </a:p>
-        </p:txBody>
-      </p:sp>
-      <p:sp>
-        <p:nvSpPr>
-          <p:cNvPr id="13" name="milestone 3"/>
-          <p:cNvSpPr/>
-          <p:nvPr/>
-        </p:nvSpPr>
-        <p:spPr>
-          <a:xfrm>
-            <a:off x="6236208" y="2011680"/>
-            <a:ext cx="219456" cy="219456"/>
-          </a:xfrm>
-          <a:prstGeom prst="ellipse">
-            <a:avLst/>
-          </a:prstGeom>
-          <a:solidFill>
-            <a:srgbClr val="0F1B2D"/>
-          </a:solidFill>
-          <a:ln w="25400">
-            <a:solidFill>
-              <a:srgbClr val="FFFFFF"/>
-            </a:solidFill>
-            <a:prstDash val="solid"/>
-          </a:ln>
-        </p:spPr>
-      </p:sp>
-      <p:sp>
-        <p:nvSpPr>
-          <p:cNvPr id="14" name="Text 12"/>
-          <p:cNvSpPr txBox="1"/>
-          <p:nvPr/>
-        </p:nvSpPr>
-        <p:spPr>
-          <a:xfrm>
-            <a:off x="6217920" y="2468880"/>
-            <a:ext cx="2560320" cy="256032"/>
-          </a:xfrm>
-          <a:prstGeom prst="rect">
-            <a:avLst/>
-          </a:prstGeom>
-          <a:noFill/>
-          <a:ln/>
-        </p:spPr>
-        <p:txBody>
-          <a:bodyPr wrap="square" lIns="0" tIns="0" rIns="0" bIns="0" rtlCol="0" anchor="t"/>
-          <a:lstStyle/>
-          <a:p>
-            <a:pPr indent="0" marL="0">
-              <a:buNone/>
-            </a:pPr>
-            <a:r>
-              <a:rPr lang="en-US" sz="1000" spc="200" kern="0" dirty="0">
-                <a:solidFill>
-                  <a:srgbClr val="6B7280"/>
-                </a:solidFill>
-                <a:latin typeface="Segoe UI Semibold" pitchFamily="34" charset="0"/>
-                <a:ea typeface="Segoe UI Semibold" pitchFamily="34" charset="-122"/>
-                <a:cs typeface="Segoe UI Semibold" pitchFamily="34" charset="-120"/>
-              </a:rPr>
-              <a:t>TWELVE MONTHS</a:t>
-            </a:r>
-            <a:endParaRPr lang="en-US" sz="1000" dirty="0"/>
-          </a:p>
-        </p:txBody>
-      </p:sp>
-      <p:sp>
-        <p:nvSpPr>
-          <p:cNvPr id="15" name="Text 13"/>
-          <p:cNvSpPr txBox="1"/>
-          <p:nvPr/>
-        </p:nvSpPr>
-        <p:spPr>
-          <a:xfrm>
-            <a:off x="6217920" y="2788920"/>
-            <a:ext cx="2560320" cy="411480"/>
-          </a:xfrm>
-          <a:prstGeom prst="rect">
-            <a:avLst/>
-          </a:prstGeom>
-          <a:noFill/>
-          <a:ln/>
-        </p:spPr>
-        <p:txBody>
-          <a:bodyPr wrap="square" lIns="0" tIns="0" rIns="0" bIns="0" rtlCol="0" anchor="t"/>
-          <a:lstStyle/>
-          <a:p>
-            <a:pPr indent="0" marL="0">
-              <a:buNone/>
-            </a:pPr>
-            <a:r>
-              <a:rPr lang="en-US" sz="1900" dirty="0">
-                <a:solidFill>
-                  <a:srgbClr val="14213D"/>
-                </a:solidFill>
-                <a:latin typeface="Georgia" pitchFamily="34" charset="0"/>
-                <a:ea typeface="Georgia" pitchFamily="34" charset="-122"/>
-                <a:cs typeface="Georgia" pitchFamily="34" charset="-120"/>
-              </a:rPr>
-              <a:t>Scale</a:t>
-            </a:r>
-            <a:endParaRPr lang="en-US" sz="1900" dirty="0"/>
-          </a:p>
-        </p:txBody>
-      </p:sp>
-      <p:sp>
-        <p:nvSpPr>
-          <p:cNvPr id="16" name="Text 14"/>
-          <p:cNvSpPr txBox="1"/>
-          <p:nvPr/>
-        </p:nvSpPr>
-        <p:spPr>
-          <a:xfrm>
-            <a:off x="6217920" y="3291840"/>
-            <a:ext cx="2514600" cy="1371600"/>
-          </a:xfrm>
-          <a:prstGeom prst="rect">
-            <a:avLst/>
-          </a:prstGeom>
-          <a:noFill/>
-          <a:ln/>
-        </p:spPr>
-        <p:txBody>
-          <a:bodyPr wrap="square" lIns="0" tIns="0" rIns="0" bIns="0" rtlCol="0" anchor="t"/>
-          <a:lstStyle/>
-          <a:p>
-            <a:pPr indent="0" marL="0">
-              <a:buNone/>
-            </a:pPr>
-            <a:r>
-              <a:rPr lang="en-US" sz="1300" dirty="0">
+              <a:t>Purpose-bound consent per patient</a:t>
+            </a:r>
+            <a:endParaRPr lang="en-US" sz="1350" dirty="0"/>
+          </a:p>
+          <a:p>
+            <a:pPr indent="0" marL="0">
+              <a:spcAft>
+                <a:spcPts val="1200"/>
+              </a:spcAft>
+              <a:buNone/>
+            </a:pPr>
+            <a:r>
+              <a:rPr lang="en-US" sz="1350" dirty="0">
                 <a:solidFill>
                   <a:srgbClr val="2A2F36"/>
                 </a:solidFill>
@@ -9698,141 +9555,19 @@
                 <a:ea typeface="Segoe UI" pitchFamily="34" charset="-122"/>
                 <a:cs typeface="Segoe UI" pitchFamily="34" charset="-120"/>
               </a:rPr>
-              <a:t>Photo-based Indian meal logging, lower-cost sensors, an on-device twin for low connectivity</a:t>
-            </a:r>
-            <a:endParaRPr lang="en-US" sz="1300" dirty="0"/>
-          </a:p>
-        </p:txBody>
-      </p:sp>
-      <p:sp>
-        <p:nvSpPr>
-          <p:cNvPr id="17" name="milestone 4"/>
-          <p:cNvSpPr/>
-          <p:nvPr/>
-        </p:nvSpPr>
-        <p:spPr>
-          <a:xfrm>
-            <a:off x="9025128" y="2011680"/>
-            <a:ext cx="219456" cy="219456"/>
-          </a:xfrm>
-          <a:prstGeom prst="ellipse">
-            <a:avLst/>
-          </a:prstGeom>
-          <a:solidFill>
-            <a:srgbClr val="0F1B2D"/>
-          </a:solidFill>
-          <a:ln w="25400">
-            <a:solidFill>
-              <a:srgbClr val="FFFFFF"/>
-            </a:solidFill>
-            <a:prstDash val="solid"/>
-          </a:ln>
-        </p:spPr>
-      </p:sp>
-      <p:sp>
-        <p:nvSpPr>
-          <p:cNvPr id="18" name="Text 16"/>
-          <p:cNvSpPr txBox="1"/>
-          <p:nvPr/>
-        </p:nvSpPr>
-        <p:spPr>
-          <a:xfrm>
-            <a:off x="9006840" y="2468880"/>
-            <a:ext cx="2560320" cy="256032"/>
-          </a:xfrm>
-          <a:prstGeom prst="rect">
-            <a:avLst/>
-          </a:prstGeom>
-          <a:noFill/>
-          <a:ln/>
-        </p:spPr>
-        <p:txBody>
-          <a:bodyPr wrap="square" lIns="0" tIns="0" rIns="0" bIns="0" rtlCol="0" anchor="t"/>
-          <a:lstStyle/>
-          <a:p>
-            <a:pPr indent="0" marL="0">
-              <a:buNone/>
-            </a:pPr>
-            <a:r>
-              <a:rPr lang="en-US" sz="1000" spc="200" kern="0" dirty="0">
-                <a:solidFill>
-                  <a:srgbClr val="6B7280"/>
-                </a:solidFill>
-                <a:latin typeface="Segoe UI Semibold" pitchFamily="34" charset="0"/>
-                <a:ea typeface="Segoe UI Semibold" pitchFamily="34" charset="-122"/>
-                <a:cs typeface="Segoe UI Semibold" pitchFamily="34" charset="-120"/>
-              </a:rPr>
-              <a:t>BEYOND</a:t>
-            </a:r>
-            <a:endParaRPr lang="en-US" sz="1000" dirty="0"/>
-          </a:p>
-        </p:txBody>
-      </p:sp>
-      <p:sp>
-        <p:nvSpPr>
-          <p:cNvPr id="19" name="Text 17"/>
-          <p:cNvSpPr txBox="1"/>
-          <p:nvPr/>
-        </p:nvSpPr>
-        <p:spPr>
-          <a:xfrm>
-            <a:off x="9006840" y="2788920"/>
-            <a:ext cx="2560320" cy="411480"/>
-          </a:xfrm>
-          <a:prstGeom prst="rect">
-            <a:avLst/>
-          </a:prstGeom>
-          <a:noFill/>
-          <a:ln/>
-        </p:spPr>
-        <p:txBody>
-          <a:bodyPr wrap="square" lIns="0" tIns="0" rIns="0" bIns="0" rtlCol="0" anchor="t"/>
-          <a:lstStyle/>
-          <a:p>
-            <a:pPr indent="0" marL="0">
-              <a:buNone/>
-            </a:pPr>
-            <a:r>
-              <a:rPr lang="en-US" sz="1900" dirty="0">
-                <a:solidFill>
-                  <a:srgbClr val="14213D"/>
-                </a:solidFill>
-                <a:latin typeface="Georgia" pitchFamily="34" charset="0"/>
-                <a:ea typeface="Georgia" pitchFamily="34" charset="-122"/>
-                <a:cs typeface="Georgia" pitchFamily="34" charset="-120"/>
-              </a:rPr>
-              <a:t>More conditions</a:t>
-            </a:r>
-            <a:endParaRPr lang="en-US" sz="1900" dirty="0"/>
-          </a:p>
-        </p:txBody>
-      </p:sp>
-      <p:sp>
-        <p:nvSpPr>
-          <p:cNvPr id="20" name="Text 18"/>
-          <p:cNvSpPr txBox="1"/>
-          <p:nvPr/>
-        </p:nvSpPr>
-        <p:spPr>
-          <a:xfrm>
-            <a:off x="9006840" y="3291840"/>
-            <a:ext cx="2514600" cy="1371600"/>
-          </a:xfrm>
-          <a:prstGeom prst="rect">
-            <a:avLst/>
-          </a:prstGeom>
-          <a:noFill/>
-          <a:ln/>
-        </p:spPr>
-        <p:txBody>
-          <a:bodyPr wrap="square" lIns="0" tIns="0" rIns="0" bIns="0" rtlCol="0" anchor="t"/>
-          <a:lstStyle/>
-          <a:p>
-            <a:pPr indent="0" marL="0">
-              <a:buNone/>
-            </a:pPr>
-            <a:r>
-              <a:rPr lang="en-US" sz="1300" dirty="0">
+              <a:t>Data minimisation and retention limits</a:t>
+            </a:r>
+            <a:endParaRPr lang="en-US" sz="1350" dirty="0"/>
+          </a:p>
+          <a:p>
+            <a:pPr indent="0" marL="0">
+              <a:spcAft>
+                <a:spcPts val="1200"/>
+              </a:spcAft>
+              <a:buNone/>
+            </a:pPr>
+            <a:r>
+              <a:rPr lang="en-US" sz="1350" dirty="0">
                 <a:solidFill>
                   <a:srgbClr val="2A2F36"/>
                 </a:solidFill>
@@ -9840,22 +9575,42 @@
                 <a:ea typeface="Segoe UI" pitchFamily="34" charset="-122"/>
                 <a:cs typeface="Segoe UI" pitchFamily="34" charset="-120"/>
               </a:rPr>
-              <a:t>The same twin framework for hypertension and cardiovascular risk; CDSCO SaMD pathway</a:t>
-            </a:r>
-            <a:endParaRPr lang="en-US" sz="1300" dirty="0"/>
-          </a:p>
-        </p:txBody>
-      </p:sp>
-      <p:sp>
-        <p:nvSpPr>
-          <p:cNvPr id="21" name="rule"/>
+              <a:t>Only open de-identified or fictional data</a:t>
+            </a:r>
+            <a:endParaRPr lang="en-US" sz="1350" dirty="0"/>
+          </a:p>
+          <a:p>
+            <a:pPr indent="0" marL="0">
+              <a:spcAft>
+                <a:spcPts val="1200"/>
+              </a:spcAft>
+              <a:buNone/>
+            </a:pPr>
+            <a:r>
+              <a:rPr lang="en-US" sz="1350" dirty="0">
+                <a:solidFill>
+                  <a:srgbClr val="2A2F36"/>
+                </a:solidFill>
+                <a:latin typeface="Segoe UI" pitchFamily="34" charset="0"/>
+                <a:ea typeface="Segoe UI" pitchFamily="34" charset="-122"/>
+                <a:cs typeface="Segoe UI" pitchFamily="34" charset="-120"/>
+              </a:rPr>
+              <a:t>Decision support: no dosing instructions</a:t>
+            </a:r>
+            <a:endParaRPr lang="en-US" sz="1350" dirty="0"/>
+          </a:p>
+        </p:txBody>
+      </p:sp>
+      <p:sp>
+        <p:nvSpPr>
+          <p:cNvPr id="10" name="rule"/>
           <p:cNvSpPr/>
           <p:nvPr/>
         </p:nvSpPr>
         <p:spPr>
           <a:xfrm>
-            <a:off x="640080" y="4937760"/>
-            <a:ext cx="10911535" cy="0"/>
+            <a:off x="4142232" y="1874520"/>
+            <a:ext cx="0" cy="3931920"/>
           </a:xfrm>
           <a:prstGeom prst="line">
             <a:avLst/>
@@ -9871,44 +9626,111 @@
       </p:sp>
       <p:sp>
         <p:nvSpPr>
-          <p:cNvPr id="22" name="Text 20"/>
-          <p:cNvSpPr txBox="1"/>
-          <p:nvPr/>
-        </p:nvSpPr>
-        <p:spPr>
-          <a:xfrm>
-            <a:off x="640080" y="5166360"/>
-            <a:ext cx="10911535" cy="731520"/>
-          </a:xfrm>
-          <a:prstGeom prst="rect">
-            <a:avLst/>
-          </a:prstGeom>
-          <a:noFill/>
-          <a:ln/>
-        </p:spPr>
-        <p:txBody>
-          <a:bodyPr wrap="square" lIns="0" tIns="0" rIns="0" bIns="0" rtlCol="0" anchor="t"/>
-          <a:lstStyle/>
-          <a:p>
-            <a:pPr indent="0" marL="0">
-              <a:buNone/>
-            </a:pPr>
-            <a:r>
-              <a:rPr lang="en-US" sz="1400" dirty="0">
-                <a:solidFill>
-                  <a:srgbClr val="14213D"/>
+          <p:cNvPr id="11" name="Text 9"/>
+          <p:cNvSpPr txBox="1"/>
+          <p:nvPr/>
+        </p:nvSpPr>
+        <p:spPr>
+          <a:xfrm>
+            <a:off x="8046720" y="1828800"/>
+            <a:ext cx="3383280" cy="256032"/>
+          </a:xfrm>
+          <a:prstGeom prst="rect">
+            <a:avLst/>
+          </a:prstGeom>
+          <a:noFill/>
+          <a:ln/>
+        </p:spPr>
+        <p:txBody>
+          <a:bodyPr wrap="square" lIns="0" tIns="0" rIns="0" bIns="0" rtlCol="0" anchor="t"/>
+          <a:lstStyle/>
+          <a:p>
+            <a:pPr indent="0" marL="0">
+              <a:buNone/>
+            </a:pPr>
+            <a:r>
+              <a:rPr lang="en-US" sz="1050" spc="250" kern="0" dirty="0">
+                <a:solidFill>
+                  <a:srgbClr val="B97A12"/>
                 </a:solidFill>
                 <a:latin typeface="Segoe UI Semibold" pitchFamily="34" charset="0"/>
                 <a:ea typeface="Segoe UI Semibold" pitchFamily="34" charset="-122"/>
                 <a:cs typeface="Segoe UI Semibold" pitchFamily="34" charset="-120"/>
               </a:rPr>
-              <a:t>Who benefits.  </a:t>
-            </a:r>
-            <a:pPr indent="0" marL="0">
-              <a:buNone/>
-            </a:pPr>
-            <a:r>
-              <a:rPr lang="en-US" sz="1400" dirty="0">
+              <a:t>INTEROPERABLE AND OPEN</a:t>
+            </a:r>
+            <a:endParaRPr lang="en-US" sz="1050" dirty="0"/>
+          </a:p>
+        </p:txBody>
+      </p:sp>
+      <p:sp>
+        <p:nvSpPr>
+          <p:cNvPr id="12" name="Text 10"/>
+          <p:cNvSpPr txBox="1"/>
+          <p:nvPr/>
+        </p:nvSpPr>
+        <p:spPr>
+          <a:xfrm>
+            <a:off x="8046720" y="2176272"/>
+            <a:ext cx="3383280" cy="777240"/>
+          </a:xfrm>
+          <a:prstGeom prst="rect">
+            <a:avLst/>
+          </a:prstGeom>
+          <a:noFill/>
+          <a:ln/>
+        </p:spPr>
+        <p:txBody>
+          <a:bodyPr wrap="square" lIns="0" tIns="0" rIns="0" bIns="0" rtlCol="0" anchor="t"/>
+          <a:lstStyle/>
+          <a:p>
+            <a:pPr indent="0" marL="0">
+              <a:buNone/>
+            </a:pPr>
+            <a:r>
+              <a:rPr lang="en-US" sz="1900" dirty="0">
+                <a:solidFill>
+                  <a:srgbClr val="14213D"/>
+                </a:solidFill>
+                <a:latin typeface="Georgia" pitchFamily="34" charset="0"/>
+                <a:ea typeface="Georgia" pitchFamily="34" charset="-122"/>
+                <a:cs typeface="Georgia" pitchFamily="34" charset="-120"/>
+              </a:rPr>
+              <a:t>Ready for ABDM-style exchange</a:t>
+            </a:r>
+            <a:endParaRPr lang="en-US" sz="1900" dirty="0"/>
+          </a:p>
+        </p:txBody>
+      </p:sp>
+      <p:sp>
+        <p:nvSpPr>
+          <p:cNvPr id="13" name="Text 11"/>
+          <p:cNvSpPr txBox="1"/>
+          <p:nvPr/>
+        </p:nvSpPr>
+        <p:spPr>
+          <a:xfrm>
+            <a:off x="8046720" y="3108960"/>
+            <a:ext cx="3337560" cy="2651760"/>
+          </a:xfrm>
+          <a:prstGeom prst="rect">
+            <a:avLst/>
+          </a:prstGeom>
+          <a:noFill/>
+          <a:ln/>
+        </p:spPr>
+        <p:txBody>
+          <a:bodyPr wrap="square" lIns="0" tIns="0" rIns="0" bIns="0" rtlCol="0" anchor="t"/>
+          <a:lstStyle/>
+          <a:p>
+            <a:pPr indent="0" marL="0">
+              <a:spcAft>
+                <a:spcPts val="1200"/>
+              </a:spcAft>
+              <a:buNone/>
+            </a:pPr>
+            <a:r>
+              <a:rPr lang="en-US" sz="1350" dirty="0">
                 <a:solidFill>
                   <a:srgbClr val="2A2F36"/>
                 </a:solidFill>
@@ -9916,11 +9738,94 @@
                 <a:ea typeface="Segoe UI" pitchFamily="34" charset="-122"/>
                 <a:cs typeface="Segoe UI" pitchFamily="34" charset="-120"/>
               </a:rPr>
-              <a:t>Endocrinologists and physicians running remote-monitoring clinics, diabetes educators, and community programmes where every specialist minute counts.</a:t>
-            </a:r>
-            <a:endParaRPr lang="en-US" sz="1400" dirty="0"/>
-          </a:p>
-        </p:txBody>
+              <a:t>HL7 FHIR R4 bundles</a:t>
+            </a:r>
+            <a:endParaRPr lang="en-US" sz="1350" dirty="0"/>
+          </a:p>
+          <a:p>
+            <a:pPr indent="0" marL="0">
+              <a:spcAft>
+                <a:spcPts val="1200"/>
+              </a:spcAft>
+              <a:buNone/>
+            </a:pPr>
+            <a:r>
+              <a:rPr lang="en-US" sz="1350" dirty="0">
+                <a:solidFill>
+                  <a:srgbClr val="2A2F36"/>
+                </a:solidFill>
+                <a:latin typeface="Segoe UI" pitchFamily="34" charset="0"/>
+                <a:ea typeface="Segoe UI" pitchFamily="34" charset="-122"/>
+                <a:cs typeface="Segoe UI" pitchFamily="34" charset="-120"/>
+              </a:rPr>
+              <a:t>LOINC, SNOMED CT, ICD-10, WHO ATC</a:t>
+            </a:r>
+            <a:endParaRPr lang="en-US" sz="1350" dirty="0"/>
+          </a:p>
+          <a:p>
+            <a:pPr indent="0" marL="0">
+              <a:spcAft>
+                <a:spcPts val="1200"/>
+              </a:spcAft>
+              <a:buNone/>
+            </a:pPr>
+            <a:r>
+              <a:rPr lang="en-US" sz="1350" dirty="0">
+                <a:solidFill>
+                  <a:srgbClr val="2A2F36"/>
+                </a:solidFill>
+                <a:latin typeface="Segoe UI" pitchFamily="34" charset="0"/>
+                <a:ea typeface="Segoe UI" pitchFamily="34" charset="-122"/>
+                <a:cs typeface="Segoe UI" pitchFamily="34" charset="-120"/>
+              </a:rPr>
+              <a:t>HL7 CGM summary codes; AGP report</a:t>
+            </a:r>
+            <a:endParaRPr lang="en-US" sz="1350" dirty="0"/>
+          </a:p>
+          <a:p>
+            <a:pPr indent="0" marL="0">
+              <a:spcAft>
+                <a:spcPts val="1200"/>
+              </a:spcAft>
+              <a:buNone/>
+            </a:pPr>
+            <a:r>
+              <a:rPr lang="en-US" sz="1350" dirty="0">
+                <a:solidFill>
+                  <a:srgbClr val="2A2F36"/>
+                </a:solidFill>
+                <a:latin typeface="Segoe UI" pitchFamily="34" charset="0"/>
+                <a:ea typeface="Segoe UI" pitchFamily="34" charset="-122"/>
+                <a:cs typeface="Segoe UI" pitchFamily="34" charset="-120"/>
+              </a:rPr>
+              <a:t>Open source: Python, FastAPI, React</a:t>
+            </a:r>
+            <a:endParaRPr lang="en-US" sz="1350" dirty="0"/>
+          </a:p>
+        </p:txBody>
+      </p:sp>
+      <p:sp>
+        <p:nvSpPr>
+          <p:cNvPr id="14" name="rule"/>
+          <p:cNvSpPr/>
+          <p:nvPr/>
+        </p:nvSpPr>
+        <p:spPr>
+          <a:xfrm>
+            <a:off x="7845552" y="1874520"/>
+            <a:ext cx="0" cy="3931920"/>
+          </a:xfrm>
+          <a:prstGeom prst="line">
+            <a:avLst/>
+          </a:prstGeom>
+          <a:noFill/>
+          <a:ln w="9525">
+            <a:solidFill>
+              <a:srgbClr val="D9DEE5"/>
+            </a:solidFill>
+            <a:prstDash val="solid"/>
+          </a:ln>
+        </p:spPr>
       </p:sp>
       <p:sp>
         <p:nvSpPr>
@@ -9981,6 +9886,826 @@
 <file path=ppt/slides/slide17.xml><?xml version="1.0" encoding="utf-8"?>
 <p:sld xmlns:a="http://schemas.openxmlformats.org/drawingml/2006/main" xmlns:r="http://schemas.openxmlformats.org/officeDocument/2006/relationships" xmlns:p="http://schemas.openxmlformats.org/presentationml/2006/main">
   <p:cSld name="Slide 17">
+    <p:spTree>
+      <p:nvGrpSpPr>
+        <p:cNvPr id="1" name=""/>
+        <p:cNvGrpSpPr/>
+        <p:nvPr/>
+      </p:nvGrpSpPr>
+      <p:grpSpPr>
+        <a:xfrm>
+          <a:off x="0" y="0"/>
+          <a:ext cx="0" cy="0"/>
+          <a:chOff x="0" y="0"/>
+          <a:chExt cx="0" cy="0"/>
+        </a:xfrm>
+      </p:grpSpPr>
+      <p:sp>
+        <p:nvSpPr>
+          <p:cNvPr id="2" name="section label"/>
+          <p:cNvSpPr txBox="1"/>
+          <p:nvPr/>
+        </p:nvSpPr>
+        <p:spPr>
+          <a:xfrm>
+            <a:off x="640080" y="384048"/>
+            <a:ext cx="7315200" cy="256032"/>
+          </a:xfrm>
+          <a:prstGeom prst="rect">
+            <a:avLst/>
+          </a:prstGeom>
+          <a:noFill/>
+          <a:ln/>
+        </p:spPr>
+        <p:txBody>
+          <a:bodyPr wrap="square" lIns="0" tIns="0" rIns="0" bIns="0" rtlCol="0" anchor="t"/>
+          <a:lstStyle/>
+          <a:p>
+            <a:pPr indent="0" marL="0">
+              <a:buNone/>
+            </a:pPr>
+            <a:r>
+              <a:rPr lang="en-US" sz="1050" spc="250" kern="0" dirty="0">
+                <a:solidFill>
+                  <a:srgbClr val="B97A12"/>
+                </a:solidFill>
+                <a:latin typeface="Segoe UI Semibold" pitchFamily="34" charset="0"/>
+                <a:ea typeface="Segoe UI Semibold" pitchFamily="34" charset="-122"/>
+                <a:cs typeface="Segoe UI Semibold" pitchFamily="34" charset="-120"/>
+              </a:rPr>
+              <a:t>06   WHAT COMES NEXT</a:t>
+            </a:r>
+            <a:endParaRPr lang="en-US" sz="1050" dirty="0"/>
+          </a:p>
+        </p:txBody>
+      </p:sp>
+      <p:sp>
+        <p:nvSpPr>
+          <p:cNvPr id="3" name="Text 0"/>
+          <p:cNvSpPr/>
+          <p:nvPr>
+            <p:ph idx="100" type="title" hasCustomPrompt="1"/>
+          </p:nvPr>
+        </p:nvSpPr>
+        <p:spPr>
+          <a:xfrm>
+            <a:off x="640080" y="713232"/>
+            <a:ext cx="10911535" cy="868680"/>
+          </a:xfrm>
+          <a:prstGeom prst="rect">
+            <a:avLst/>
+          </a:prstGeom>
+          <a:noFill/>
+          <a:ln/>
+        </p:spPr>
+        <p:txBody>
+          <a:bodyPr wrap="square" lIns="0" tIns="0" rIns="0" bIns="0" rtlCol="0" anchor="t"/>
+          <a:lstStyle/>
+          <a:p>
+            <a:pPr algn="l" indent="0" marL="0">
+              <a:buNone/>
+            </a:pPr>
+            <a:r>
+              <a:rPr lang="en-US" sz="2700" dirty="0">
+                <a:solidFill>
+                  <a:srgbClr val="14213D"/>
+                </a:solidFill>
+                <a:latin typeface="Georgia" pitchFamily="34" charset="0"/>
+                <a:ea typeface="Georgia" pitchFamily="34" charset="-122"/>
+                <a:cs typeface="Georgia" pitchFamily="34" charset="-120"/>
+              </a:rPr>
+              <a:t>From prototype to clinic</a:t>
+            </a:r>
+            <a:endParaRPr lang="en-US" sz="2700" dirty="0"/>
+          </a:p>
+        </p:txBody>
+      </p:sp>
+      <p:sp>
+        <p:nvSpPr>
+          <p:cNvPr id="4" name="rule"/>
+          <p:cNvSpPr/>
+          <p:nvPr/>
+        </p:nvSpPr>
+        <p:spPr>
+          <a:xfrm>
+            <a:off x="749808" y="2121408"/>
+            <a:ext cx="10362895" cy="0"/>
+          </a:xfrm>
+          <a:prstGeom prst="line">
+            <a:avLst/>
+          </a:prstGeom>
+          <a:noFill/>
+          <a:ln w="15875">
+            <a:solidFill>
+              <a:srgbClr val="D9DEE5"/>
+            </a:solidFill>
+            <a:prstDash val="solid"/>
+          </a:ln>
+        </p:spPr>
+      </p:sp>
+      <p:sp>
+        <p:nvSpPr>
+          <p:cNvPr id="5" name="milestone 1"/>
+          <p:cNvSpPr/>
+          <p:nvPr/>
+        </p:nvSpPr>
+        <p:spPr>
+          <a:xfrm>
+            <a:off x="658368" y="2011680"/>
+            <a:ext cx="219456" cy="219456"/>
+          </a:xfrm>
+          <a:prstGeom prst="ellipse">
+            <a:avLst/>
+          </a:prstGeom>
+          <a:solidFill>
+            <a:srgbClr val="B97A12"/>
+          </a:solidFill>
+          <a:ln w="25400">
+            <a:solidFill>
+              <a:srgbClr val="FFFFFF"/>
+            </a:solidFill>
+            <a:prstDash val="solid"/>
+          </a:ln>
+        </p:spPr>
+      </p:sp>
+      <p:sp>
+        <p:nvSpPr>
+          <p:cNvPr id="6" name="Text 4"/>
+          <p:cNvSpPr txBox="1"/>
+          <p:nvPr/>
+        </p:nvSpPr>
+        <p:spPr>
+          <a:xfrm>
+            <a:off x="640080" y="2468880"/>
+            <a:ext cx="2560320" cy="256032"/>
+          </a:xfrm>
+          <a:prstGeom prst="rect">
+            <a:avLst/>
+          </a:prstGeom>
+          <a:noFill/>
+          <a:ln/>
+        </p:spPr>
+        <p:txBody>
+          <a:bodyPr wrap="square" lIns="0" tIns="0" rIns="0" bIns="0" rtlCol="0" anchor="t"/>
+          <a:lstStyle/>
+          <a:p>
+            <a:pPr indent="0" marL="0">
+              <a:buNone/>
+            </a:pPr>
+            <a:r>
+              <a:rPr lang="en-US" sz="1000" spc="200" kern="0" dirty="0">
+                <a:solidFill>
+                  <a:srgbClr val="B97A12"/>
+                </a:solidFill>
+                <a:latin typeface="Segoe UI Semibold" pitchFamily="34" charset="0"/>
+                <a:ea typeface="Segoe UI Semibold" pitchFamily="34" charset="-122"/>
+                <a:cs typeface="Segoe UI Semibold" pitchFamily="34" charset="-120"/>
+              </a:rPr>
+              <a:t>NOW</a:t>
+            </a:r>
+            <a:endParaRPr lang="en-US" sz="1000" dirty="0"/>
+          </a:p>
+        </p:txBody>
+      </p:sp>
+      <p:sp>
+        <p:nvSpPr>
+          <p:cNvPr id="7" name="Text 5"/>
+          <p:cNvSpPr txBox="1"/>
+          <p:nvPr/>
+        </p:nvSpPr>
+        <p:spPr>
+          <a:xfrm>
+            <a:off x="640080" y="2788920"/>
+            <a:ext cx="2560320" cy="411480"/>
+          </a:xfrm>
+          <a:prstGeom prst="rect">
+            <a:avLst/>
+          </a:prstGeom>
+          <a:noFill/>
+          <a:ln/>
+        </p:spPr>
+        <p:txBody>
+          <a:bodyPr wrap="square" lIns="0" tIns="0" rIns="0" bIns="0" rtlCol="0" anchor="t"/>
+          <a:lstStyle/>
+          <a:p>
+            <a:pPr indent="0" marL="0">
+              <a:buNone/>
+            </a:pPr>
+            <a:r>
+              <a:rPr lang="en-US" sz="1900" dirty="0">
+                <a:solidFill>
+                  <a:srgbClr val="14213D"/>
+                </a:solidFill>
+                <a:latin typeface="Georgia" pitchFamily="34" charset="0"/>
+                <a:ea typeface="Georgia" pitchFamily="34" charset="-122"/>
+                <a:cs typeface="Georgia" pitchFamily="34" charset="-120"/>
+              </a:rPr>
+              <a:t>Validated prototype</a:t>
+            </a:r>
+            <a:endParaRPr lang="en-US" sz="1900" dirty="0"/>
+          </a:p>
+        </p:txBody>
+      </p:sp>
+      <p:sp>
+        <p:nvSpPr>
+          <p:cNvPr id="8" name="Text 6"/>
+          <p:cNvSpPr txBox="1"/>
+          <p:nvPr/>
+        </p:nvSpPr>
+        <p:spPr>
+          <a:xfrm>
+            <a:off x="640080" y="3291840"/>
+            <a:ext cx="2514600" cy="1371600"/>
+          </a:xfrm>
+          <a:prstGeom prst="rect">
+            <a:avLst/>
+          </a:prstGeom>
+          <a:noFill/>
+          <a:ln/>
+        </p:spPr>
+        <p:txBody>
+          <a:bodyPr wrap="square" lIns="0" tIns="0" rIns="0" bIns="0" rtlCol="0" anchor="t"/>
+          <a:lstStyle/>
+          <a:p>
+            <a:pPr indent="0" marL="0">
+              <a:buNone/>
+            </a:pPr>
+            <a:r>
+              <a:rPr lang="en-US" sz="1300" dirty="0">
+                <a:solidFill>
+                  <a:srgbClr val="2A2F36"/>
+                </a:solidFill>
+                <a:latin typeface="Segoe UI" pitchFamily="34" charset="0"/>
+                <a:ea typeface="Segoe UI" pitchFamily="34" charset="-122"/>
+                <a:cs typeface="Segoe UI" pitchFamily="34" charset="-120"/>
+              </a:rPr>
+              <a:t>Real-data evidence, an Indian synthetic cohort, the clinician dashboard with new-patient onboarding, FHIR export</a:t>
+            </a:r>
+            <a:endParaRPr lang="en-US" sz="1300" dirty="0"/>
+          </a:p>
+        </p:txBody>
+      </p:sp>
+      <p:sp>
+        <p:nvSpPr>
+          <p:cNvPr id="9" name="milestone 2"/>
+          <p:cNvSpPr/>
+          <p:nvPr/>
+        </p:nvSpPr>
+        <p:spPr>
+          <a:xfrm>
+            <a:off x="3447288" y="2011680"/>
+            <a:ext cx="219456" cy="219456"/>
+          </a:xfrm>
+          <a:prstGeom prst="ellipse">
+            <a:avLst/>
+          </a:prstGeom>
+          <a:solidFill>
+            <a:srgbClr val="0F1B2D"/>
+          </a:solidFill>
+          <a:ln w="25400">
+            <a:solidFill>
+              <a:srgbClr val="FFFFFF"/>
+            </a:solidFill>
+            <a:prstDash val="solid"/>
+          </a:ln>
+        </p:spPr>
+      </p:sp>
+      <p:sp>
+        <p:nvSpPr>
+          <p:cNvPr id="10" name="Text 8"/>
+          <p:cNvSpPr txBox="1"/>
+          <p:nvPr/>
+        </p:nvSpPr>
+        <p:spPr>
+          <a:xfrm>
+            <a:off x="3429000" y="2468880"/>
+            <a:ext cx="2560320" cy="256032"/>
+          </a:xfrm>
+          <a:prstGeom prst="rect">
+            <a:avLst/>
+          </a:prstGeom>
+          <a:noFill/>
+          <a:ln/>
+        </p:spPr>
+        <p:txBody>
+          <a:bodyPr wrap="square" lIns="0" tIns="0" rIns="0" bIns="0" rtlCol="0" anchor="t"/>
+          <a:lstStyle/>
+          <a:p>
+            <a:pPr indent="0" marL="0">
+              <a:buNone/>
+            </a:pPr>
+            <a:r>
+              <a:rPr lang="en-US" sz="1000" spc="200" kern="0" dirty="0">
+                <a:solidFill>
+                  <a:srgbClr val="6B7280"/>
+                </a:solidFill>
+                <a:latin typeface="Segoe UI Semibold" pitchFamily="34" charset="0"/>
+                <a:ea typeface="Segoe UI Semibold" pitchFamily="34" charset="-122"/>
+                <a:cs typeface="Segoe UI Semibold" pitchFamily="34" charset="-120"/>
+              </a:rPr>
+              <a:t>NEXT SIX MONTHS</a:t>
+            </a:r>
+            <a:endParaRPr lang="en-US" sz="1000" dirty="0"/>
+          </a:p>
+        </p:txBody>
+      </p:sp>
+      <p:sp>
+        <p:nvSpPr>
+          <p:cNvPr id="11" name="Text 9"/>
+          <p:cNvSpPr txBox="1"/>
+          <p:nvPr/>
+        </p:nvSpPr>
+        <p:spPr>
+          <a:xfrm>
+            <a:off x="3429000" y="2788920"/>
+            <a:ext cx="2560320" cy="411480"/>
+          </a:xfrm>
+          <a:prstGeom prst="rect">
+            <a:avLst/>
+          </a:prstGeom>
+          <a:noFill/>
+          <a:ln/>
+        </p:spPr>
+        <p:txBody>
+          <a:bodyPr wrap="square" lIns="0" tIns="0" rIns="0" bIns="0" rtlCol="0" anchor="t"/>
+          <a:lstStyle/>
+          <a:p>
+            <a:pPr indent="0" marL="0">
+              <a:buNone/>
+            </a:pPr>
+            <a:r>
+              <a:rPr lang="en-US" sz="1900" dirty="0">
+                <a:solidFill>
+                  <a:srgbClr val="14213D"/>
+                </a:solidFill>
+                <a:latin typeface="Georgia" pitchFamily="34" charset="0"/>
+                <a:ea typeface="Georgia" pitchFamily="34" charset="-122"/>
+                <a:cs typeface="Georgia" pitchFamily="34" charset="-120"/>
+              </a:rPr>
+              <a:t>Clinical pilot</a:t>
+            </a:r>
+            <a:endParaRPr lang="en-US" sz="1900" dirty="0"/>
+          </a:p>
+        </p:txBody>
+      </p:sp>
+      <p:sp>
+        <p:nvSpPr>
+          <p:cNvPr id="12" name="Text 10"/>
+          <p:cNvSpPr txBox="1"/>
+          <p:nvPr/>
+        </p:nvSpPr>
+        <p:spPr>
+          <a:xfrm>
+            <a:off x="3429000" y="3291840"/>
+            <a:ext cx="2514600" cy="1371600"/>
+          </a:xfrm>
+          <a:prstGeom prst="rect">
+            <a:avLst/>
+          </a:prstGeom>
+          <a:noFill/>
+          <a:ln/>
+        </p:spPr>
+        <p:txBody>
+          <a:bodyPr wrap="square" lIns="0" tIns="0" rIns="0" bIns="0" rtlCol="0" anchor="t"/>
+          <a:lstStyle/>
+          <a:p>
+            <a:pPr indent="0" marL="0">
+              <a:buNone/>
+            </a:pPr>
+            <a:r>
+              <a:rPr lang="en-US" sz="1300" dirty="0">
+                <a:solidFill>
+                  <a:srgbClr val="2A2F36"/>
+                </a:solidFill>
+                <a:latin typeface="Segoe UI" pitchFamily="34" charset="0"/>
+                <a:ea typeface="Segoe UI" pitchFamily="34" charset="-122"/>
+                <a:cs typeface="Segoe UI" pitchFamily="34" charset="-120"/>
+              </a:rPr>
+              <a:t>A remote-monitoring clinic in Bengaluru: alert-guided vs usual care on time in range and lows</a:t>
+            </a:r>
+            <a:endParaRPr lang="en-US" sz="1300" dirty="0"/>
+          </a:p>
+        </p:txBody>
+      </p:sp>
+      <p:sp>
+        <p:nvSpPr>
+          <p:cNvPr id="13" name="milestone 3"/>
+          <p:cNvSpPr/>
+          <p:nvPr/>
+        </p:nvSpPr>
+        <p:spPr>
+          <a:xfrm>
+            <a:off x="6236208" y="2011680"/>
+            <a:ext cx="219456" cy="219456"/>
+          </a:xfrm>
+          <a:prstGeom prst="ellipse">
+            <a:avLst/>
+          </a:prstGeom>
+          <a:solidFill>
+            <a:srgbClr val="0F1B2D"/>
+          </a:solidFill>
+          <a:ln w="25400">
+            <a:solidFill>
+              <a:srgbClr val="FFFFFF"/>
+            </a:solidFill>
+            <a:prstDash val="solid"/>
+          </a:ln>
+        </p:spPr>
+      </p:sp>
+      <p:sp>
+        <p:nvSpPr>
+          <p:cNvPr id="14" name="Text 12"/>
+          <p:cNvSpPr txBox="1"/>
+          <p:nvPr/>
+        </p:nvSpPr>
+        <p:spPr>
+          <a:xfrm>
+            <a:off x="6217920" y="2468880"/>
+            <a:ext cx="2560320" cy="256032"/>
+          </a:xfrm>
+          <a:prstGeom prst="rect">
+            <a:avLst/>
+          </a:prstGeom>
+          <a:noFill/>
+          <a:ln/>
+        </p:spPr>
+        <p:txBody>
+          <a:bodyPr wrap="square" lIns="0" tIns="0" rIns="0" bIns="0" rtlCol="0" anchor="t"/>
+          <a:lstStyle/>
+          <a:p>
+            <a:pPr indent="0" marL="0">
+              <a:buNone/>
+            </a:pPr>
+            <a:r>
+              <a:rPr lang="en-US" sz="1000" spc="200" kern="0" dirty="0">
+                <a:solidFill>
+                  <a:srgbClr val="6B7280"/>
+                </a:solidFill>
+                <a:latin typeface="Segoe UI Semibold" pitchFamily="34" charset="0"/>
+                <a:ea typeface="Segoe UI Semibold" pitchFamily="34" charset="-122"/>
+                <a:cs typeface="Segoe UI Semibold" pitchFamily="34" charset="-120"/>
+              </a:rPr>
+              <a:t>TWELVE MONTHS</a:t>
+            </a:r>
+            <a:endParaRPr lang="en-US" sz="1000" dirty="0"/>
+          </a:p>
+        </p:txBody>
+      </p:sp>
+      <p:sp>
+        <p:nvSpPr>
+          <p:cNvPr id="15" name="Text 13"/>
+          <p:cNvSpPr txBox="1"/>
+          <p:nvPr/>
+        </p:nvSpPr>
+        <p:spPr>
+          <a:xfrm>
+            <a:off x="6217920" y="2788920"/>
+            <a:ext cx="2560320" cy="411480"/>
+          </a:xfrm>
+          <a:prstGeom prst="rect">
+            <a:avLst/>
+          </a:prstGeom>
+          <a:noFill/>
+          <a:ln/>
+        </p:spPr>
+        <p:txBody>
+          <a:bodyPr wrap="square" lIns="0" tIns="0" rIns="0" bIns="0" rtlCol="0" anchor="t"/>
+          <a:lstStyle/>
+          <a:p>
+            <a:pPr indent="0" marL="0">
+              <a:buNone/>
+            </a:pPr>
+            <a:r>
+              <a:rPr lang="en-US" sz="1900" dirty="0">
+                <a:solidFill>
+                  <a:srgbClr val="14213D"/>
+                </a:solidFill>
+                <a:latin typeface="Georgia" pitchFamily="34" charset="0"/>
+                <a:ea typeface="Georgia" pitchFamily="34" charset="-122"/>
+                <a:cs typeface="Georgia" pitchFamily="34" charset="-120"/>
+              </a:rPr>
+              <a:t>Scale</a:t>
+            </a:r>
+            <a:endParaRPr lang="en-US" sz="1900" dirty="0"/>
+          </a:p>
+        </p:txBody>
+      </p:sp>
+      <p:sp>
+        <p:nvSpPr>
+          <p:cNvPr id="16" name="Text 14"/>
+          <p:cNvSpPr txBox="1"/>
+          <p:nvPr/>
+        </p:nvSpPr>
+        <p:spPr>
+          <a:xfrm>
+            <a:off x="6217920" y="3291840"/>
+            <a:ext cx="2514600" cy="1371600"/>
+          </a:xfrm>
+          <a:prstGeom prst="rect">
+            <a:avLst/>
+          </a:prstGeom>
+          <a:noFill/>
+          <a:ln/>
+        </p:spPr>
+        <p:txBody>
+          <a:bodyPr wrap="square" lIns="0" tIns="0" rIns="0" bIns="0" rtlCol="0" anchor="t"/>
+          <a:lstStyle/>
+          <a:p>
+            <a:pPr indent="0" marL="0">
+              <a:buNone/>
+            </a:pPr>
+            <a:r>
+              <a:rPr lang="en-US" sz="1300" dirty="0">
+                <a:solidFill>
+                  <a:srgbClr val="2A2F36"/>
+                </a:solidFill>
+                <a:latin typeface="Segoe UI" pitchFamily="34" charset="0"/>
+                <a:ea typeface="Segoe UI" pitchFamily="34" charset="-122"/>
+                <a:cs typeface="Segoe UI" pitchFamily="34" charset="-120"/>
+              </a:rPr>
+              <a:t>Photo-based Indian meal logging, lower-cost sensors, an on-device twin for low connectivity</a:t>
+            </a:r>
+            <a:endParaRPr lang="en-US" sz="1300" dirty="0"/>
+          </a:p>
+        </p:txBody>
+      </p:sp>
+      <p:sp>
+        <p:nvSpPr>
+          <p:cNvPr id="17" name="milestone 4"/>
+          <p:cNvSpPr/>
+          <p:nvPr/>
+        </p:nvSpPr>
+        <p:spPr>
+          <a:xfrm>
+            <a:off x="9025128" y="2011680"/>
+            <a:ext cx="219456" cy="219456"/>
+          </a:xfrm>
+          <a:prstGeom prst="ellipse">
+            <a:avLst/>
+          </a:prstGeom>
+          <a:solidFill>
+            <a:srgbClr val="0F1B2D"/>
+          </a:solidFill>
+          <a:ln w="25400">
+            <a:solidFill>
+              <a:srgbClr val="FFFFFF"/>
+            </a:solidFill>
+            <a:prstDash val="solid"/>
+          </a:ln>
+        </p:spPr>
+      </p:sp>
+      <p:sp>
+        <p:nvSpPr>
+          <p:cNvPr id="18" name="Text 16"/>
+          <p:cNvSpPr txBox="1"/>
+          <p:nvPr/>
+        </p:nvSpPr>
+        <p:spPr>
+          <a:xfrm>
+            <a:off x="9006840" y="2468880"/>
+            <a:ext cx="2560320" cy="256032"/>
+          </a:xfrm>
+          <a:prstGeom prst="rect">
+            <a:avLst/>
+          </a:prstGeom>
+          <a:noFill/>
+          <a:ln/>
+        </p:spPr>
+        <p:txBody>
+          <a:bodyPr wrap="square" lIns="0" tIns="0" rIns="0" bIns="0" rtlCol="0" anchor="t"/>
+          <a:lstStyle/>
+          <a:p>
+            <a:pPr indent="0" marL="0">
+              <a:buNone/>
+            </a:pPr>
+            <a:r>
+              <a:rPr lang="en-US" sz="1000" spc="200" kern="0" dirty="0">
+                <a:solidFill>
+                  <a:srgbClr val="6B7280"/>
+                </a:solidFill>
+                <a:latin typeface="Segoe UI Semibold" pitchFamily="34" charset="0"/>
+                <a:ea typeface="Segoe UI Semibold" pitchFamily="34" charset="-122"/>
+                <a:cs typeface="Segoe UI Semibold" pitchFamily="34" charset="-120"/>
+              </a:rPr>
+              <a:t>BEYOND</a:t>
+            </a:r>
+            <a:endParaRPr lang="en-US" sz="1000" dirty="0"/>
+          </a:p>
+        </p:txBody>
+      </p:sp>
+      <p:sp>
+        <p:nvSpPr>
+          <p:cNvPr id="19" name="Text 17"/>
+          <p:cNvSpPr txBox="1"/>
+          <p:nvPr/>
+        </p:nvSpPr>
+        <p:spPr>
+          <a:xfrm>
+            <a:off x="9006840" y="2788920"/>
+            <a:ext cx="2560320" cy="411480"/>
+          </a:xfrm>
+          <a:prstGeom prst="rect">
+            <a:avLst/>
+          </a:prstGeom>
+          <a:noFill/>
+          <a:ln/>
+        </p:spPr>
+        <p:txBody>
+          <a:bodyPr wrap="square" lIns="0" tIns="0" rIns="0" bIns="0" rtlCol="0" anchor="t"/>
+          <a:lstStyle/>
+          <a:p>
+            <a:pPr indent="0" marL="0">
+              <a:buNone/>
+            </a:pPr>
+            <a:r>
+              <a:rPr lang="en-US" sz="1900" dirty="0">
+                <a:solidFill>
+                  <a:srgbClr val="14213D"/>
+                </a:solidFill>
+                <a:latin typeface="Georgia" pitchFamily="34" charset="0"/>
+                <a:ea typeface="Georgia" pitchFamily="34" charset="-122"/>
+                <a:cs typeface="Georgia" pitchFamily="34" charset="-120"/>
+              </a:rPr>
+              <a:t>More conditions</a:t>
+            </a:r>
+            <a:endParaRPr lang="en-US" sz="1900" dirty="0"/>
+          </a:p>
+        </p:txBody>
+      </p:sp>
+      <p:sp>
+        <p:nvSpPr>
+          <p:cNvPr id="20" name="Text 18"/>
+          <p:cNvSpPr txBox="1"/>
+          <p:nvPr/>
+        </p:nvSpPr>
+        <p:spPr>
+          <a:xfrm>
+            <a:off x="9006840" y="3291840"/>
+            <a:ext cx="2514600" cy="1371600"/>
+          </a:xfrm>
+          <a:prstGeom prst="rect">
+            <a:avLst/>
+          </a:prstGeom>
+          <a:noFill/>
+          <a:ln/>
+        </p:spPr>
+        <p:txBody>
+          <a:bodyPr wrap="square" lIns="0" tIns="0" rIns="0" bIns="0" rtlCol="0" anchor="t"/>
+          <a:lstStyle/>
+          <a:p>
+            <a:pPr indent="0" marL="0">
+              <a:buNone/>
+            </a:pPr>
+            <a:r>
+              <a:rPr lang="en-US" sz="1300" dirty="0">
+                <a:solidFill>
+                  <a:srgbClr val="2A2F36"/>
+                </a:solidFill>
+                <a:latin typeface="Segoe UI" pitchFamily="34" charset="0"/>
+                <a:ea typeface="Segoe UI" pitchFamily="34" charset="-122"/>
+                <a:cs typeface="Segoe UI" pitchFamily="34" charset="-120"/>
+              </a:rPr>
+              <a:t>The same twin framework for hypertension and cardiovascular risk; CDSCO SaMD pathway</a:t>
+            </a:r>
+            <a:endParaRPr lang="en-US" sz="1300" dirty="0"/>
+          </a:p>
+        </p:txBody>
+      </p:sp>
+      <p:sp>
+        <p:nvSpPr>
+          <p:cNvPr id="21" name="rule"/>
+          <p:cNvSpPr/>
+          <p:nvPr/>
+        </p:nvSpPr>
+        <p:spPr>
+          <a:xfrm>
+            <a:off x="640080" y="4937760"/>
+            <a:ext cx="10911535" cy="0"/>
+          </a:xfrm>
+          <a:prstGeom prst="line">
+            <a:avLst/>
+          </a:prstGeom>
+          <a:noFill/>
+          <a:ln w="9525">
+            <a:solidFill>
+              <a:srgbClr val="D9DEE5"/>
+            </a:solidFill>
+            <a:prstDash val="solid"/>
+          </a:ln>
+        </p:spPr>
+      </p:sp>
+      <p:sp>
+        <p:nvSpPr>
+          <p:cNvPr id="22" name="Text 20"/>
+          <p:cNvSpPr txBox="1"/>
+          <p:nvPr/>
+        </p:nvSpPr>
+        <p:spPr>
+          <a:xfrm>
+            <a:off x="640080" y="5166360"/>
+            <a:ext cx="10911535" cy="731520"/>
+          </a:xfrm>
+          <a:prstGeom prst="rect">
+            <a:avLst/>
+          </a:prstGeom>
+          <a:noFill/>
+          <a:ln/>
+        </p:spPr>
+        <p:txBody>
+          <a:bodyPr wrap="square" lIns="0" tIns="0" rIns="0" bIns="0" rtlCol="0" anchor="t"/>
+          <a:lstStyle/>
+          <a:p>
+            <a:pPr indent="0" marL="0">
+              <a:buNone/>
+            </a:pPr>
+            <a:r>
+              <a:rPr lang="en-US" sz="1400" dirty="0">
+                <a:solidFill>
+                  <a:srgbClr val="14213D"/>
+                </a:solidFill>
+                <a:latin typeface="Segoe UI Semibold" pitchFamily="34" charset="0"/>
+                <a:ea typeface="Segoe UI Semibold" pitchFamily="34" charset="-122"/>
+                <a:cs typeface="Segoe UI Semibold" pitchFamily="34" charset="-120"/>
+              </a:rPr>
+              <a:t>Who benefits.  </a:t>
+            </a:r>
+            <a:pPr indent="0" marL="0">
+              <a:buNone/>
+            </a:pPr>
+            <a:r>
+              <a:rPr lang="en-US" sz="1400" dirty="0">
+                <a:solidFill>
+                  <a:srgbClr val="2A2F36"/>
+                </a:solidFill>
+                <a:latin typeface="Segoe UI" pitchFamily="34" charset="0"/>
+                <a:ea typeface="Segoe UI" pitchFamily="34" charset="-122"/>
+                <a:cs typeface="Segoe UI" pitchFamily="34" charset="-120"/>
+              </a:rPr>
+              <a:t>Endocrinologists and physicians running remote-monitoring clinics, diabetes educators, and community programmes where every specialist minute counts.</a:t>
+            </a:r>
+            <a:endParaRPr lang="en-US" sz="1400" dirty="0"/>
+          </a:p>
+        </p:txBody>
+      </p:sp>
+      <p:sp>
+        <p:nvSpPr>
+          <p:cNvPr id="25" name="Slide Number Placeholder 0"/>
+          <p:cNvSpPr>
+            <a:spLocks noGrp="1"/>
+          </p:cNvSpPr>
+          <p:nvPr>
+            <p:ph type="sldNum" sz="quarter" idx="4294967295"/>
+          </p:nvPr>
+        </p:nvSpPr>
+        <p:spPr>
+          <a:xfrm>
+            <a:off x="11002975" y="6446520"/>
+            <a:ext cx="548640" cy="228600"/>
+          </a:xfrm>
+          <a:prstGeom prst="rect">
+            <a:avLst/>
+          </a:prstGeom>
+          <a:extLst>
+            <a:ext uri="{C572A759-6A51-4108-AA02-DFA0A04FC94B}">
+              <ma14:wrappingTextBoxFlag xmlns:ma14="http://schemas.microsoft.com/office/mac/drawingml/2011/main" val="0"/>
+            </a:ext>
+          </a:extLst>
+        </p:spPr>
+        <p:txBody>
+          <a:bodyPr/>
+          <a:lstStyle>
+            <a:lvl1pPr>
+              <a:defRPr sz="900">
+                <a:solidFill>
+                  <a:srgbClr val="9AA3AF"/>
+                </a:solidFill>
+                <a:latin typeface="Segoe UI"/>
+                <a:ea typeface="Segoe UI"/>
+                <a:cs typeface="Segoe UI"/>
+              </a:defRPr>
+            </a:lvl1pPr>
+          </a:lstStyle>
+          <a:p>
+            <a:pPr algn="r"/>
+            <a:fld id="{F7021451-1387-4CA6-816F-3879F97B5CBC}" type="slidenum">
+              <a:rPr b="0" lang="en-US"/>
+              <a:t>17</a:t>
+            </a:fld>
+            <a:endParaRPr lang="en-US"/>
+          </a:p>
+        </p:txBody>
+      </p:sp>
+    </p:spTree>
+  </p:cSld>
+  <p:clrMapOvr>
+    <a:masterClrMapping/>
+  </p:clrMapOvr>
+</p:sld>
+</file>
+
+<file path=ppt/slides/slide18.xml><?xml version="1.0" encoding="utf-8"?>
+<p:sld xmlns:a="http://schemas.openxmlformats.org/drawingml/2006/main" xmlns:r="http://schemas.openxmlformats.org/officeDocument/2006/relationships" xmlns:p="http://schemas.openxmlformats.org/presentationml/2006/main">
+  <p:cSld name="Slide 18">
     <p:spTree>
       <p:nvGrpSpPr>
         <p:cNvPr id="1" name=""/>

--- a/docs/Presentation.pptx
+++ b/docs/Presentation.pptx
@@ -124,19 +124,19 @@
   <p:extLst>
     <p:ext uri="{521415D9-36F7-43E2-AB2F-B90AF26B5E84}">
       <p14:sectionLst xmlns:p14="http://schemas.microsoft.com/office/powerpoint/2010/main">
-        <p14:section name="Opening" id="{39ab578a-5032-c49b-1d99-08bd232643c0}">
+        <p14:section name="Opening" id="{cda7daff-2cb0-ed1a-be30-b0e73a6d736b}">
           <p14:sldIdLst>
             <p14:sldId id="256"/>
             <p14:sldId id="257"/>
           </p14:sldIdLst>
         </p14:section>
-        <p14:section name="Problem" id="{4ca43d6e-fcb9-7e38-e44d-e3127700318a}">
+        <p14:section name="Problem" id="{9792af93-1e63-c841-a382-b521f6b6d828}">
           <p14:sldIdLst>
             <p14:sldId id="258"/>
             <p14:sldId id="259"/>
           </p14:sldIdLst>
         </p14:section>
-        <p14:section name="The twin" id="{8806a3ea-7a35-6c04-ecf0-666e1a98915f}">
+        <p14:section name="The twin" id="{19c63511-8ca9-b3a3-4418-1648b2de0160}">
           <p14:sldIdLst>
             <p14:sldId id="260"/>
             <p14:sldId id="261"/>
@@ -144,14 +144,14 @@
             <p14:sldId id="263"/>
           </p14:sldIdLst>
         </p14:section>
-        <p14:section name="In the clinic" id="{b02d4384-4a2f-5d9d-a336-106df3f536d5}">
+        <p14:section name="In the clinic" id="{70645bee-047e-085a-be31-1d32cef72833}">
           <p14:sldIdLst>
             <p14:sldId id="264"/>
             <p14:sldId id="265"/>
             <p14:sldId id="266"/>
           </p14:sldIdLst>
         </p14:section>
-        <p14:section name="Evidence" id="{d1770f61-f8ee-0e91-a0b5-992c98123dbf}">
+        <p14:section name="Evidence" id="{76b0f7bb-2e4f-1d38-688f-04df844aa5aa}">
           <p14:sldIdLst>
             <p14:sldId id="267"/>
             <p14:sldId id="268"/>
@@ -159,17 +159,17 @@
             <p14:sldId id="270"/>
           </p14:sldIdLst>
         </p14:section>
-        <p14:section name="India" id="{b757b3ab-23ad-224c-2dde-7edfd31abfd5}">
+        <p14:section name="India" id="{1e1d41a3-a7d3-e193-20de-62773d84b548}">
           <p14:sldIdLst>
             <p14:sldId id="271"/>
           </p14:sldIdLst>
         </p14:section>
-        <p14:section name="Next" id="{b5da0390-eb60-944e-cde8-c7ab2efe90e7}">
+        <p14:section name="Next" id="{5ea1ffc2-4aac-34bd-c539-f252cbaa469b}">
           <p14:sldIdLst>
             <p14:sldId id="272"/>
           </p14:sldIdLst>
         </p14:section>
-        <p14:section name="Close" id="{2f7964dd-0095-d1b7-7a07-501c6e84cf6d}">
+        <p14:section name="Close" id="{dc82dabc-1fdc-9096-9e2b-1424659ce066}">
           <p14:sldIdLst>
             <p14:sldId id="273"/>
           </p14:sldIdLst>

--- a/docs/Presentation.pptx
+++ b/docs/Presentation.pptx
@@ -124,19 +124,19 @@
   <p:extLst>
     <p:ext uri="{521415D9-36F7-43E2-AB2F-B90AF26B5E84}">
       <p14:sectionLst xmlns:p14="http://schemas.microsoft.com/office/powerpoint/2010/main">
-        <p14:section name="Opening" id="{cda7daff-2cb0-ed1a-be30-b0e73a6d736b}">
+        <p14:section name="Opening" id="{dbaa2bf8-6f6c-7b1c-2af7-39a0785ba417}">
           <p14:sldIdLst>
             <p14:sldId id="256"/>
             <p14:sldId id="257"/>
           </p14:sldIdLst>
         </p14:section>
-        <p14:section name="Problem" id="{9792af93-1e63-c841-a382-b521f6b6d828}">
+        <p14:section name="Problem" id="{3d467954-4227-62c1-a2ec-0d2a55d5d45e}">
           <p14:sldIdLst>
             <p14:sldId id="258"/>
             <p14:sldId id="259"/>
           </p14:sldIdLst>
         </p14:section>
-        <p14:section name="The twin" id="{19c63511-8ca9-b3a3-4418-1648b2de0160}">
+        <p14:section name="The twin" id="{49e419e4-9430-c1c9-ea3f-4ed07e92c6cc}">
           <p14:sldIdLst>
             <p14:sldId id="260"/>
             <p14:sldId id="261"/>
@@ -144,14 +144,14 @@
             <p14:sldId id="263"/>
           </p14:sldIdLst>
         </p14:section>
-        <p14:section name="In the clinic" id="{70645bee-047e-085a-be31-1d32cef72833}">
+        <p14:section name="In the clinic" id="{7c3ca502-f4e7-17f0-782e-846f174347b7}">
           <p14:sldIdLst>
             <p14:sldId id="264"/>
             <p14:sldId id="265"/>
             <p14:sldId id="266"/>
           </p14:sldIdLst>
         </p14:section>
-        <p14:section name="Evidence" id="{76b0f7bb-2e4f-1d38-688f-04df844aa5aa}">
+        <p14:section name="Evidence" id="{290b25fd-1cbb-8a45-1d45-a6719d9ca90f}">
           <p14:sldIdLst>
             <p14:sldId id="267"/>
             <p14:sldId id="268"/>
@@ -159,17 +159,17 @@
             <p14:sldId id="270"/>
           </p14:sldIdLst>
         </p14:section>
-        <p14:section name="India" id="{1e1d41a3-a7d3-e193-20de-62773d84b548}">
+        <p14:section name="India" id="{e97592d4-5b29-f5cc-26f0-b2e6f85a700e}">
           <p14:sldIdLst>
             <p14:sldId id="271"/>
           </p14:sldIdLst>
         </p14:section>
-        <p14:section name="Next" id="{5ea1ffc2-4aac-34bd-c539-f252cbaa469b}">
+        <p14:section name="Next" id="{343482b4-ab7c-388a-1595-996755382e74}">
           <p14:sldIdLst>
             <p14:sldId id="272"/>
           </p14:sldIdLst>
         </p14:section>
-        <p14:section name="Close" id="{dc82dabc-1fdc-9096-9e2b-1424659ce066}">
+        <p14:section name="Close" id="{3e8b1325-a3ce-0842-62bb-0a291211cbbc}">
           <p14:sldIdLst>
             <p14:sldId id="273"/>
           </p14:sldIdLst>
@@ -10853,6 +10853,23 @@
                 <a:cs typeface="Segoe UI" pitchFamily="34" charset="-120"/>
               </a:rPr>
               <a:t>Team BioT   ·   Anish Karthik Ayyagari   ·   Indian Institute of Technology Kharagpur</a:t>
+            </a:r>
+            <a:endParaRPr lang="en-US" sz="1500" dirty="0"/>
+          </a:p>
+          <a:p>
+            <a:pPr algn="l" indent="0" marL="0">
+              <a:buNone/>
+            </a:pPr>
+            <a:r>
+              <a:rPr lang="en-US" sz="1500" dirty="0">
+                <a:solidFill>
+                  <a:srgbClr val="C9D3E0"/>
+                </a:solidFill>
+                <a:latin typeface="Segoe UI" pitchFamily="34" charset="0"/>
+                <a:ea typeface="Segoe UI" pitchFamily="34" charset="-122"/>
+                <a:cs typeface="Segoe UI" pitchFamily="34" charset="-120"/>
+              </a:rPr>
+              <a:t>github.com/Realmer01/BioT_IIT_Kharagpur</a:t>
             </a:r>
             <a:endParaRPr lang="en-US" sz="1500" dirty="0"/>
           </a:p>
